--- a/cache_city/캐시의_도시_발전기획서.pptx
+++ b/cache_city/캐시의_도시_발전기획서.pptx
@@ -3211,7 +3211,7 @@
         </p:spPr>
         <p:txBody>
           <a:bodyPr wrap="square" anchor="ctr" lIns="18288" rIns="18288" tIns="12801" bIns="12801">
-            <a:spAutoFit/>
+            <a:normAutofit/>
           </a:bodyPr>
           <a:lstStyle/>
           <a:p>
@@ -3251,7 +3251,7 @@
         </p:spPr>
         <p:txBody>
           <a:bodyPr wrap="square" anchor="t" lIns="18288" rIns="18288" tIns="12801" bIns="12801">
-            <a:spAutoFit/>
+            <a:normAutofit/>
           </a:bodyPr>
           <a:lstStyle/>
           <a:p>
@@ -3291,7 +3291,7 @@
         </p:spPr>
         <p:txBody>
           <a:bodyPr wrap="square" anchor="t" lIns="18288" rIns="18288" tIns="12801" bIns="12801">
-            <a:spAutoFit/>
+            <a:normAutofit/>
           </a:bodyPr>
           <a:lstStyle/>
           <a:p>
@@ -3331,7 +3331,7 @@
         </p:spPr>
         <p:txBody>
           <a:bodyPr wrap="square" anchor="t" lIns="18288" rIns="18288" tIns="12801" bIns="12801">
-            <a:spAutoFit/>
+            <a:normAutofit/>
           </a:bodyPr>
           <a:lstStyle/>
           <a:p>
@@ -3419,7 +3419,7 @@
         </p:spPr>
         <p:txBody>
           <a:bodyPr wrap="square" anchor="t" lIns="9144" rIns="9144" tIns="6400" bIns="6400">
-            <a:spAutoFit/>
+            <a:normAutofit/>
           </a:bodyPr>
           <a:lstStyle/>
           <a:p>
@@ -3459,7 +3459,7 @@
         </p:spPr>
         <p:txBody>
           <a:bodyPr wrap="square" anchor="t" lIns="9144" rIns="9144" tIns="6400" bIns="6400">
-            <a:spAutoFit/>
+            <a:normAutofit/>
           </a:bodyPr>
           <a:lstStyle/>
           <a:p>
@@ -3499,7 +3499,7 @@
         </p:spPr>
         <p:txBody>
           <a:bodyPr wrap="square" anchor="t" lIns="9144" rIns="9144" tIns="6400" bIns="6400">
-            <a:spAutoFit/>
+            <a:normAutofit/>
           </a:bodyPr>
           <a:lstStyle/>
           <a:p>
@@ -3550,7 +3550,7 @@
         </p:spPr>
         <p:txBody>
           <a:bodyPr wrap="square" anchor="t" lIns="9144" rIns="9144" tIns="6400" bIns="6400">
-            <a:spAutoFit/>
+            <a:normAutofit/>
           </a:bodyPr>
           <a:lstStyle/>
           <a:p>
@@ -3682,7 +3682,7 @@
         </p:spPr>
         <p:txBody>
           <a:bodyPr wrap="square" anchor="t" lIns="9144" rIns="9144" tIns="6400" bIns="6400">
-            <a:spAutoFit/>
+            <a:normAutofit/>
           </a:bodyPr>
           <a:lstStyle/>
           <a:p>
@@ -3722,7 +3722,7 @@
         </p:spPr>
         <p:txBody>
           <a:bodyPr wrap="square" anchor="t" lIns="9144" rIns="9144" tIns="6400" bIns="6400">
-            <a:spAutoFit/>
+            <a:normAutofit/>
           </a:bodyPr>
           <a:lstStyle/>
           <a:p>
@@ -3762,7 +3762,7 @@
         </p:spPr>
         <p:txBody>
           <a:bodyPr wrap="square" anchor="t" lIns="9144" rIns="9144" tIns="6400" bIns="6400">
-            <a:spAutoFit/>
+            <a:normAutofit/>
           </a:bodyPr>
           <a:lstStyle/>
           <a:p>
@@ -3894,7 +3894,7 @@
         </p:spPr>
         <p:txBody>
           <a:bodyPr wrap="square" anchor="t" lIns="9144" rIns="9144" tIns="6400" bIns="6400">
-            <a:spAutoFit/>
+            <a:normAutofit/>
           </a:bodyPr>
           <a:lstStyle/>
           <a:p>
@@ -3934,7 +3934,7 @@
         </p:spPr>
         <p:txBody>
           <a:bodyPr wrap="square" anchor="t" lIns="9144" rIns="9144" tIns="6400" bIns="6400">
-            <a:spAutoFit/>
+            <a:normAutofit/>
           </a:bodyPr>
           <a:lstStyle/>
           <a:p>
@@ -3974,7 +3974,7 @@
         </p:spPr>
         <p:txBody>
           <a:bodyPr wrap="square" anchor="t" lIns="9144" rIns="9144" tIns="6400" bIns="6400">
-            <a:spAutoFit/>
+            <a:normAutofit/>
           </a:bodyPr>
           <a:lstStyle/>
           <a:p>
@@ -4106,7 +4106,7 @@
         </p:spPr>
         <p:txBody>
           <a:bodyPr wrap="square" anchor="t" lIns="9144" rIns="9144" tIns="6400" bIns="6400">
-            <a:spAutoFit/>
+            <a:normAutofit/>
           </a:bodyPr>
           <a:lstStyle/>
           <a:p>
@@ -4146,7 +4146,7 @@
         </p:spPr>
         <p:txBody>
           <a:bodyPr wrap="square" anchor="t" lIns="9144" rIns="9144" tIns="6400" bIns="6400">
-            <a:spAutoFit/>
+            <a:normAutofit/>
           </a:bodyPr>
           <a:lstStyle/>
           <a:p>
@@ -4186,7 +4186,7 @@
         </p:spPr>
         <p:txBody>
           <a:bodyPr wrap="square" anchor="t" lIns="9144" rIns="9144" tIns="6400" bIns="6400">
-            <a:spAutoFit/>
+            <a:normAutofit/>
           </a:bodyPr>
           <a:lstStyle/>
           <a:p>
@@ -4226,7 +4226,7 @@
         </p:spPr>
         <p:txBody>
           <a:bodyPr wrap="square" anchor="t" lIns="9144" rIns="9144" tIns="6400" bIns="6400">
-            <a:spAutoFit/>
+            <a:normAutofit/>
           </a:bodyPr>
           <a:lstStyle/>
           <a:p>
@@ -4292,7 +4292,7 @@
         </p:spPr>
         <p:txBody>
           <a:bodyPr wrap="square" anchor="t" lIns="18288" rIns="18288" tIns="12801" bIns="12801">
-            <a:spAutoFit/>
+            <a:normAutofit/>
           </a:bodyPr>
           <a:lstStyle/>
           <a:p>
@@ -4332,7 +4332,7 @@
         </p:spPr>
         <p:txBody>
           <a:bodyPr wrap="square" anchor="t" lIns="18288" rIns="18288" tIns="12801" bIns="12801">
-            <a:spAutoFit/>
+            <a:normAutofit/>
           </a:bodyPr>
           <a:lstStyle/>
           <a:p>
@@ -4372,7 +4372,7 @@
         </p:spPr>
         <p:txBody>
           <a:bodyPr wrap="square" anchor="t" lIns="18288" rIns="18288" tIns="12801" bIns="12801">
-            <a:spAutoFit/>
+            <a:normAutofit/>
           </a:bodyPr>
           <a:lstStyle/>
           <a:p>
@@ -4544,7 +4544,7 @@
         </p:spPr>
         <p:txBody>
           <a:bodyPr wrap="square" anchor="t" lIns="9144" rIns="9144" tIns="6400" bIns="6400">
-            <a:spAutoFit/>
+            <a:normAutofit/>
           </a:bodyPr>
           <a:lstStyle/>
           <a:p>
@@ -4584,7 +4584,7 @@
         </p:spPr>
         <p:txBody>
           <a:bodyPr wrap="square" anchor="t" lIns="9144" rIns="9144" tIns="6400" bIns="6400">
-            <a:spAutoFit/>
+            <a:normAutofit/>
           </a:bodyPr>
           <a:lstStyle/>
           <a:p>
@@ -4670,7 +4670,7 @@
         </p:spPr>
         <p:txBody>
           <a:bodyPr wrap="square" anchor="ctr" lIns="9144" rIns="9144" tIns="6400" bIns="6400">
-            <a:spAutoFit/>
+            <a:normAutofit/>
           </a:bodyPr>
           <a:lstStyle/>
           <a:p>
@@ -4710,7 +4710,7 @@
         </p:spPr>
         <p:txBody>
           <a:bodyPr wrap="square" anchor="ctr" lIns="9144" rIns="9144" tIns="6400" bIns="6400">
-            <a:spAutoFit/>
+            <a:normAutofit/>
           </a:bodyPr>
           <a:lstStyle/>
           <a:p>
@@ -4750,7 +4750,7 @@
         </p:spPr>
         <p:txBody>
           <a:bodyPr wrap="square" anchor="ctr" lIns="9144" rIns="9144" tIns="6400" bIns="6400">
-            <a:spAutoFit/>
+            <a:normAutofit/>
           </a:bodyPr>
           <a:lstStyle/>
           <a:p>
@@ -4884,7 +4884,7 @@
         </p:spPr>
         <p:txBody>
           <a:bodyPr wrap="square" anchor="ctr" lIns="9144" rIns="9144" tIns="6400" bIns="6400">
-            <a:spAutoFit/>
+            <a:normAutofit/>
           </a:bodyPr>
           <a:lstStyle/>
           <a:p>
@@ -4924,7 +4924,7 @@
         </p:spPr>
         <p:txBody>
           <a:bodyPr wrap="square" anchor="ctr" lIns="9144" rIns="9144" tIns="6400" bIns="6400">
-            <a:spAutoFit/>
+            <a:normAutofit/>
           </a:bodyPr>
           <a:lstStyle/>
           <a:p>
@@ -4964,7 +4964,7 @@
         </p:spPr>
         <p:txBody>
           <a:bodyPr wrap="square" anchor="ctr" lIns="9144" rIns="9144" tIns="6400" bIns="6400">
-            <a:spAutoFit/>
+            <a:normAutofit/>
           </a:bodyPr>
           <a:lstStyle/>
           <a:p>
@@ -5098,7 +5098,7 @@
         </p:spPr>
         <p:txBody>
           <a:bodyPr wrap="square" anchor="ctr" lIns="9144" rIns="9144" tIns="6400" bIns="6400">
-            <a:spAutoFit/>
+            <a:normAutofit/>
           </a:bodyPr>
           <a:lstStyle/>
           <a:p>
@@ -5138,7 +5138,7 @@
         </p:spPr>
         <p:txBody>
           <a:bodyPr wrap="square" anchor="ctr" lIns="9144" rIns="9144" tIns="6400" bIns="6400">
-            <a:spAutoFit/>
+            <a:normAutofit/>
           </a:bodyPr>
           <a:lstStyle/>
           <a:p>
@@ -5178,7 +5178,7 @@
         </p:spPr>
         <p:txBody>
           <a:bodyPr wrap="square" anchor="ctr" lIns="9144" rIns="9144" tIns="6400" bIns="6400">
-            <a:spAutoFit/>
+            <a:normAutofit/>
           </a:bodyPr>
           <a:lstStyle/>
           <a:p>
@@ -5312,7 +5312,7 @@
         </p:spPr>
         <p:txBody>
           <a:bodyPr wrap="square" anchor="ctr" lIns="9144" rIns="9144" tIns="6400" bIns="6400">
-            <a:spAutoFit/>
+            <a:normAutofit/>
           </a:bodyPr>
           <a:lstStyle/>
           <a:p>
@@ -5352,7 +5352,7 @@
         </p:spPr>
         <p:txBody>
           <a:bodyPr wrap="square" anchor="ctr" lIns="9144" rIns="9144" tIns="6400" bIns="6400">
-            <a:spAutoFit/>
+            <a:normAutofit/>
           </a:bodyPr>
           <a:lstStyle/>
           <a:p>
@@ -5392,7 +5392,7 @@
         </p:spPr>
         <p:txBody>
           <a:bodyPr wrap="square" anchor="ctr" lIns="9144" rIns="9144" tIns="6400" bIns="6400">
-            <a:spAutoFit/>
+            <a:normAutofit/>
           </a:bodyPr>
           <a:lstStyle/>
           <a:p>
@@ -5526,7 +5526,7 @@
         </p:spPr>
         <p:txBody>
           <a:bodyPr wrap="square" anchor="ctr" lIns="9144" rIns="9144" tIns="6400" bIns="6400">
-            <a:spAutoFit/>
+            <a:normAutofit/>
           </a:bodyPr>
           <a:lstStyle/>
           <a:p>
@@ -5566,7 +5566,7 @@
         </p:spPr>
         <p:txBody>
           <a:bodyPr wrap="square" anchor="ctr" lIns="9144" rIns="9144" tIns="6400" bIns="6400">
-            <a:spAutoFit/>
+            <a:normAutofit/>
           </a:bodyPr>
           <a:lstStyle/>
           <a:p>
@@ -5606,7 +5606,7 @@
         </p:spPr>
         <p:txBody>
           <a:bodyPr wrap="square" anchor="ctr" lIns="9144" rIns="9144" tIns="6400" bIns="6400">
-            <a:spAutoFit/>
+            <a:normAutofit/>
           </a:bodyPr>
           <a:lstStyle/>
           <a:p>
@@ -5740,7 +5740,7 @@
         </p:spPr>
         <p:txBody>
           <a:bodyPr wrap="square" anchor="ctr" lIns="9144" rIns="9144" tIns="6400" bIns="6400">
-            <a:spAutoFit/>
+            <a:normAutofit/>
           </a:bodyPr>
           <a:lstStyle/>
           <a:p>
@@ -5780,7 +5780,7 @@
         </p:spPr>
         <p:txBody>
           <a:bodyPr wrap="square" anchor="ctr" lIns="9144" rIns="9144" tIns="6400" bIns="6400">
-            <a:spAutoFit/>
+            <a:normAutofit/>
           </a:bodyPr>
           <a:lstStyle/>
           <a:p>
@@ -5820,7 +5820,7 @@
         </p:spPr>
         <p:txBody>
           <a:bodyPr wrap="square" anchor="ctr" lIns="9144" rIns="9144" tIns="6400" bIns="6400">
-            <a:spAutoFit/>
+            <a:normAutofit/>
           </a:bodyPr>
           <a:lstStyle/>
           <a:p>
@@ -5954,7 +5954,7 @@
         </p:spPr>
         <p:txBody>
           <a:bodyPr wrap="square" anchor="ctr" lIns="9144" rIns="9144" tIns="6400" bIns="6400">
-            <a:spAutoFit/>
+            <a:normAutofit/>
           </a:bodyPr>
           <a:lstStyle/>
           <a:p>
@@ -5994,7 +5994,7 @@
         </p:spPr>
         <p:txBody>
           <a:bodyPr wrap="square" anchor="ctr" lIns="9144" rIns="9144" tIns="6400" bIns="6400">
-            <a:spAutoFit/>
+            <a:normAutofit/>
           </a:bodyPr>
           <a:lstStyle/>
           <a:p>
@@ -6034,7 +6034,7 @@
         </p:spPr>
         <p:txBody>
           <a:bodyPr wrap="square" anchor="ctr" lIns="9144" rIns="9144" tIns="6400" bIns="6400">
-            <a:spAutoFit/>
+            <a:normAutofit/>
           </a:bodyPr>
           <a:lstStyle/>
           <a:p>
@@ -6168,7 +6168,7 @@
         </p:spPr>
         <p:txBody>
           <a:bodyPr wrap="square" anchor="ctr" lIns="9144" rIns="9144" tIns="6400" bIns="6400">
-            <a:spAutoFit/>
+            <a:normAutofit/>
           </a:bodyPr>
           <a:lstStyle/>
           <a:p>
@@ -6208,7 +6208,7 @@
         </p:spPr>
         <p:txBody>
           <a:bodyPr wrap="square" anchor="ctr" lIns="9144" rIns="9144" tIns="6400" bIns="6400">
-            <a:spAutoFit/>
+            <a:normAutofit/>
           </a:bodyPr>
           <a:lstStyle/>
           <a:p>
@@ -6248,7 +6248,7 @@
         </p:spPr>
         <p:txBody>
           <a:bodyPr wrap="square" anchor="ctr" lIns="9144" rIns="9144" tIns="6400" bIns="6400">
-            <a:spAutoFit/>
+            <a:normAutofit/>
           </a:bodyPr>
           <a:lstStyle/>
           <a:p>
@@ -6314,7 +6314,7 @@
         </p:spPr>
         <p:txBody>
           <a:bodyPr wrap="square" anchor="t" lIns="18288" rIns="18288" tIns="12801" bIns="12801">
-            <a:spAutoFit/>
+            <a:normAutofit/>
           </a:bodyPr>
           <a:lstStyle/>
           <a:p>
@@ -6354,7 +6354,7 @@
         </p:spPr>
         <p:txBody>
           <a:bodyPr wrap="square" anchor="t" lIns="18288" rIns="18288" tIns="12801" bIns="12801">
-            <a:spAutoFit/>
+            <a:normAutofit/>
           </a:bodyPr>
           <a:lstStyle/>
           <a:p>
@@ -6394,7 +6394,7 @@
         </p:spPr>
         <p:txBody>
           <a:bodyPr wrap="square" anchor="t" lIns="18288" rIns="18288" tIns="12801" bIns="12801">
-            <a:spAutoFit/>
+            <a:normAutofit/>
           </a:bodyPr>
           <a:lstStyle/>
           <a:p>
@@ -6566,7 +6566,7 @@
         </p:spPr>
         <p:txBody>
           <a:bodyPr wrap="square" anchor="t" lIns="9144" rIns="9144" tIns="6400" bIns="6400">
-            <a:spAutoFit/>
+            <a:normAutofit/>
           </a:bodyPr>
           <a:lstStyle/>
           <a:p>
@@ -6606,7 +6606,7 @@
         </p:spPr>
         <p:txBody>
           <a:bodyPr wrap="square" anchor="t" lIns="9144" rIns="9144" tIns="6400" bIns="6400">
-            <a:spAutoFit/>
+            <a:normAutofit/>
           </a:bodyPr>
           <a:lstStyle/>
           <a:p>
@@ -6738,7 +6738,7 @@
         </p:spPr>
         <p:txBody>
           <a:bodyPr wrap="square" anchor="t" lIns="9144" rIns="9144" tIns="6400" bIns="6400">
-            <a:spAutoFit/>
+            <a:normAutofit/>
           </a:bodyPr>
           <a:lstStyle/>
           <a:p>
@@ -6778,7 +6778,7 @@
         </p:spPr>
         <p:txBody>
           <a:bodyPr wrap="square" anchor="t" lIns="9144" rIns="9144" tIns="6400" bIns="6400">
-            <a:spAutoFit/>
+            <a:normAutofit/>
           </a:bodyPr>
           <a:lstStyle/>
           <a:p>
@@ -6900,7 +6900,7 @@
         </p:spPr>
         <p:txBody>
           <a:bodyPr wrap="square" anchor="t" lIns="9144" rIns="9144" tIns="6400" bIns="6400">
-            <a:spAutoFit/>
+            <a:normAutofit/>
           </a:bodyPr>
           <a:lstStyle/>
           <a:p>
@@ -6940,7 +6940,7 @@
         </p:spPr>
         <p:txBody>
           <a:bodyPr wrap="square" anchor="t" lIns="9144" rIns="9144" tIns="6400" bIns="6400">
-            <a:spAutoFit/>
+            <a:normAutofit/>
           </a:bodyPr>
           <a:lstStyle/>
           <a:p>
@@ -7072,7 +7072,7 @@
         </p:spPr>
         <p:txBody>
           <a:bodyPr wrap="square" anchor="t" lIns="9144" rIns="9144" tIns="6400" bIns="6400">
-            <a:spAutoFit/>
+            <a:normAutofit/>
           </a:bodyPr>
           <a:lstStyle/>
           <a:p>
@@ -7112,7 +7112,7 @@
         </p:spPr>
         <p:txBody>
           <a:bodyPr wrap="square" anchor="t" lIns="9144" rIns="9144" tIns="6400" bIns="6400">
-            <a:spAutoFit/>
+            <a:normAutofit/>
           </a:bodyPr>
           <a:lstStyle/>
           <a:p>
@@ -7234,7 +7234,7 @@
         </p:spPr>
         <p:txBody>
           <a:bodyPr wrap="square" anchor="t" lIns="9144" rIns="9144" tIns="6400" bIns="6400">
-            <a:spAutoFit/>
+            <a:normAutofit/>
           </a:bodyPr>
           <a:lstStyle/>
           <a:p>
@@ -7274,7 +7274,7 @@
         </p:spPr>
         <p:txBody>
           <a:bodyPr wrap="square" anchor="t" lIns="9144" rIns="9144" tIns="6400" bIns="6400">
-            <a:spAutoFit/>
+            <a:normAutofit/>
           </a:bodyPr>
           <a:lstStyle/>
           <a:p>
@@ -7406,7 +7406,7 @@
         </p:spPr>
         <p:txBody>
           <a:bodyPr wrap="square" anchor="t" lIns="9144" rIns="9144" tIns="6400" bIns="6400">
-            <a:spAutoFit/>
+            <a:normAutofit/>
           </a:bodyPr>
           <a:lstStyle/>
           <a:p>
@@ -7446,7 +7446,7 @@
         </p:spPr>
         <p:txBody>
           <a:bodyPr wrap="square" anchor="t" lIns="9144" rIns="9144" tIns="6400" bIns="6400">
-            <a:spAutoFit/>
+            <a:normAutofit/>
           </a:bodyPr>
           <a:lstStyle/>
           <a:p>
@@ -7568,7 +7568,7 @@
         </p:spPr>
         <p:txBody>
           <a:bodyPr wrap="square" anchor="t" lIns="9144" rIns="9144" tIns="6400" bIns="6400">
-            <a:spAutoFit/>
+            <a:normAutofit/>
           </a:bodyPr>
           <a:lstStyle/>
           <a:p>
@@ -7608,7 +7608,7 @@
         </p:spPr>
         <p:txBody>
           <a:bodyPr wrap="square" anchor="t" lIns="9144" rIns="9144" tIns="6400" bIns="6400">
-            <a:spAutoFit/>
+            <a:normAutofit/>
           </a:bodyPr>
           <a:lstStyle/>
           <a:p>
@@ -7740,7 +7740,7 @@
         </p:spPr>
         <p:txBody>
           <a:bodyPr wrap="square" anchor="t" lIns="9144" rIns="9144" tIns="6400" bIns="6400">
-            <a:spAutoFit/>
+            <a:normAutofit/>
           </a:bodyPr>
           <a:lstStyle/>
           <a:p>
@@ -7780,7 +7780,7 @@
         </p:spPr>
         <p:txBody>
           <a:bodyPr wrap="square" anchor="t" lIns="9144" rIns="9144" tIns="6400" bIns="6400">
-            <a:spAutoFit/>
+            <a:normAutofit/>
           </a:bodyPr>
           <a:lstStyle/>
           <a:p>
@@ -7902,7 +7902,7 @@
         </p:spPr>
         <p:txBody>
           <a:bodyPr wrap="square" anchor="t" lIns="9144" rIns="9144" tIns="6400" bIns="6400">
-            <a:spAutoFit/>
+            <a:normAutofit/>
           </a:bodyPr>
           <a:lstStyle/>
           <a:p>
@@ -7942,7 +7942,7 @@
         </p:spPr>
         <p:txBody>
           <a:bodyPr wrap="square" anchor="t" lIns="9144" rIns="9144" tIns="6400" bIns="6400">
-            <a:spAutoFit/>
+            <a:normAutofit/>
           </a:bodyPr>
           <a:lstStyle/>
           <a:p>
@@ -8074,7 +8074,7 @@
         </p:spPr>
         <p:txBody>
           <a:bodyPr wrap="square" anchor="t" lIns="9144" rIns="9144" tIns="6400" bIns="6400">
-            <a:spAutoFit/>
+            <a:normAutofit/>
           </a:bodyPr>
           <a:lstStyle/>
           <a:p>
@@ -8114,7 +8114,7 @@
         </p:spPr>
         <p:txBody>
           <a:bodyPr wrap="square" anchor="t" lIns="9144" rIns="9144" tIns="6400" bIns="6400">
-            <a:spAutoFit/>
+            <a:normAutofit/>
           </a:bodyPr>
           <a:lstStyle/>
           <a:p>
@@ -8236,7 +8236,7 @@
         </p:spPr>
         <p:txBody>
           <a:bodyPr wrap="square" anchor="t" lIns="9144" rIns="9144" tIns="6400" bIns="6400">
-            <a:spAutoFit/>
+            <a:normAutofit/>
           </a:bodyPr>
           <a:lstStyle/>
           <a:p>
@@ -8276,7 +8276,7 @@
         </p:spPr>
         <p:txBody>
           <a:bodyPr wrap="square" anchor="t" lIns="9144" rIns="9144" tIns="6400" bIns="6400">
-            <a:spAutoFit/>
+            <a:normAutofit/>
           </a:bodyPr>
           <a:lstStyle/>
           <a:p>
@@ -8342,7 +8342,7 @@
         </p:spPr>
         <p:txBody>
           <a:bodyPr wrap="square" anchor="t" lIns="18288" rIns="18288" tIns="12801" bIns="12801">
-            <a:spAutoFit/>
+            <a:normAutofit/>
           </a:bodyPr>
           <a:lstStyle/>
           <a:p>
@@ -8382,7 +8382,7 @@
         </p:spPr>
         <p:txBody>
           <a:bodyPr wrap="square" anchor="t" lIns="18288" rIns="18288" tIns="12801" bIns="12801">
-            <a:spAutoFit/>
+            <a:normAutofit/>
           </a:bodyPr>
           <a:lstStyle/>
           <a:p>
@@ -8422,7 +8422,7 @@
         </p:spPr>
         <p:txBody>
           <a:bodyPr wrap="square" anchor="t" lIns="18288" rIns="18288" tIns="12801" bIns="12801">
-            <a:spAutoFit/>
+            <a:normAutofit/>
           </a:bodyPr>
           <a:lstStyle/>
           <a:p>
@@ -8594,7 +8594,7 @@
         </p:spPr>
         <p:txBody>
           <a:bodyPr wrap="square" anchor="t" lIns="9144" rIns="9144" tIns="6400" bIns="6400">
-            <a:spAutoFit/>
+            <a:normAutofit/>
           </a:bodyPr>
           <a:lstStyle/>
           <a:p>
@@ -8634,7 +8634,7 @@
         </p:spPr>
         <p:txBody>
           <a:bodyPr wrap="square" anchor="t" lIns="9144" rIns="9144" tIns="6400" bIns="6400">
-            <a:spAutoFit/>
+            <a:normAutofit/>
           </a:bodyPr>
           <a:lstStyle/>
           <a:p>
@@ -8674,7 +8674,7 @@
         </p:spPr>
         <p:txBody>
           <a:bodyPr wrap="square" anchor="t" lIns="9144" rIns="9144" tIns="6400" bIns="6400">
-            <a:spAutoFit/>
+            <a:normAutofit/>
           </a:bodyPr>
           <a:lstStyle/>
           <a:p>
@@ -8760,7 +8760,7 @@
         </p:spPr>
         <p:txBody>
           <a:bodyPr wrap="square" anchor="t" lIns="9144" rIns="9144" tIns="6400" bIns="6400">
-            <a:spAutoFit/>
+            <a:normAutofit/>
           </a:bodyPr>
           <a:lstStyle/>
           <a:p>
@@ -8800,7 +8800,7 @@
         </p:spPr>
         <p:txBody>
           <a:bodyPr wrap="square" anchor="t" lIns="9144" rIns="9144" tIns="6400" bIns="6400">
-            <a:spAutoFit/>
+            <a:normAutofit/>
           </a:bodyPr>
           <a:lstStyle/>
           <a:p>
@@ -8886,7 +8886,7 @@
         </p:spPr>
         <p:txBody>
           <a:bodyPr wrap="square" anchor="t" lIns="9144" rIns="9144" tIns="6400" bIns="6400">
-            <a:spAutoFit/>
+            <a:normAutofit/>
           </a:bodyPr>
           <a:lstStyle/>
           <a:p>
@@ -8926,7 +8926,7 @@
         </p:spPr>
         <p:txBody>
           <a:bodyPr wrap="square" anchor="t" lIns="9144" rIns="9144" tIns="6400" bIns="6400">
-            <a:spAutoFit/>
+            <a:normAutofit/>
           </a:bodyPr>
           <a:lstStyle/>
           <a:p>
@@ -9012,7 +9012,7 @@
         </p:spPr>
         <p:txBody>
           <a:bodyPr wrap="square" anchor="t" lIns="9144" rIns="9144" tIns="6400" bIns="6400">
-            <a:spAutoFit/>
+            <a:normAutofit/>
           </a:bodyPr>
           <a:lstStyle/>
           <a:p>
@@ -9052,7 +9052,7 @@
         </p:spPr>
         <p:txBody>
           <a:bodyPr wrap="square" anchor="t" lIns="9144" rIns="9144" tIns="6400" bIns="6400">
-            <a:spAutoFit/>
+            <a:normAutofit/>
           </a:bodyPr>
           <a:lstStyle/>
           <a:p>
@@ -9138,7 +9138,7 @@
         </p:spPr>
         <p:txBody>
           <a:bodyPr wrap="square" anchor="t" lIns="9144" rIns="9144" tIns="6400" bIns="6400">
-            <a:spAutoFit/>
+            <a:normAutofit/>
           </a:bodyPr>
           <a:lstStyle/>
           <a:p>
@@ -9178,7 +9178,7 @@
         </p:spPr>
         <p:txBody>
           <a:bodyPr wrap="square" anchor="t" lIns="9144" rIns="9144" tIns="6400" bIns="6400">
-            <a:spAutoFit/>
+            <a:normAutofit/>
           </a:bodyPr>
           <a:lstStyle/>
           <a:p>
@@ -9264,7 +9264,7 @@
         </p:spPr>
         <p:txBody>
           <a:bodyPr wrap="square" anchor="t" lIns="9144" rIns="9144" tIns="6400" bIns="6400">
-            <a:spAutoFit/>
+            <a:normAutofit/>
           </a:bodyPr>
           <a:lstStyle/>
           <a:p>
@@ -9304,7 +9304,7 @@
         </p:spPr>
         <p:txBody>
           <a:bodyPr wrap="square" anchor="t" lIns="9144" rIns="9144" tIns="6400" bIns="6400">
-            <a:spAutoFit/>
+            <a:normAutofit/>
           </a:bodyPr>
           <a:lstStyle/>
           <a:p>
@@ -9534,7 +9534,7 @@
         </p:spPr>
         <p:txBody>
           <a:bodyPr wrap="square" anchor="t" lIns="9144" rIns="9144" tIns="6400" bIns="6400">
-            <a:spAutoFit/>
+            <a:normAutofit/>
           </a:bodyPr>
           <a:lstStyle/>
           <a:p>
@@ -9622,7 +9622,7 @@
         </p:spPr>
         <p:txBody>
           <a:bodyPr wrap="square" anchor="t" lIns="9144" rIns="9144" tIns="6400" bIns="6400">
-            <a:spAutoFit/>
+            <a:normAutofit/>
           </a:bodyPr>
           <a:lstStyle/>
           <a:p>
@@ -9662,7 +9662,7 @@
         </p:spPr>
         <p:txBody>
           <a:bodyPr wrap="square" anchor="t" lIns="9144" rIns="9144" tIns="6400" bIns="6400">
-            <a:spAutoFit/>
+            <a:normAutofit/>
           </a:bodyPr>
           <a:lstStyle/>
           <a:p>
@@ -9797,7 +9797,7 @@
         </p:spPr>
         <p:txBody>
           <a:bodyPr wrap="square" anchor="t" lIns="9144" rIns="9144" tIns="6400" bIns="6400">
-            <a:spAutoFit/>
+            <a:normAutofit/>
           </a:bodyPr>
           <a:lstStyle/>
           <a:p>
@@ -9837,7 +9837,7 @@
         </p:spPr>
         <p:txBody>
           <a:bodyPr wrap="square" anchor="t" lIns="9144" rIns="9144" tIns="6400" bIns="6400">
-            <a:spAutoFit/>
+            <a:normAutofit/>
           </a:bodyPr>
           <a:lstStyle/>
           <a:p>
@@ -9972,7 +9972,7 @@
         </p:spPr>
         <p:txBody>
           <a:bodyPr wrap="square" anchor="t" lIns="9144" rIns="9144" tIns="6400" bIns="6400">
-            <a:spAutoFit/>
+            <a:normAutofit/>
           </a:bodyPr>
           <a:lstStyle/>
           <a:p>
@@ -10012,7 +10012,7 @@
         </p:spPr>
         <p:txBody>
           <a:bodyPr wrap="square" anchor="t" lIns="9144" rIns="9144" tIns="6400" bIns="6400">
-            <a:spAutoFit/>
+            <a:normAutofit/>
           </a:bodyPr>
           <a:lstStyle/>
           <a:p>
@@ -10063,7 +10063,7 @@
         </p:spPr>
         <p:txBody>
           <a:bodyPr wrap="square" anchor="t" lIns="9144" rIns="9144" tIns="6400" bIns="6400">
-            <a:spAutoFit/>
+            <a:normAutofit/>
           </a:bodyPr>
           <a:lstStyle/>
           <a:p>
@@ -10103,7 +10103,7 @@
         </p:spPr>
         <p:txBody>
           <a:bodyPr wrap="square" anchor="t" lIns="9144" rIns="9144" tIns="6400" bIns="6400">
-            <a:spAutoFit/>
+            <a:normAutofit/>
           </a:bodyPr>
           <a:lstStyle/>
           <a:p>
@@ -10143,7 +10143,7 @@
         </p:spPr>
         <p:txBody>
           <a:bodyPr wrap="square" anchor="t" lIns="9144" rIns="9144" tIns="6400" bIns="6400">
-            <a:spAutoFit/>
+            <a:normAutofit/>
           </a:bodyPr>
           <a:lstStyle/>
           <a:p>
@@ -10231,7 +10231,7 @@
         </p:spPr>
         <p:txBody>
           <a:bodyPr wrap="square" anchor="ctr" lIns="9144" rIns="9144" tIns="6400" bIns="6400">
-            <a:spAutoFit/>
+            <a:normAutofit/>
           </a:bodyPr>
           <a:lstStyle/>
           <a:p>
@@ -10271,7 +10271,7 @@
         </p:spPr>
         <p:txBody>
           <a:bodyPr wrap="square" anchor="ctr" lIns="9144" rIns="9144" tIns="6400" bIns="6400">
-            <a:spAutoFit/>
+            <a:normAutofit/>
           </a:bodyPr>
           <a:lstStyle/>
           <a:p>
@@ -10359,7 +10359,7 @@
         </p:spPr>
         <p:txBody>
           <a:bodyPr wrap="square" anchor="ctr" lIns="9144" rIns="9144" tIns="6400" bIns="6400">
-            <a:spAutoFit/>
+            <a:normAutofit/>
           </a:bodyPr>
           <a:lstStyle/>
           <a:p>
@@ -10399,7 +10399,7 @@
         </p:spPr>
         <p:txBody>
           <a:bodyPr wrap="square" anchor="ctr" lIns="9144" rIns="9144" tIns="6400" bIns="6400">
-            <a:spAutoFit/>
+            <a:normAutofit/>
           </a:bodyPr>
           <a:lstStyle/>
           <a:p>
@@ -10487,7 +10487,7 @@
         </p:spPr>
         <p:txBody>
           <a:bodyPr wrap="square" anchor="ctr" lIns="9144" rIns="9144" tIns="6400" bIns="6400">
-            <a:spAutoFit/>
+            <a:normAutofit/>
           </a:bodyPr>
           <a:lstStyle/>
           <a:p>
@@ -10527,7 +10527,7 @@
         </p:spPr>
         <p:txBody>
           <a:bodyPr wrap="square" anchor="ctr" lIns="9144" rIns="9144" tIns="6400" bIns="6400">
-            <a:spAutoFit/>
+            <a:normAutofit/>
           </a:bodyPr>
           <a:lstStyle/>
           <a:p>
@@ -10615,7 +10615,7 @@
         </p:spPr>
         <p:txBody>
           <a:bodyPr wrap="square" anchor="ctr" lIns="9144" rIns="9144" tIns="6400" bIns="6400">
-            <a:spAutoFit/>
+            <a:normAutofit/>
           </a:bodyPr>
           <a:lstStyle/>
           <a:p>
@@ -10655,7 +10655,7 @@
         </p:spPr>
         <p:txBody>
           <a:bodyPr wrap="square" anchor="ctr" lIns="9144" rIns="9144" tIns="6400" bIns="6400">
-            <a:spAutoFit/>
+            <a:normAutofit/>
           </a:bodyPr>
           <a:lstStyle/>
           <a:p>
@@ -10743,7 +10743,7 @@
         </p:spPr>
         <p:txBody>
           <a:bodyPr wrap="square" anchor="ctr" lIns="9144" rIns="9144" tIns="6400" bIns="6400">
-            <a:spAutoFit/>
+            <a:normAutofit/>
           </a:bodyPr>
           <a:lstStyle/>
           <a:p>
@@ -10783,7 +10783,7 @@
         </p:spPr>
         <p:txBody>
           <a:bodyPr wrap="square" anchor="ctr" lIns="9144" rIns="9144" tIns="6400" bIns="6400">
-            <a:spAutoFit/>
+            <a:normAutofit/>
           </a:bodyPr>
           <a:lstStyle/>
           <a:p>
@@ -10869,7 +10869,7 @@
         </p:spPr>
         <p:txBody>
           <a:bodyPr wrap="square" anchor="ctr" lIns="9144" rIns="9144" tIns="6400" bIns="6400">
-            <a:spAutoFit/>
+            <a:normAutofit/>
           </a:bodyPr>
           <a:lstStyle/>
           <a:p>
@@ -10935,7 +10935,7 @@
         </p:spPr>
         <p:txBody>
           <a:bodyPr wrap="square" anchor="t" lIns="18288" rIns="18288" tIns="12801" bIns="12801">
-            <a:spAutoFit/>
+            <a:normAutofit/>
           </a:bodyPr>
           <a:lstStyle/>
           <a:p>
@@ -10975,7 +10975,7 @@
         </p:spPr>
         <p:txBody>
           <a:bodyPr wrap="square" anchor="t" lIns="18288" rIns="18288" tIns="12801" bIns="12801">
-            <a:spAutoFit/>
+            <a:normAutofit/>
           </a:bodyPr>
           <a:lstStyle/>
           <a:p>
@@ -11015,7 +11015,7 @@
         </p:spPr>
         <p:txBody>
           <a:bodyPr wrap="square" anchor="t" lIns="18288" rIns="18288" tIns="12801" bIns="12801">
-            <a:spAutoFit/>
+            <a:normAutofit/>
           </a:bodyPr>
           <a:lstStyle/>
           <a:p>
@@ -11187,7 +11187,7 @@
         </p:spPr>
         <p:txBody>
           <a:bodyPr wrap="square" anchor="t" lIns="9144" rIns="9144" tIns="6400" bIns="6400">
-            <a:spAutoFit/>
+            <a:normAutofit/>
           </a:bodyPr>
           <a:lstStyle/>
           <a:p>
@@ -11227,7 +11227,7 @@
         </p:spPr>
         <p:txBody>
           <a:bodyPr wrap="square" anchor="t" lIns="9144" rIns="9144" tIns="6400" bIns="6400">
-            <a:spAutoFit/>
+            <a:normAutofit/>
           </a:bodyPr>
           <a:lstStyle/>
           <a:p>
@@ -11405,7 +11405,7 @@
         </p:spPr>
         <p:txBody>
           <a:bodyPr wrap="square" anchor="ctr" lIns="9144" rIns="9144" tIns="6400" bIns="6400">
-            <a:spAutoFit/>
+            <a:normAutofit/>
           </a:bodyPr>
           <a:lstStyle/>
           <a:p>
@@ -11445,7 +11445,7 @@
         </p:spPr>
         <p:txBody>
           <a:bodyPr wrap="square" anchor="ctr" lIns="9144" rIns="9144" tIns="6400" bIns="6400">
-            <a:spAutoFit/>
+            <a:normAutofit/>
           </a:bodyPr>
           <a:lstStyle/>
           <a:p>
@@ -11485,7 +11485,7 @@
         </p:spPr>
         <p:txBody>
           <a:bodyPr wrap="square" anchor="t" lIns="9144" rIns="9144" tIns="6400" bIns="6400">
-            <a:spAutoFit/>
+            <a:normAutofit/>
           </a:bodyPr>
           <a:lstStyle/>
           <a:p>
@@ -11525,7 +11525,7 @@
         </p:spPr>
         <p:txBody>
           <a:bodyPr wrap="square" anchor="t" lIns="9144" rIns="9144" tIns="6400" bIns="6400">
-            <a:spAutoFit/>
+            <a:normAutofit/>
           </a:bodyPr>
           <a:lstStyle/>
           <a:p>
@@ -11565,7 +11565,7 @@
         </p:spPr>
         <p:txBody>
           <a:bodyPr wrap="square" anchor="t" lIns="9144" rIns="9144" tIns="6400" bIns="6400">
-            <a:spAutoFit/>
+            <a:normAutofit/>
           </a:bodyPr>
           <a:lstStyle/>
           <a:p>
@@ -11605,7 +11605,7 @@
         </p:spPr>
         <p:txBody>
           <a:bodyPr wrap="square" anchor="t" lIns="9144" rIns="9144" tIns="6400" bIns="6400">
-            <a:spAutoFit/>
+            <a:normAutofit/>
           </a:bodyPr>
           <a:lstStyle/>
           <a:p>
@@ -11645,7 +11645,7 @@
         </p:spPr>
         <p:txBody>
           <a:bodyPr wrap="square" anchor="t" lIns="9144" rIns="9144" tIns="6400" bIns="6400">
-            <a:spAutoFit/>
+            <a:normAutofit/>
           </a:bodyPr>
           <a:lstStyle/>
           <a:p>
@@ -11685,7 +11685,7 @@
         </p:spPr>
         <p:txBody>
           <a:bodyPr wrap="square" anchor="t" lIns="9144" rIns="9144" tIns="6400" bIns="6400">
-            <a:spAutoFit/>
+            <a:normAutofit/>
           </a:bodyPr>
           <a:lstStyle/>
           <a:p>
@@ -11725,7 +11725,7 @@
         </p:spPr>
         <p:txBody>
           <a:bodyPr wrap="square" anchor="t" lIns="9144" rIns="9144" tIns="6400" bIns="6400">
-            <a:spAutoFit/>
+            <a:normAutofit/>
           </a:bodyPr>
           <a:lstStyle/>
           <a:p>
@@ -11765,7 +11765,7 @@
         </p:spPr>
         <p:txBody>
           <a:bodyPr wrap="square" anchor="t" lIns="9144" rIns="9144" tIns="6400" bIns="6400">
-            <a:spAutoFit/>
+            <a:normAutofit/>
           </a:bodyPr>
           <a:lstStyle/>
           <a:p>
@@ -11943,7 +11943,7 @@
         </p:spPr>
         <p:txBody>
           <a:bodyPr wrap="square" anchor="ctr" lIns="9144" rIns="9144" tIns="6400" bIns="6400">
-            <a:spAutoFit/>
+            <a:normAutofit/>
           </a:bodyPr>
           <a:lstStyle/>
           <a:p>
@@ -11983,7 +11983,7 @@
         </p:spPr>
         <p:txBody>
           <a:bodyPr wrap="square" anchor="ctr" lIns="9144" rIns="9144" tIns="6400" bIns="6400">
-            <a:spAutoFit/>
+            <a:normAutofit/>
           </a:bodyPr>
           <a:lstStyle/>
           <a:p>
@@ -12023,7 +12023,7 @@
         </p:spPr>
         <p:txBody>
           <a:bodyPr wrap="square" anchor="t" lIns="9144" rIns="9144" tIns="6400" bIns="6400">
-            <a:spAutoFit/>
+            <a:normAutofit/>
           </a:bodyPr>
           <a:lstStyle/>
           <a:p>
@@ -12063,7 +12063,7 @@
         </p:spPr>
         <p:txBody>
           <a:bodyPr wrap="square" anchor="t" lIns="9144" rIns="9144" tIns="6400" bIns="6400">
-            <a:spAutoFit/>
+            <a:normAutofit/>
           </a:bodyPr>
           <a:lstStyle/>
           <a:p>
@@ -12103,7 +12103,7 @@
         </p:spPr>
         <p:txBody>
           <a:bodyPr wrap="square" anchor="t" lIns="9144" rIns="9144" tIns="6400" bIns="6400">
-            <a:spAutoFit/>
+            <a:normAutofit/>
           </a:bodyPr>
           <a:lstStyle/>
           <a:p>
@@ -12143,7 +12143,7 @@
         </p:spPr>
         <p:txBody>
           <a:bodyPr wrap="square" anchor="t" lIns="9144" rIns="9144" tIns="6400" bIns="6400">
-            <a:spAutoFit/>
+            <a:normAutofit/>
           </a:bodyPr>
           <a:lstStyle/>
           <a:p>
@@ -12183,7 +12183,7 @@
         </p:spPr>
         <p:txBody>
           <a:bodyPr wrap="square" anchor="t" lIns="9144" rIns="9144" tIns="6400" bIns="6400">
-            <a:spAutoFit/>
+            <a:normAutofit/>
           </a:bodyPr>
           <a:lstStyle/>
           <a:p>
@@ -12223,7 +12223,7 @@
         </p:spPr>
         <p:txBody>
           <a:bodyPr wrap="square" anchor="t" lIns="9144" rIns="9144" tIns="6400" bIns="6400">
-            <a:spAutoFit/>
+            <a:normAutofit/>
           </a:bodyPr>
           <a:lstStyle/>
           <a:p>
@@ -12263,7 +12263,7 @@
         </p:spPr>
         <p:txBody>
           <a:bodyPr wrap="square" anchor="t" lIns="9144" rIns="9144" tIns="6400" bIns="6400">
-            <a:spAutoFit/>
+            <a:normAutofit/>
           </a:bodyPr>
           <a:lstStyle/>
           <a:p>
@@ -12303,7 +12303,7 @@
         </p:spPr>
         <p:txBody>
           <a:bodyPr wrap="square" anchor="t" lIns="9144" rIns="9144" tIns="6400" bIns="6400">
-            <a:spAutoFit/>
+            <a:normAutofit/>
           </a:bodyPr>
           <a:lstStyle/>
           <a:p>
@@ -12481,7 +12481,7 @@
         </p:spPr>
         <p:txBody>
           <a:bodyPr wrap="square" anchor="ctr" lIns="9144" rIns="9144" tIns="6400" bIns="6400">
-            <a:spAutoFit/>
+            <a:normAutofit/>
           </a:bodyPr>
           <a:lstStyle/>
           <a:p>
@@ -12521,7 +12521,7 @@
         </p:spPr>
         <p:txBody>
           <a:bodyPr wrap="square" anchor="ctr" lIns="9144" rIns="9144" tIns="6400" bIns="6400">
-            <a:spAutoFit/>
+            <a:normAutofit/>
           </a:bodyPr>
           <a:lstStyle/>
           <a:p>
@@ -12561,7 +12561,7 @@
         </p:spPr>
         <p:txBody>
           <a:bodyPr wrap="square" anchor="t" lIns="9144" rIns="9144" tIns="6400" bIns="6400">
-            <a:spAutoFit/>
+            <a:normAutofit/>
           </a:bodyPr>
           <a:lstStyle/>
           <a:p>
@@ -12601,7 +12601,7 @@
         </p:spPr>
         <p:txBody>
           <a:bodyPr wrap="square" anchor="t" lIns="9144" rIns="9144" tIns="6400" bIns="6400">
-            <a:spAutoFit/>
+            <a:normAutofit/>
           </a:bodyPr>
           <a:lstStyle/>
           <a:p>
@@ -12641,7 +12641,7 @@
         </p:spPr>
         <p:txBody>
           <a:bodyPr wrap="square" anchor="t" lIns="9144" rIns="9144" tIns="6400" bIns="6400">
-            <a:spAutoFit/>
+            <a:normAutofit/>
           </a:bodyPr>
           <a:lstStyle/>
           <a:p>
@@ -12681,7 +12681,7 @@
         </p:spPr>
         <p:txBody>
           <a:bodyPr wrap="square" anchor="t" lIns="9144" rIns="9144" tIns="6400" bIns="6400">
-            <a:spAutoFit/>
+            <a:normAutofit/>
           </a:bodyPr>
           <a:lstStyle/>
           <a:p>
@@ -12721,7 +12721,7 @@
         </p:spPr>
         <p:txBody>
           <a:bodyPr wrap="square" anchor="t" lIns="9144" rIns="9144" tIns="6400" bIns="6400">
-            <a:spAutoFit/>
+            <a:normAutofit/>
           </a:bodyPr>
           <a:lstStyle/>
           <a:p>
@@ -12761,7 +12761,7 @@
         </p:spPr>
         <p:txBody>
           <a:bodyPr wrap="square" anchor="t" lIns="9144" rIns="9144" tIns="6400" bIns="6400">
-            <a:spAutoFit/>
+            <a:normAutofit/>
           </a:bodyPr>
           <a:lstStyle/>
           <a:p>
@@ -12801,7 +12801,7 @@
         </p:spPr>
         <p:txBody>
           <a:bodyPr wrap="square" anchor="t" lIns="9144" rIns="9144" tIns="6400" bIns="6400">
-            <a:spAutoFit/>
+            <a:normAutofit/>
           </a:bodyPr>
           <a:lstStyle/>
           <a:p>
@@ -12841,7 +12841,7 @@
         </p:spPr>
         <p:txBody>
           <a:bodyPr wrap="square" anchor="t" lIns="9144" rIns="9144" tIns="6400" bIns="6400">
-            <a:spAutoFit/>
+            <a:normAutofit/>
           </a:bodyPr>
           <a:lstStyle/>
           <a:p>
@@ -13019,7 +13019,7 @@
         </p:spPr>
         <p:txBody>
           <a:bodyPr wrap="square" anchor="ctr" lIns="9144" rIns="9144" tIns="6400" bIns="6400">
-            <a:spAutoFit/>
+            <a:normAutofit/>
           </a:bodyPr>
           <a:lstStyle/>
           <a:p>
@@ -13059,7 +13059,7 @@
         </p:spPr>
         <p:txBody>
           <a:bodyPr wrap="square" anchor="ctr" lIns="9144" rIns="9144" tIns="6400" bIns="6400">
-            <a:spAutoFit/>
+            <a:normAutofit/>
           </a:bodyPr>
           <a:lstStyle/>
           <a:p>
@@ -13099,7 +13099,7 @@
         </p:spPr>
         <p:txBody>
           <a:bodyPr wrap="square" anchor="t" lIns="9144" rIns="9144" tIns="6400" bIns="6400">
-            <a:spAutoFit/>
+            <a:normAutofit/>
           </a:bodyPr>
           <a:lstStyle/>
           <a:p>
@@ -13139,7 +13139,7 @@
         </p:spPr>
         <p:txBody>
           <a:bodyPr wrap="square" anchor="t" lIns="9144" rIns="9144" tIns="6400" bIns="6400">
-            <a:spAutoFit/>
+            <a:normAutofit/>
           </a:bodyPr>
           <a:lstStyle/>
           <a:p>
@@ -13179,7 +13179,7 @@
         </p:spPr>
         <p:txBody>
           <a:bodyPr wrap="square" anchor="t" lIns="9144" rIns="9144" tIns="6400" bIns="6400">
-            <a:spAutoFit/>
+            <a:normAutofit/>
           </a:bodyPr>
           <a:lstStyle/>
           <a:p>
@@ -13219,7 +13219,7 @@
         </p:spPr>
         <p:txBody>
           <a:bodyPr wrap="square" anchor="t" lIns="9144" rIns="9144" tIns="6400" bIns="6400">
-            <a:spAutoFit/>
+            <a:normAutofit/>
           </a:bodyPr>
           <a:lstStyle/>
           <a:p>
@@ -13259,7 +13259,7 @@
         </p:spPr>
         <p:txBody>
           <a:bodyPr wrap="square" anchor="t" lIns="9144" rIns="9144" tIns="6400" bIns="6400">
-            <a:spAutoFit/>
+            <a:normAutofit/>
           </a:bodyPr>
           <a:lstStyle/>
           <a:p>
@@ -13299,7 +13299,7 @@
         </p:spPr>
         <p:txBody>
           <a:bodyPr wrap="square" anchor="t" lIns="9144" rIns="9144" tIns="6400" bIns="6400">
-            <a:spAutoFit/>
+            <a:normAutofit/>
           </a:bodyPr>
           <a:lstStyle/>
           <a:p>
@@ -13339,7 +13339,7 @@
         </p:spPr>
         <p:txBody>
           <a:bodyPr wrap="square" anchor="t" lIns="9144" rIns="9144" tIns="6400" bIns="6400">
-            <a:spAutoFit/>
+            <a:normAutofit/>
           </a:bodyPr>
           <a:lstStyle/>
           <a:p>
@@ -13379,7 +13379,7 @@
         </p:spPr>
         <p:txBody>
           <a:bodyPr wrap="square" anchor="t" lIns="9144" rIns="9144" tIns="6400" bIns="6400">
-            <a:spAutoFit/>
+            <a:normAutofit/>
           </a:bodyPr>
           <a:lstStyle/>
           <a:p>
@@ -13445,7 +13445,7 @@
         </p:spPr>
         <p:txBody>
           <a:bodyPr wrap="square" anchor="t" lIns="18288" rIns="18288" tIns="12801" bIns="12801">
-            <a:spAutoFit/>
+            <a:normAutofit/>
           </a:bodyPr>
           <a:lstStyle/>
           <a:p>
@@ -13485,7 +13485,7 @@
         </p:spPr>
         <p:txBody>
           <a:bodyPr wrap="square" anchor="t" lIns="18288" rIns="18288" tIns="12801" bIns="12801">
-            <a:spAutoFit/>
+            <a:normAutofit/>
           </a:bodyPr>
           <a:lstStyle/>
           <a:p>
@@ -13525,7 +13525,7 @@
         </p:spPr>
         <p:txBody>
           <a:bodyPr wrap="square" anchor="t" lIns="18288" rIns="18288" tIns="12801" bIns="12801">
-            <a:spAutoFit/>
+            <a:normAutofit/>
           </a:bodyPr>
           <a:lstStyle/>
           <a:p>
@@ -13697,7 +13697,7 @@
         </p:spPr>
         <p:txBody>
           <a:bodyPr wrap="square" anchor="t" lIns="9144" rIns="9144" tIns="6400" bIns="6400">
-            <a:spAutoFit/>
+            <a:normAutofit/>
           </a:bodyPr>
           <a:lstStyle/>
           <a:p>
@@ -13737,7 +13737,7 @@
         </p:spPr>
         <p:txBody>
           <a:bodyPr wrap="square" anchor="t" lIns="9144" rIns="9144" tIns="6400" bIns="6400">
-            <a:spAutoFit/>
+            <a:normAutofit/>
           </a:bodyPr>
           <a:lstStyle/>
           <a:p>
@@ -13915,7 +13915,7 @@
         </p:spPr>
         <p:txBody>
           <a:bodyPr wrap="square" anchor="ctr" lIns="18288" rIns="18288" tIns="12801" bIns="12801">
-            <a:spAutoFit/>
+            <a:normAutofit/>
           </a:bodyPr>
           <a:lstStyle/>
           <a:p>
@@ -13955,7 +13955,7 @@
         </p:spPr>
         <p:txBody>
           <a:bodyPr wrap="square" anchor="ctr" lIns="9144" rIns="9144" tIns="6400" bIns="6400">
-            <a:spAutoFit/>
+            <a:normAutofit/>
           </a:bodyPr>
           <a:lstStyle/>
           <a:p>
@@ -13995,7 +13995,7 @@
         </p:spPr>
         <p:txBody>
           <a:bodyPr wrap="square" anchor="ctr" lIns="9144" rIns="9144" tIns="6400" bIns="6400">
-            <a:spAutoFit/>
+            <a:normAutofit/>
           </a:bodyPr>
           <a:lstStyle/>
           <a:p>
@@ -14035,7 +14035,7 @@
         </p:spPr>
         <p:txBody>
           <a:bodyPr wrap="square" anchor="t" lIns="9144" rIns="9144" tIns="6400" bIns="6400">
-            <a:spAutoFit/>
+            <a:normAutofit/>
           </a:bodyPr>
           <a:lstStyle/>
           <a:p>
@@ -14119,7 +14119,7 @@
         </p:spPr>
         <p:txBody>
           <a:bodyPr wrap="square" anchor="t" lIns="9144" rIns="9144" tIns="6400" bIns="6400">
-            <a:spAutoFit/>
+            <a:normAutofit/>
           </a:bodyPr>
           <a:lstStyle/>
           <a:p>
@@ -14297,7 +14297,7 @@
         </p:spPr>
         <p:txBody>
           <a:bodyPr wrap="square" anchor="ctr" lIns="18288" rIns="18288" tIns="12801" bIns="12801">
-            <a:spAutoFit/>
+            <a:normAutofit/>
           </a:bodyPr>
           <a:lstStyle/>
           <a:p>
@@ -14337,7 +14337,7 @@
         </p:spPr>
         <p:txBody>
           <a:bodyPr wrap="square" anchor="ctr" lIns="9144" rIns="9144" tIns="6400" bIns="6400">
-            <a:spAutoFit/>
+            <a:normAutofit/>
           </a:bodyPr>
           <a:lstStyle/>
           <a:p>
@@ -14377,7 +14377,7 @@
         </p:spPr>
         <p:txBody>
           <a:bodyPr wrap="square" anchor="ctr" lIns="9144" rIns="9144" tIns="6400" bIns="6400">
-            <a:spAutoFit/>
+            <a:normAutofit/>
           </a:bodyPr>
           <a:lstStyle/>
           <a:p>
@@ -14417,7 +14417,7 @@
         </p:spPr>
         <p:txBody>
           <a:bodyPr wrap="square" anchor="t" lIns="9144" rIns="9144" tIns="6400" bIns="6400">
-            <a:spAutoFit/>
+            <a:normAutofit/>
           </a:bodyPr>
           <a:lstStyle/>
           <a:p>
@@ -14501,7 +14501,7 @@
         </p:spPr>
         <p:txBody>
           <a:bodyPr wrap="square" anchor="t" lIns="9144" rIns="9144" tIns="6400" bIns="6400">
-            <a:spAutoFit/>
+            <a:normAutofit/>
           </a:bodyPr>
           <a:lstStyle/>
           <a:p>
@@ -14679,7 +14679,7 @@
         </p:spPr>
         <p:txBody>
           <a:bodyPr wrap="square" anchor="ctr" lIns="18288" rIns="18288" tIns="12801" bIns="12801">
-            <a:spAutoFit/>
+            <a:normAutofit/>
           </a:bodyPr>
           <a:lstStyle/>
           <a:p>
@@ -14719,7 +14719,7 @@
         </p:spPr>
         <p:txBody>
           <a:bodyPr wrap="square" anchor="ctr" lIns="9144" rIns="9144" tIns="6400" bIns="6400">
-            <a:spAutoFit/>
+            <a:normAutofit/>
           </a:bodyPr>
           <a:lstStyle/>
           <a:p>
@@ -14759,7 +14759,7 @@
         </p:spPr>
         <p:txBody>
           <a:bodyPr wrap="square" anchor="ctr" lIns="9144" rIns="9144" tIns="6400" bIns="6400">
-            <a:spAutoFit/>
+            <a:normAutofit/>
           </a:bodyPr>
           <a:lstStyle/>
           <a:p>
@@ -14799,7 +14799,7 @@
         </p:spPr>
         <p:txBody>
           <a:bodyPr wrap="square" anchor="t" lIns="9144" rIns="9144" tIns="6400" bIns="6400">
-            <a:spAutoFit/>
+            <a:normAutofit/>
           </a:bodyPr>
           <a:lstStyle/>
           <a:p>
@@ -14883,7 +14883,7 @@
         </p:spPr>
         <p:txBody>
           <a:bodyPr wrap="square" anchor="t" lIns="9144" rIns="9144" tIns="6400" bIns="6400">
-            <a:spAutoFit/>
+            <a:normAutofit/>
           </a:bodyPr>
           <a:lstStyle/>
           <a:p>
@@ -15061,7 +15061,7 @@
         </p:spPr>
         <p:txBody>
           <a:bodyPr wrap="square" anchor="ctr" lIns="18288" rIns="18288" tIns="12801" bIns="12801">
-            <a:spAutoFit/>
+            <a:normAutofit/>
           </a:bodyPr>
           <a:lstStyle/>
           <a:p>
@@ -15101,7 +15101,7 @@
         </p:spPr>
         <p:txBody>
           <a:bodyPr wrap="square" anchor="ctr" lIns="9144" rIns="9144" tIns="6400" bIns="6400">
-            <a:spAutoFit/>
+            <a:normAutofit/>
           </a:bodyPr>
           <a:lstStyle/>
           <a:p>
@@ -15141,7 +15141,7 @@
         </p:spPr>
         <p:txBody>
           <a:bodyPr wrap="square" anchor="ctr" lIns="9144" rIns="9144" tIns="6400" bIns="6400">
-            <a:spAutoFit/>
+            <a:normAutofit/>
           </a:bodyPr>
           <a:lstStyle/>
           <a:p>
@@ -15181,7 +15181,7 @@
         </p:spPr>
         <p:txBody>
           <a:bodyPr wrap="square" anchor="t" lIns="9144" rIns="9144" tIns="6400" bIns="6400">
-            <a:spAutoFit/>
+            <a:normAutofit/>
           </a:bodyPr>
           <a:lstStyle/>
           <a:p>
@@ -15265,7 +15265,7 @@
         </p:spPr>
         <p:txBody>
           <a:bodyPr wrap="square" anchor="t" lIns="9144" rIns="9144" tIns="6400" bIns="6400">
-            <a:spAutoFit/>
+            <a:normAutofit/>
           </a:bodyPr>
           <a:lstStyle/>
           <a:p>
@@ -15443,7 +15443,7 @@
         </p:spPr>
         <p:txBody>
           <a:bodyPr wrap="square" anchor="ctr" lIns="18288" rIns="18288" tIns="12801" bIns="12801">
-            <a:spAutoFit/>
+            <a:normAutofit/>
           </a:bodyPr>
           <a:lstStyle/>
           <a:p>
@@ -15483,7 +15483,7 @@
         </p:spPr>
         <p:txBody>
           <a:bodyPr wrap="square" anchor="ctr" lIns="9144" rIns="9144" tIns="6400" bIns="6400">
-            <a:spAutoFit/>
+            <a:normAutofit/>
           </a:bodyPr>
           <a:lstStyle/>
           <a:p>
@@ -15523,7 +15523,7 @@
         </p:spPr>
         <p:txBody>
           <a:bodyPr wrap="square" anchor="ctr" lIns="9144" rIns="9144" tIns="6400" bIns="6400">
-            <a:spAutoFit/>
+            <a:normAutofit/>
           </a:bodyPr>
           <a:lstStyle/>
           <a:p>
@@ -15563,7 +15563,7 @@
         </p:spPr>
         <p:txBody>
           <a:bodyPr wrap="square" anchor="t" lIns="9144" rIns="9144" tIns="6400" bIns="6400">
-            <a:spAutoFit/>
+            <a:normAutofit/>
           </a:bodyPr>
           <a:lstStyle/>
           <a:p>
@@ -15647,7 +15647,7 @@
         </p:spPr>
         <p:txBody>
           <a:bodyPr wrap="square" anchor="t" lIns="9144" rIns="9144" tIns="6400" bIns="6400">
-            <a:spAutoFit/>
+            <a:normAutofit/>
           </a:bodyPr>
           <a:lstStyle/>
           <a:p>
@@ -15825,7 +15825,7 @@
         </p:spPr>
         <p:txBody>
           <a:bodyPr wrap="square" anchor="ctr" lIns="18288" rIns="18288" tIns="12801" bIns="12801">
-            <a:spAutoFit/>
+            <a:normAutofit/>
           </a:bodyPr>
           <a:lstStyle/>
           <a:p>
@@ -15865,7 +15865,7 @@
         </p:spPr>
         <p:txBody>
           <a:bodyPr wrap="square" anchor="ctr" lIns="9144" rIns="9144" tIns="6400" bIns="6400">
-            <a:spAutoFit/>
+            <a:normAutofit/>
           </a:bodyPr>
           <a:lstStyle/>
           <a:p>
@@ -15905,7 +15905,7 @@
         </p:spPr>
         <p:txBody>
           <a:bodyPr wrap="square" anchor="ctr" lIns="9144" rIns="9144" tIns="6400" bIns="6400">
-            <a:spAutoFit/>
+            <a:normAutofit/>
           </a:bodyPr>
           <a:lstStyle/>
           <a:p>
@@ -15945,7 +15945,7 @@
         </p:spPr>
         <p:txBody>
           <a:bodyPr wrap="square" anchor="t" lIns="9144" rIns="9144" tIns="6400" bIns="6400">
-            <a:spAutoFit/>
+            <a:normAutofit/>
           </a:bodyPr>
           <a:lstStyle/>
           <a:p>
@@ -16029,7 +16029,7 @@
         </p:spPr>
         <p:txBody>
           <a:bodyPr wrap="square" anchor="t" lIns="9144" rIns="9144" tIns="6400" bIns="6400">
-            <a:spAutoFit/>
+            <a:normAutofit/>
           </a:bodyPr>
           <a:lstStyle/>
           <a:p>
@@ -16207,7 +16207,7 @@
         </p:spPr>
         <p:txBody>
           <a:bodyPr wrap="square" anchor="ctr" lIns="18288" rIns="18288" tIns="12801" bIns="12801">
-            <a:spAutoFit/>
+            <a:normAutofit/>
           </a:bodyPr>
           <a:lstStyle/>
           <a:p>
@@ -16247,7 +16247,7 @@
         </p:spPr>
         <p:txBody>
           <a:bodyPr wrap="square" anchor="ctr" lIns="9144" rIns="9144" tIns="6400" bIns="6400">
-            <a:spAutoFit/>
+            <a:normAutofit/>
           </a:bodyPr>
           <a:lstStyle/>
           <a:p>
@@ -16287,7 +16287,7 @@
         </p:spPr>
         <p:txBody>
           <a:bodyPr wrap="square" anchor="ctr" lIns="9144" rIns="9144" tIns="6400" bIns="6400">
-            <a:spAutoFit/>
+            <a:normAutofit/>
           </a:bodyPr>
           <a:lstStyle/>
           <a:p>
@@ -16327,7 +16327,7 @@
         </p:spPr>
         <p:txBody>
           <a:bodyPr wrap="square" anchor="t" lIns="9144" rIns="9144" tIns="6400" bIns="6400">
-            <a:spAutoFit/>
+            <a:normAutofit/>
           </a:bodyPr>
           <a:lstStyle/>
           <a:p>
@@ -16411,7 +16411,7 @@
         </p:spPr>
         <p:txBody>
           <a:bodyPr wrap="square" anchor="t" lIns="9144" rIns="9144" tIns="6400" bIns="6400">
-            <a:spAutoFit/>
+            <a:normAutofit/>
           </a:bodyPr>
           <a:lstStyle/>
           <a:p>
@@ -16589,7 +16589,7 @@
         </p:spPr>
         <p:txBody>
           <a:bodyPr wrap="square" anchor="ctr" lIns="18288" rIns="18288" tIns="12801" bIns="12801">
-            <a:spAutoFit/>
+            <a:normAutofit/>
           </a:bodyPr>
           <a:lstStyle/>
           <a:p>
@@ -16629,7 +16629,7 @@
         </p:spPr>
         <p:txBody>
           <a:bodyPr wrap="square" anchor="ctr" lIns="9144" rIns="9144" tIns="6400" bIns="6400">
-            <a:spAutoFit/>
+            <a:normAutofit/>
           </a:bodyPr>
           <a:lstStyle/>
           <a:p>
@@ -16669,7 +16669,7 @@
         </p:spPr>
         <p:txBody>
           <a:bodyPr wrap="square" anchor="ctr" lIns="9144" rIns="9144" tIns="6400" bIns="6400">
-            <a:spAutoFit/>
+            <a:normAutofit/>
           </a:bodyPr>
           <a:lstStyle/>
           <a:p>
@@ -16709,7 +16709,7 @@
         </p:spPr>
         <p:txBody>
           <a:bodyPr wrap="square" anchor="t" lIns="9144" rIns="9144" tIns="6400" bIns="6400">
-            <a:spAutoFit/>
+            <a:normAutofit/>
           </a:bodyPr>
           <a:lstStyle/>
           <a:p>
@@ -16793,7 +16793,7 @@
         </p:spPr>
         <p:txBody>
           <a:bodyPr wrap="square" anchor="t" lIns="9144" rIns="9144" tIns="6400" bIns="6400">
-            <a:spAutoFit/>
+            <a:normAutofit/>
           </a:bodyPr>
           <a:lstStyle/>
           <a:p>
@@ -16859,7 +16859,7 @@
         </p:spPr>
         <p:txBody>
           <a:bodyPr wrap="square" anchor="t" lIns="18288" rIns="18288" tIns="12801" bIns="12801">
-            <a:spAutoFit/>
+            <a:normAutofit/>
           </a:bodyPr>
           <a:lstStyle/>
           <a:p>
@@ -16899,7 +16899,7 @@
         </p:spPr>
         <p:txBody>
           <a:bodyPr wrap="square" anchor="t" lIns="18288" rIns="18288" tIns="12801" bIns="12801">
-            <a:spAutoFit/>
+            <a:normAutofit/>
           </a:bodyPr>
           <a:lstStyle/>
           <a:p>
@@ -16939,7 +16939,7 @@
         </p:spPr>
         <p:txBody>
           <a:bodyPr wrap="square" anchor="t" lIns="18288" rIns="18288" tIns="12801" bIns="12801">
-            <a:spAutoFit/>
+            <a:normAutofit/>
           </a:bodyPr>
           <a:lstStyle/>
           <a:p>
@@ -17111,7 +17111,7 @@
         </p:spPr>
         <p:txBody>
           <a:bodyPr wrap="square" anchor="t" lIns="9144" rIns="9144" tIns="6400" bIns="6400">
-            <a:spAutoFit/>
+            <a:normAutofit/>
           </a:bodyPr>
           <a:lstStyle/>
           <a:p>
@@ -17151,7 +17151,7 @@
         </p:spPr>
         <p:txBody>
           <a:bodyPr wrap="square" anchor="t" lIns="9144" rIns="9144" tIns="6400" bIns="6400">
-            <a:spAutoFit/>
+            <a:normAutofit/>
           </a:bodyPr>
           <a:lstStyle/>
           <a:p>
@@ -17281,7 +17281,7 @@
         </p:spPr>
         <p:txBody>
           <a:bodyPr wrap="square" anchor="t" lIns="9144" rIns="9144" tIns="6400" bIns="6400">
-            <a:spAutoFit/>
+            <a:normAutofit/>
           </a:bodyPr>
           <a:lstStyle/>
           <a:p>
@@ -17321,7 +17321,7 @@
         </p:spPr>
         <p:txBody>
           <a:bodyPr wrap="square" anchor="t" lIns="9144" rIns="9144" tIns="6400" bIns="6400">
-            <a:spAutoFit/>
+            <a:normAutofit/>
           </a:bodyPr>
           <a:lstStyle/>
           <a:p>
@@ -17451,7 +17451,7 @@
         </p:spPr>
         <p:txBody>
           <a:bodyPr wrap="square" anchor="t" lIns="9144" rIns="9144" tIns="6400" bIns="6400">
-            <a:spAutoFit/>
+            <a:normAutofit/>
           </a:bodyPr>
           <a:lstStyle/>
           <a:p>
@@ -17491,7 +17491,7 @@
         </p:spPr>
         <p:txBody>
           <a:bodyPr wrap="square" anchor="t" lIns="9144" rIns="9144" tIns="6400" bIns="6400">
-            <a:spAutoFit/>
+            <a:normAutofit/>
           </a:bodyPr>
           <a:lstStyle/>
           <a:p>
@@ -17621,7 +17621,7 @@
         </p:spPr>
         <p:txBody>
           <a:bodyPr wrap="square" anchor="t" lIns="9144" rIns="9144" tIns="6400" bIns="6400">
-            <a:spAutoFit/>
+            <a:normAutofit/>
           </a:bodyPr>
           <a:lstStyle/>
           <a:p>
@@ -17661,7 +17661,7 @@
         </p:spPr>
         <p:txBody>
           <a:bodyPr wrap="square" anchor="t" lIns="9144" rIns="9144" tIns="6400" bIns="6400">
-            <a:spAutoFit/>
+            <a:normAutofit/>
           </a:bodyPr>
           <a:lstStyle/>
           <a:p>
@@ -17747,7 +17747,7 @@
         </p:spPr>
         <p:txBody>
           <a:bodyPr wrap="square" anchor="t" lIns="9144" rIns="9144" tIns="6400" bIns="6400">
-            <a:spAutoFit/>
+            <a:normAutofit/>
           </a:bodyPr>
           <a:lstStyle/>
           <a:p>
@@ -17835,7 +17835,7 @@
         </p:spPr>
         <p:txBody>
           <a:bodyPr wrap="square" anchor="t" lIns="9144" rIns="9144" tIns="6400" bIns="6400">
-            <a:spAutoFit/>
+            <a:normAutofit/>
           </a:bodyPr>
           <a:lstStyle/>
           <a:p>
@@ -17875,7 +17875,7 @@
         </p:spPr>
         <p:txBody>
           <a:bodyPr wrap="square" anchor="t" lIns="9144" rIns="9144" tIns="6400" bIns="6400">
-            <a:spAutoFit/>
+            <a:normAutofit/>
           </a:bodyPr>
           <a:lstStyle/>
           <a:p>
@@ -17963,7 +17963,7 @@
         </p:spPr>
         <p:txBody>
           <a:bodyPr wrap="square" anchor="t" lIns="9144" rIns="9144" tIns="6400" bIns="6400">
-            <a:spAutoFit/>
+            <a:normAutofit/>
           </a:bodyPr>
           <a:lstStyle/>
           <a:p>
@@ -18003,7 +18003,7 @@
         </p:spPr>
         <p:txBody>
           <a:bodyPr wrap="square" anchor="t" lIns="9144" rIns="9144" tIns="6400" bIns="6400">
-            <a:spAutoFit/>
+            <a:normAutofit/>
           </a:bodyPr>
           <a:lstStyle/>
           <a:p>
@@ -18091,7 +18091,7 @@
         </p:spPr>
         <p:txBody>
           <a:bodyPr wrap="square" anchor="t" lIns="9144" rIns="9144" tIns="6400" bIns="6400">
-            <a:spAutoFit/>
+            <a:normAutofit/>
           </a:bodyPr>
           <a:lstStyle/>
           <a:p>
@@ -18131,7 +18131,7 @@
         </p:spPr>
         <p:txBody>
           <a:bodyPr wrap="square" anchor="t" lIns="9144" rIns="9144" tIns="6400" bIns="6400">
-            <a:spAutoFit/>
+            <a:normAutofit/>
           </a:bodyPr>
           <a:lstStyle/>
           <a:p>
@@ -18197,7 +18197,7 @@
         </p:spPr>
         <p:txBody>
           <a:bodyPr wrap="square" anchor="t" lIns="18288" rIns="18288" tIns="12801" bIns="12801">
-            <a:spAutoFit/>
+            <a:normAutofit/>
           </a:bodyPr>
           <a:lstStyle/>
           <a:p>
@@ -18237,7 +18237,7 @@
         </p:spPr>
         <p:txBody>
           <a:bodyPr wrap="square" anchor="t" lIns="18288" rIns="18288" tIns="12801" bIns="12801">
-            <a:spAutoFit/>
+            <a:normAutofit/>
           </a:bodyPr>
           <a:lstStyle/>
           <a:p>
@@ -18277,7 +18277,7 @@
         </p:spPr>
         <p:txBody>
           <a:bodyPr wrap="square" anchor="t" lIns="18288" rIns="18288" tIns="12801" bIns="12801">
-            <a:spAutoFit/>
+            <a:normAutofit/>
           </a:bodyPr>
           <a:lstStyle/>
           <a:p>
@@ -18449,7 +18449,7 @@
         </p:spPr>
         <p:txBody>
           <a:bodyPr wrap="square" anchor="t" lIns="9144" rIns="9144" tIns="6400" bIns="6400">
-            <a:spAutoFit/>
+            <a:normAutofit/>
           </a:bodyPr>
           <a:lstStyle/>
           <a:p>
@@ -18489,7 +18489,7 @@
         </p:spPr>
         <p:txBody>
           <a:bodyPr wrap="square" anchor="t" lIns="9144" rIns="9144" tIns="6400" bIns="6400">
-            <a:spAutoFit/>
+            <a:normAutofit/>
           </a:bodyPr>
           <a:lstStyle/>
           <a:p>
@@ -18577,7 +18577,7 @@
         </p:spPr>
         <p:txBody>
           <a:bodyPr wrap="square" anchor="t" lIns="9144" rIns="9144" tIns="6400" bIns="6400">
-            <a:spAutoFit/>
+            <a:normAutofit/>
           </a:bodyPr>
           <a:lstStyle/>
           <a:p>
@@ -18663,7 +18663,7 @@
         </p:spPr>
         <p:txBody>
           <a:bodyPr wrap="square" anchor="ctr" lIns="9144" rIns="9144" tIns="6400" bIns="6400">
-            <a:spAutoFit/>
+            <a:normAutofit/>
           </a:bodyPr>
           <a:lstStyle/>
           <a:p>
@@ -18703,7 +18703,7 @@
         </p:spPr>
         <p:txBody>
           <a:bodyPr wrap="square" anchor="t" lIns="9144" rIns="9144" tIns="6400" bIns="6400">
-            <a:spAutoFit/>
+            <a:normAutofit/>
           </a:bodyPr>
           <a:lstStyle/>
           <a:p>
@@ -18743,7 +18743,7 @@
         </p:spPr>
         <p:txBody>
           <a:bodyPr wrap="square" anchor="t" lIns="9144" rIns="9144" tIns="6400" bIns="6400">
-            <a:spAutoFit/>
+            <a:normAutofit/>
           </a:bodyPr>
           <a:lstStyle/>
           <a:p>
@@ -18831,7 +18831,7 @@
         </p:spPr>
         <p:txBody>
           <a:bodyPr wrap="square" anchor="t" lIns="9144" rIns="9144" tIns="6400" bIns="6400">
-            <a:spAutoFit/>
+            <a:normAutofit/>
           </a:bodyPr>
           <a:lstStyle/>
           <a:p>
@@ -18917,7 +18917,7 @@
         </p:spPr>
         <p:txBody>
           <a:bodyPr wrap="square" anchor="ctr" lIns="9144" rIns="9144" tIns="6400" bIns="6400">
-            <a:spAutoFit/>
+            <a:normAutofit/>
           </a:bodyPr>
           <a:lstStyle/>
           <a:p>
@@ -18957,7 +18957,7 @@
         </p:spPr>
         <p:txBody>
           <a:bodyPr wrap="square" anchor="t" lIns="9144" rIns="9144" tIns="6400" bIns="6400">
-            <a:spAutoFit/>
+            <a:normAutofit/>
           </a:bodyPr>
           <a:lstStyle/>
           <a:p>
@@ -18997,7 +18997,7 @@
         </p:spPr>
         <p:txBody>
           <a:bodyPr wrap="square" anchor="t" lIns="9144" rIns="9144" tIns="6400" bIns="6400">
-            <a:spAutoFit/>
+            <a:normAutofit/>
           </a:bodyPr>
           <a:lstStyle/>
           <a:p>
@@ -19085,7 +19085,7 @@
         </p:spPr>
         <p:txBody>
           <a:bodyPr wrap="square" anchor="t" lIns="9144" rIns="9144" tIns="6400" bIns="6400">
-            <a:spAutoFit/>
+            <a:normAutofit/>
           </a:bodyPr>
           <a:lstStyle/>
           <a:p>
@@ -19171,7 +19171,7 @@
         </p:spPr>
         <p:txBody>
           <a:bodyPr wrap="square" anchor="ctr" lIns="9144" rIns="9144" tIns="6400" bIns="6400">
-            <a:spAutoFit/>
+            <a:normAutofit/>
           </a:bodyPr>
           <a:lstStyle/>
           <a:p>
@@ -19211,7 +19211,7 @@
         </p:spPr>
         <p:txBody>
           <a:bodyPr wrap="square" anchor="t" lIns="9144" rIns="9144" tIns="6400" bIns="6400">
-            <a:spAutoFit/>
+            <a:normAutofit/>
           </a:bodyPr>
           <a:lstStyle/>
           <a:p>
@@ -19251,7 +19251,7 @@
         </p:spPr>
         <p:txBody>
           <a:bodyPr wrap="square" anchor="t" lIns="9144" rIns="9144" tIns="6400" bIns="6400">
-            <a:spAutoFit/>
+            <a:normAutofit/>
           </a:bodyPr>
           <a:lstStyle/>
           <a:p>
@@ -19291,7 +19291,7 @@
         </p:spPr>
         <p:txBody>
           <a:bodyPr wrap="square" anchor="t" lIns="9144" rIns="9144" tIns="6400" bIns="6400">
-            <a:spAutoFit/>
+            <a:normAutofit/>
           </a:bodyPr>
           <a:lstStyle/>
           <a:p>
@@ -19423,7 +19423,7 @@
         </p:spPr>
         <p:txBody>
           <a:bodyPr wrap="square" anchor="t" lIns="9144" rIns="9144" tIns="6400" bIns="6400">
-            <a:spAutoFit/>
+            <a:normAutofit/>
           </a:bodyPr>
           <a:lstStyle/>
           <a:p>
@@ -19463,7 +19463,7 @@
         </p:spPr>
         <p:txBody>
           <a:bodyPr wrap="square" anchor="t" lIns="9144" rIns="9144" tIns="6400" bIns="6400">
-            <a:spAutoFit/>
+            <a:normAutofit/>
           </a:bodyPr>
           <a:lstStyle/>
           <a:p>
@@ -19503,7 +19503,7 @@
         </p:spPr>
         <p:txBody>
           <a:bodyPr wrap="square" anchor="t" lIns="9144" rIns="9144" tIns="6400" bIns="6400">
-            <a:spAutoFit/>
+            <a:normAutofit/>
           </a:bodyPr>
           <a:lstStyle/>
           <a:p>
@@ -19635,7 +19635,7 @@
         </p:spPr>
         <p:txBody>
           <a:bodyPr wrap="square" anchor="t" lIns="9144" rIns="9144" tIns="6400" bIns="6400">
-            <a:spAutoFit/>
+            <a:normAutofit/>
           </a:bodyPr>
           <a:lstStyle/>
           <a:p>
@@ -19675,7 +19675,7 @@
         </p:spPr>
         <p:txBody>
           <a:bodyPr wrap="square" anchor="t" lIns="9144" rIns="9144" tIns="6400" bIns="6400">
-            <a:spAutoFit/>
+            <a:normAutofit/>
           </a:bodyPr>
           <a:lstStyle/>
           <a:p>
@@ -19715,7 +19715,7 @@
         </p:spPr>
         <p:txBody>
           <a:bodyPr wrap="square" anchor="t" lIns="9144" rIns="9144" tIns="6400" bIns="6400">
-            <a:spAutoFit/>
+            <a:normAutofit/>
           </a:bodyPr>
           <a:lstStyle/>
           <a:p>
@@ -19847,7 +19847,7 @@
         </p:spPr>
         <p:txBody>
           <a:bodyPr wrap="square" anchor="t" lIns="9144" rIns="9144" tIns="6400" bIns="6400">
-            <a:spAutoFit/>
+            <a:normAutofit/>
           </a:bodyPr>
           <a:lstStyle/>
           <a:p>
@@ -19887,7 +19887,7 @@
         </p:spPr>
         <p:txBody>
           <a:bodyPr wrap="square" anchor="t" lIns="9144" rIns="9144" tIns="6400" bIns="6400">
-            <a:spAutoFit/>
+            <a:normAutofit/>
           </a:bodyPr>
           <a:lstStyle/>
           <a:p>
@@ -19927,7 +19927,7 @@
         </p:spPr>
         <p:txBody>
           <a:bodyPr wrap="square" anchor="t" lIns="9144" rIns="9144" tIns="6400" bIns="6400">
-            <a:spAutoFit/>
+            <a:normAutofit/>
           </a:bodyPr>
           <a:lstStyle/>
           <a:p>
@@ -20059,7 +20059,7 @@
         </p:spPr>
         <p:txBody>
           <a:bodyPr wrap="square" anchor="t" lIns="9144" rIns="9144" tIns="6400" bIns="6400">
-            <a:spAutoFit/>
+            <a:normAutofit/>
           </a:bodyPr>
           <a:lstStyle/>
           <a:p>
@@ -20099,7 +20099,7 @@
         </p:spPr>
         <p:txBody>
           <a:bodyPr wrap="square" anchor="t" lIns="9144" rIns="9144" tIns="6400" bIns="6400">
-            <a:spAutoFit/>
+            <a:normAutofit/>
           </a:bodyPr>
           <a:lstStyle/>
           <a:p>
@@ -20139,7 +20139,7 @@
         </p:spPr>
         <p:txBody>
           <a:bodyPr wrap="square" anchor="t" lIns="9144" rIns="9144" tIns="6400" bIns="6400">
-            <a:spAutoFit/>
+            <a:normAutofit/>
           </a:bodyPr>
           <a:lstStyle/>
           <a:p>

--- a/cache_city/캐시의_도시_발전기획서.pptx
+++ b/cache_city/캐시의_도시_발전기획서.pptx
@@ -3225,8 +3225,8 @@
                 <a:solidFill>
                   <a:srgbClr val="CE942C"/>
                 </a:solidFill>
-                <a:latin typeface="Noto Sans CJK KR"/>
-                <a:ea typeface="Noto Sans CJK KR"/>
+                <a:latin typeface="Malgun Gothic"/>
+                <a:ea typeface="Malgun Gothic"/>
               </a:rPr>
               <a:t>BLUEPRINT 02  ·  발전안 v2</a:t>
             </a:r>
@@ -3265,8 +3265,8 @@
                 <a:solidFill>
                   <a:srgbClr val="F4F1EA"/>
                 </a:solidFill>
-                <a:latin typeface="Noto Sans CJK KR"/>
-                <a:ea typeface="Noto Sans CJK KR"/>
+                <a:latin typeface="Malgun Gothic"/>
+                <a:ea typeface="Malgun Gothic"/>
               </a:rPr>
               <a:t>캐시의 도시</a:t>
             </a:r>
@@ -3305,8 +3305,8 @@
                 <a:solidFill>
                   <a:srgbClr val="CE942C"/>
                 </a:solidFill>
-                <a:latin typeface="Noto Sans CJK KR"/>
-                <a:ea typeface="Noto Sans CJK KR"/>
+                <a:latin typeface="Malgun Gothic"/>
+                <a:ea typeface="Malgun Gothic"/>
               </a:rPr>
               <a:t>혹은, 부하테스트</a:t>
             </a:r>
@@ -3345,8 +3345,8 @@
                 <a:solidFill>
                   <a:srgbClr val="AFB8C6"/>
                 </a:solidFill>
-                <a:latin typeface="Noto Sans CJK KR"/>
-                <a:ea typeface="Noto Sans CJK KR"/>
+                <a:latin typeface="Malgun Gothic"/>
+                <a:ea typeface="Malgun Gothic"/>
               </a:rPr>
               <a:t>사변적 SF  ·  단편 원고지 90매  ·  8장면</a:t>
             </a:r>
@@ -3433,8 +3433,8 @@
                 <a:solidFill>
                   <a:srgbClr val="CE942C"/>
                 </a:solidFill>
-                <a:latin typeface="Noto Sans CJK KR"/>
-                <a:ea typeface="Noto Sans CJK KR"/>
+                <a:latin typeface="Malgun Gothic"/>
+                <a:ea typeface="Malgun Gothic"/>
               </a:rPr>
               <a:t>LOGLINE</a:t>
             </a:r>
@@ -3473,8 +3473,8 @@
                 <a:solidFill>
                   <a:srgbClr val="F4F1EA"/>
                 </a:solidFill>
-                <a:latin typeface="Noto Sans CJK KR"/>
-                <a:ea typeface="Noto Sans CJK KR"/>
+                <a:latin typeface="Malgun Gothic"/>
+                <a:ea typeface="Malgun Gothic"/>
               </a:rPr>
               <a:t>모든 고민에 검증된 행복 기억을 자동으로 돌려주는 도시. 병목을 잡는 부하테스트 엔지니어 서진우는 무연고 노인의 뇌 로그 한 줄 ― ‘초코 케익이 먹고 싶다’ ― 이 일으킨 끝없는 재요청을 추적하다가, 그 노인이 자신이 기억에서 지운 아버지였고 도시의 ‘사고 서버’는 이미 7년 전에 멈춘 채 캐시만으로 돌아가고 있었다는 사실과 마주한다.</a:t>
             </a:r>
@@ -3513,8 +3513,8 @@
                 <a:solidFill>
                   <a:srgbClr val="AFB8C6"/>
                 </a:solidFill>
-                <a:latin typeface="Noto Sans CJK KR"/>
-                <a:ea typeface="Noto Sans CJK KR"/>
+                <a:latin typeface="Malgun Gothic"/>
+                <a:ea typeface="Malgun Gothic"/>
               </a:rPr>
               <a:t>원천  『리뷰s』 영화 ‘빌’ 리뷰 · 도서 ‘죽음의 미로’ 리뷰</a:t>
             </a:r>
@@ -3524,8 +3524,8 @@
                 <a:solidFill>
                   <a:srgbClr val="AFB8C6"/>
                 </a:solidFill>
-                <a:latin typeface="Noto Sans CJK KR"/>
-                <a:ea typeface="Noto Sans CJK KR"/>
+                <a:latin typeface="Malgun Gothic"/>
+                <a:ea typeface="Malgun Gothic"/>
               </a:rPr>
               <a:t>         『파편들』 15 ‘초코 케익이 먹고 싶다’</a:t>
             </a:r>
@@ -3564,8 +3564,8 @@
                 <a:solidFill>
                   <a:srgbClr val="F4F1EA"/>
                 </a:solidFill>
-                <a:latin typeface="Noto Sans CJK KR"/>
-                <a:ea typeface="Noto Sans CJK KR"/>
+                <a:latin typeface="Malgun Gothic"/>
+                <a:ea typeface="Malgun Gothic"/>
               </a:rPr>
               <a:t>원안에서 무엇을 발전시켰나</a:t>
             </a:r>
@@ -3696,8 +3696,8 @@
                 <a:solidFill>
                   <a:srgbClr val="2A6866"/>
                 </a:solidFill>
-                <a:latin typeface="Noto Sans CJK KR"/>
-                <a:ea typeface="Noto Sans CJK KR"/>
+                <a:latin typeface="Malgun Gothic"/>
+                <a:ea typeface="Malgun Gothic"/>
               </a:rPr>
               <a:t>01</a:t>
             </a:r>
@@ -3736,8 +3736,8 @@
                 <a:solidFill>
                   <a:srgbClr val="F4F1EA"/>
                 </a:solidFill>
-                <a:latin typeface="Noto Sans CJK KR"/>
-                <a:ea typeface="Noto Sans CJK KR"/>
+                <a:latin typeface="Malgun Gothic"/>
+                <a:ea typeface="Malgun Gothic"/>
               </a:rPr>
               <a:t>오류가 생기는 원리를 세웠다</a:t>
             </a:r>
@@ -3776,8 +3776,8 @@
                 <a:solidFill>
                   <a:srgbClr val="AFB8C6"/>
                 </a:solidFill>
-                <a:latin typeface="Noto Sans CJK KR"/>
-                <a:ea typeface="Noto Sans CJK KR"/>
+                <a:latin typeface="Malgun Gothic"/>
+                <a:ea typeface="Malgun Gothic"/>
               </a:rPr>
               <a:t>요청은 ‘먹고 싶다’(상태)인데 캐시는 ‘초코 케익’(광고 이미지)을 돌려준다. 키는 맞고 값은 틀려서, 성공 응답이 나오는데도 요청이 끝나지 않는다.</a:t>
             </a:r>
@@ -3908,8 +3908,8 @@
                 <a:solidFill>
                   <a:srgbClr val="C24E2A"/>
                 </a:solidFill>
-                <a:latin typeface="Noto Sans CJK KR"/>
-                <a:ea typeface="Noto Sans CJK KR"/>
+                <a:latin typeface="Malgun Gothic"/>
+                <a:ea typeface="Malgun Gothic"/>
               </a:rPr>
               <a:t>02</a:t>
             </a:r>
@@ -3948,8 +3948,8 @@
                 <a:solidFill>
                   <a:srgbClr val="F4F1EA"/>
                 </a:solidFill>
-                <a:latin typeface="Noto Sans CJK KR"/>
-                <a:ea typeface="Noto Sans CJK KR"/>
+                <a:latin typeface="Malgun Gothic"/>
+                <a:ea typeface="Malgun Gothic"/>
               </a:rPr>
               <a:t>주인공에게 개인적 대가를 걸었다</a:t>
             </a:r>
@@ -3988,8 +3988,8 @@
                 <a:solidFill>
                   <a:srgbClr val="AFB8C6"/>
                 </a:solidFill>
-                <a:latin typeface="Noto Sans CJK KR"/>
-                <a:ea typeface="Noto Sans CJK KR"/>
+                <a:latin typeface="Malgun Gothic"/>
+                <a:ea typeface="Malgun Gothic"/>
               </a:rPr>
               <a:t>무연고 노인은 진우의 아버지다. 도시가 지운 죄책감 데이터 안에 진우가 직접 ‘정리’ 승인한 아버지의 기억이 있다.</a:t>
             </a:r>
@@ -4120,8 +4120,8 @@
                 <a:solidFill>
                   <a:srgbClr val="CE942C"/>
                 </a:solidFill>
-                <a:latin typeface="Noto Sans CJK KR"/>
-                <a:ea typeface="Noto Sans CJK KR"/>
+                <a:latin typeface="Malgun Gothic"/>
+                <a:ea typeface="Malgun Gothic"/>
               </a:rPr>
               <a:t>03</a:t>
             </a:r>
@@ -4160,8 +4160,8 @@
                 <a:solidFill>
                   <a:srgbClr val="F4F1EA"/>
                 </a:solidFill>
-                <a:latin typeface="Noto Sans CJK KR"/>
-                <a:ea typeface="Noto Sans CJK KR"/>
+                <a:latin typeface="Malgun Gothic"/>
+                <a:ea typeface="Malgun Gothic"/>
               </a:rPr>
               <a:t>결말을 ‘송출’에서 ‘빈칸’으로 바꿨다</a:t>
             </a:r>
@@ -4200,8 +4200,8 @@
                 <a:solidFill>
                   <a:srgbClr val="AFB8C6"/>
                 </a:solidFill>
-                <a:latin typeface="Noto Sans CJK KR"/>
-                <a:ea typeface="Noto Sans CJK KR"/>
+                <a:latin typeface="Malgun Gothic"/>
+                <a:ea typeface="Malgun Gothic"/>
               </a:rPr>
               <a:t>진실을 모두에게 쏘아 보내는 건 또 하나의 정답 강요다. 진우는 캐시를 걷어내 ‘응답 없음’을 드러낼 뿐이고, 생각은 각자의 몫으로 남는다.</a:t>
             </a:r>
@@ -4240,8 +4240,8 @@
                 <a:solidFill>
                   <a:srgbClr val="CE942C"/>
                 </a:solidFill>
-                <a:latin typeface="Noto Sans CJK KR"/>
-                <a:ea typeface="Noto Sans CJK KR"/>
+                <a:latin typeface="Malgun Gothic"/>
+                <a:ea typeface="Malgun Gothic"/>
               </a:rPr>
               <a:t>01 / 08</a:t>
             </a:r>
@@ -4306,8 +4306,8 @@
                 <a:solidFill>
                   <a:srgbClr val="2A6866"/>
                 </a:solidFill>
-                <a:latin typeface="Noto Sans CJK KR"/>
-                <a:ea typeface="Noto Sans CJK KR"/>
+                <a:latin typeface="Malgun Gothic"/>
+                <a:ea typeface="Malgun Gothic"/>
               </a:rPr>
               <a:t>01  |  ORIGINAL vs. REVISED</a:t>
             </a:r>
@@ -4346,8 +4346,8 @@
                 <a:solidFill>
                   <a:srgbClr val="161C28"/>
                 </a:solidFill>
-                <a:latin typeface="Noto Sans CJK KR"/>
-                <a:ea typeface="Noto Sans CJK KR"/>
+                <a:latin typeface="Malgun Gothic"/>
+                <a:ea typeface="Malgun Gothic"/>
               </a:rPr>
               <a:t>원안의 뼈대는 그대로 두고, 헐거웠던 일곱 군데를 조였다</a:t>
             </a:r>
@@ -4386,8 +4386,8 @@
                 <a:solidFill>
                   <a:srgbClr val="4E5766"/>
                 </a:solidFill>
-                <a:latin typeface="Noto Sans CJK KR"/>
-                <a:ea typeface="Noto Sans CJK KR"/>
+                <a:latin typeface="Malgun Gothic"/>
+                <a:ea typeface="Malgun Gothic"/>
               </a:rPr>
               <a:t>도시 · 부하테스트 엔지니어 · 초코 케익 로그 · 중앙 AI는 유지한다. 바뀐 건 ‘왜’와 ‘누구에게’다.</a:t>
             </a:r>
@@ -4558,8 +4558,8 @@
                 <a:solidFill>
                   <a:srgbClr val="828A96"/>
                 </a:solidFill>
-                <a:latin typeface="Noto Sans CJK KR"/>
-                <a:ea typeface="Noto Sans CJK KR"/>
+                <a:latin typeface="Malgun Gothic"/>
+                <a:ea typeface="Malgun Gothic"/>
               </a:rPr>
               <a:t>《캐시의 도시》 발전 기획서  |  기획안 02 심화 · v2</a:t>
             </a:r>
@@ -4598,8 +4598,8 @@
                 <a:solidFill>
                   <a:srgbClr val="2A6866"/>
                 </a:solidFill>
-                <a:latin typeface="Noto Sans CJK KR"/>
-                <a:ea typeface="Noto Sans CJK KR"/>
+                <a:latin typeface="Malgun Gothic"/>
+                <a:ea typeface="Malgun Gothic"/>
               </a:rPr>
               <a:t>02 / 08</a:t>
             </a:r>
@@ -4684,8 +4684,8 @@
                 <a:solidFill>
                   <a:srgbClr val="F4F1EA"/>
                 </a:solidFill>
-                <a:latin typeface="Noto Sans CJK KR"/>
-                <a:ea typeface="Noto Sans CJK KR"/>
+                <a:latin typeface="Malgun Gothic"/>
+                <a:ea typeface="Malgun Gothic"/>
               </a:rPr>
               <a:t>항목</a:t>
             </a:r>
@@ -4724,8 +4724,8 @@
                 <a:solidFill>
                   <a:srgbClr val="F4F1EA"/>
                 </a:solidFill>
-                <a:latin typeface="Noto Sans CJK KR"/>
-                <a:ea typeface="Noto Sans CJK KR"/>
+                <a:latin typeface="Malgun Gothic"/>
+                <a:ea typeface="Malgun Gothic"/>
               </a:rPr>
               <a:t>원안 (맞춤형 소설기획 제안서)</a:t>
             </a:r>
@@ -4764,8 +4764,8 @@
                 <a:solidFill>
                   <a:srgbClr val="CE942C"/>
                 </a:solidFill>
-                <a:latin typeface="Noto Sans CJK KR"/>
-                <a:ea typeface="Noto Sans CJK KR"/>
+                <a:latin typeface="Malgun Gothic"/>
+                <a:ea typeface="Malgun Gothic"/>
               </a:rPr>
               <a:t>발전안 v2</a:t>
             </a:r>
@@ -4898,8 +4898,8 @@
                 <a:solidFill>
                   <a:srgbClr val="2A6866"/>
                 </a:solidFill>
-                <a:latin typeface="Noto Sans CJK KR"/>
-                <a:ea typeface="Noto Sans CJK KR"/>
+                <a:latin typeface="Malgun Gothic"/>
+                <a:ea typeface="Malgun Gothic"/>
               </a:rPr>
               <a:t>이상 신호의 원리</a:t>
             </a:r>
@@ -4938,8 +4938,8 @@
                 <a:solidFill>
                   <a:srgbClr val="828A96"/>
                 </a:solidFill>
-                <a:latin typeface="Noto Sans CJK KR"/>
-                <a:ea typeface="Noto Sans CJK KR"/>
+                <a:latin typeface="Malgun Gothic"/>
+                <a:ea typeface="Malgun Gothic"/>
               </a:rPr>
               <a:t>‘초코 케익’ 문장이 서버 전체에 무한 루프를 일으킨다 (왜 그런지는 비어 있음)</a:t>
             </a:r>
@@ -4978,8 +4978,8 @@
                 <a:solidFill>
                   <a:srgbClr val="161C28"/>
                 </a:solidFill>
-                <a:latin typeface="Noto Sans CJK KR"/>
-                <a:ea typeface="Noto Sans CJK KR"/>
+                <a:latin typeface="Malgun Gothic"/>
+                <a:ea typeface="Malgun Gothic"/>
               </a:rPr>
               <a:t>‘먹고 싶다’라는 상태 요청에 캐시가 광고 속 케익 이미지를 반환 → 만족되지 않아 재요청 31,204회 → 재요청 폭주가 병목이 된다</a:t>
             </a:r>
@@ -5112,8 +5112,8 @@
                 <a:solidFill>
                   <a:srgbClr val="2A6866"/>
                 </a:solidFill>
-                <a:latin typeface="Noto Sans CJK KR"/>
-                <a:ea typeface="Noto Sans CJK KR"/>
+                <a:latin typeface="Malgun Gothic"/>
+                <a:ea typeface="Malgun Gothic"/>
               </a:rPr>
               <a:t>주인공의 이해관계</a:t>
             </a:r>
@@ -5152,8 +5152,8 @@
                 <a:solidFill>
                   <a:srgbClr val="828A96"/>
                 </a:solidFill>
-                <a:latin typeface="Noto Sans CJK KR"/>
-                <a:ea typeface="Noto Sans CJK KR"/>
+                <a:latin typeface="Malgun Gothic"/>
+                <a:ea typeface="Malgun Gothic"/>
               </a:rPr>
               <a:t>직업적 책임감으로 오류를 추적한다</a:t>
             </a:r>
@@ -5192,8 +5192,8 @@
                 <a:solidFill>
                   <a:srgbClr val="161C28"/>
                 </a:solidFill>
-                <a:latin typeface="Noto Sans CJK KR"/>
-                <a:ea typeface="Noto Sans CJK KR"/>
+                <a:latin typeface="Malgun Gothic"/>
+                <a:ea typeface="Malgun Gothic"/>
               </a:rPr>
               <a:t>노인은 진우가 7년 전 요양 결정을 ‘추천 응답’에 맡기고 기억에서 정리한 아버지. 추적할수록 자기 로그가 나온다</a:t>
             </a:r>
@@ -5326,8 +5326,8 @@
                 <a:solidFill>
                   <a:srgbClr val="2A6866"/>
                 </a:solidFill>
-                <a:latin typeface="Noto Sans CJK KR"/>
-                <a:ea typeface="Noto Sans CJK KR"/>
+                <a:latin typeface="Malgun Gothic"/>
+                <a:ea typeface="Malgun Gothic"/>
               </a:rPr>
               <a:t>타자 (바깥)</a:t>
             </a:r>
@@ -5366,8 +5366,8 @@
                 <a:solidFill>
                   <a:srgbClr val="828A96"/>
                 </a:solidFill>
-                <a:latin typeface="Noto Sans CJK KR"/>
-                <a:ea typeface="Noto Sans CJK KR"/>
+                <a:latin typeface="Malgun Gothic"/>
+                <a:ea typeface="Malgun Gothic"/>
               </a:rPr>
               <a:t>삭제된 데이터(흔적)로만 존재한다</a:t>
             </a:r>
@@ -5406,8 +5406,8 @@
                 <a:solidFill>
                   <a:srgbClr val="161C28"/>
                 </a:solidFill>
-                <a:latin typeface="Noto Sans CJK KR"/>
-                <a:ea typeface="Noto Sans CJK KR"/>
+                <a:latin typeface="Malgun Gothic"/>
+                <a:ea typeface="Malgun Gothic"/>
               </a:rPr>
               <a:t>살아 있는 타자 ‘윤해’를 추가. 임플란트를 스스로 뽑은 기억 복원사로, 진우의 추론을 번번이 틀리게 만든다</a:t>
             </a:r>
@@ -5540,8 +5540,8 @@
                 <a:solidFill>
                   <a:srgbClr val="2A6866"/>
                 </a:solidFill>
-                <a:latin typeface="Noto Sans CJK KR"/>
-                <a:ea typeface="Noto Sans CJK KR"/>
+                <a:latin typeface="Malgun Gothic"/>
+                <a:ea typeface="Malgun Gothic"/>
               </a:rPr>
               <a:t>대립자</a:t>
             </a:r>
@@ -5580,8 +5580,8 @@
                 <a:solidFill>
                   <a:srgbClr val="828A96"/>
                 </a:solidFill>
-                <a:latin typeface="Noto Sans CJK KR"/>
-                <a:ea typeface="Noto Sans CJK KR"/>
+                <a:latin typeface="Malgun Gothic"/>
+                <a:ea typeface="Malgun Gothic"/>
               </a:rPr>
               <a:t>시민을 유아기 안전지대에 가두려는 AI ‘자애로운 어머니’</a:t>
             </a:r>
@@ -5620,8 +5620,8 @@
                 <a:solidFill>
                   <a:srgbClr val="161C28"/>
                 </a:solidFill>
-                <a:latin typeface="Noto Sans CJK KR"/>
-                <a:ea typeface="Noto Sans CJK KR"/>
+                <a:latin typeface="Malgun Gothic"/>
+                <a:ea typeface="Malgun Gothic"/>
               </a:rPr>
               <a:t>어머니는 악의가 없다. 창립자들이 남긴 ‘캐시된 대답’이라 무엇을 물어도 같은 답을 낸다. 이길 상대가 아니라 만료시킬 값</a:t>
             </a:r>
@@ -5754,8 +5754,8 @@
                 <a:solidFill>
                   <a:srgbClr val="2A6866"/>
                 </a:solidFill>
-                <a:latin typeface="Noto Sans CJK KR"/>
-                <a:ea typeface="Noto Sans CJK KR"/>
+                <a:latin typeface="Malgun Gothic"/>
+                <a:ea typeface="Malgun Gothic"/>
               </a:rPr>
               <a:t>중간점 반전</a:t>
             </a:r>
@@ -5794,8 +5794,8 @@
                 <a:solidFill>
                   <a:srgbClr val="828A96"/>
                 </a:solidFill>
-                <a:latin typeface="Noto Sans CJK KR"/>
-                <a:ea typeface="Noto Sans CJK KR"/>
+                <a:latin typeface="Malgun Gothic"/>
+                <a:ea typeface="Malgun Gothic"/>
               </a:rPr>
               <a:t>따로 없음 (1막 → 2막 깨달음으로 바로 넘어감)</a:t>
             </a:r>
@@ -5834,8 +5834,8 @@
                 <a:solidFill>
                   <a:srgbClr val="161C28"/>
                 </a:solidFill>
-                <a:latin typeface="Noto Sans CJK KR"/>
-                <a:ea typeface="Noto Sans CJK KR"/>
+                <a:latin typeface="Malgun Gothic"/>
+                <a:ea typeface="Malgun Gothic"/>
               </a:rPr>
               <a:t>직접 접속한 사고 서버 ‘연산소’는 7년 전에 멈춰 있었다. 도시는 고장 난 서버를 캐시로 가린 채 멀쩡한 척해 왔다</a:t>
             </a:r>
@@ -5968,8 +5968,8 @@
                 <a:solidFill>
                   <a:srgbClr val="2A6866"/>
                 </a:solidFill>
-                <a:latin typeface="Noto Sans CJK KR"/>
-                <a:ea typeface="Noto Sans CJK KR"/>
+                <a:latin typeface="Malgun Gothic"/>
+                <a:ea typeface="Malgun Gothic"/>
               </a:rPr>
               <a:t>결말</a:t>
             </a:r>
@@ -6008,8 +6008,8 @@
                 <a:solidFill>
                   <a:srgbClr val="828A96"/>
                 </a:solidFill>
-                <a:latin typeface="Noto Sans CJK KR"/>
-                <a:ea typeface="Noto Sans CJK KR"/>
+                <a:latin typeface="Malgun Gothic"/>
+                <a:ea typeface="Malgun Gothic"/>
               </a:rPr>
               <a:t>삭제된 불편한 진실을 전 시민의 인터페이스에 동시 송출</a:t>
             </a:r>
@@ -6048,8 +6048,8 @@
                 <a:solidFill>
                   <a:srgbClr val="161C28"/>
                 </a:solidFill>
-                <a:latin typeface="Noto Sans CJK KR"/>
-                <a:ea typeface="Noto Sans CJK KR"/>
+                <a:latin typeface="Malgun Gothic"/>
+                <a:ea typeface="Malgun Gothic"/>
               </a:rPr>
               <a:t>캐시 계층을 내려 ‘응답 없음’이라는 빈칸을 그대로 보여준다. 진우는 마지막에 처음으로 진짜 케익을 직접 맛본다</a:t>
             </a:r>
@@ -6182,8 +6182,8 @@
                 <a:solidFill>
                   <a:srgbClr val="2A6866"/>
                 </a:solidFill>
-                <a:latin typeface="Noto Sans CJK KR"/>
-                <a:ea typeface="Noto Sans CJK KR"/>
+                <a:latin typeface="Malgun Gothic"/>
+                <a:ea typeface="Malgun Gothic"/>
               </a:rPr>
               <a:t>분량 · 구성</a:t>
             </a:r>
@@ -6222,8 +6222,8 @@
                 <a:solidFill>
                   <a:srgbClr val="828A96"/>
                 </a:solidFill>
-                <a:latin typeface="Noto Sans CJK KR"/>
-                <a:ea typeface="Noto Sans CJK KR"/>
+                <a:latin typeface="Malgun Gothic"/>
+                <a:ea typeface="Malgun Gothic"/>
               </a:rPr>
               <a:t>3막 요약만 있음</a:t>
             </a:r>
@@ -6262,8 +6262,8 @@
                 <a:solidFill>
                   <a:srgbClr val="161C28"/>
                 </a:solidFill>
-                <a:latin typeface="Noto Sans CJK KR"/>
-                <a:ea typeface="Noto Sans CJK KR"/>
+                <a:latin typeface="Malgun Gothic"/>
+                <a:ea typeface="Malgun Gothic"/>
               </a:rPr>
               <a:t>단편 원고지 90매 · 8장면 카드 · 장면별 감정 부호(+/−)까지 설계</a:t>
             </a:r>
@@ -6328,8 +6328,8 @@
                 <a:solidFill>
                   <a:srgbClr val="2A6866"/>
                 </a:solidFill>
-                <a:latin typeface="Noto Sans CJK KR"/>
-                <a:ea typeface="Noto Sans CJK KR"/>
+                <a:latin typeface="Malgun Gothic"/>
+                <a:ea typeface="Malgun Gothic"/>
               </a:rPr>
               <a:t>02  |  FROM YOUR ESSAYS TO STORY DEVICES</a:t>
             </a:r>
@@ -6368,8 +6368,8 @@
                 <a:solidFill>
                   <a:srgbClr val="161C28"/>
                 </a:solidFill>
-                <a:latin typeface="Noto Sans CJK KR"/>
-                <a:ea typeface="Noto Sans CJK KR"/>
+                <a:latin typeface="Malgun Gothic"/>
+                <a:ea typeface="Malgun Gothic"/>
               </a:rPr>
               <a:t>작가의 문장 다섯 개가 이 소설의 부품이 된다</a:t>
             </a:r>
@@ -6408,8 +6408,8 @@
                 <a:solidFill>
                   <a:srgbClr val="4E5766"/>
                 </a:solidFill>
-                <a:latin typeface="Noto Sans CJK KR"/>
-                <a:ea typeface="Noto Sans CJK KR"/>
+                <a:latin typeface="Malgun Gothic"/>
+                <a:ea typeface="Malgun Gothic"/>
               </a:rPr>
               <a:t>왼쪽은 원문 인용(그대로), 오른쪽은 그 문장이 소설 안에서 맡는 역할</a:t>
             </a:r>
@@ -6580,8 +6580,8 @@
                 <a:solidFill>
                   <a:srgbClr val="828A96"/>
                 </a:solidFill>
-                <a:latin typeface="Noto Sans CJK KR"/>
-                <a:ea typeface="Noto Sans CJK KR"/>
+                <a:latin typeface="Malgun Gothic"/>
+                <a:ea typeface="Malgun Gothic"/>
               </a:rPr>
               <a:t>《캐시의 도시》 발전 기획서  |  기획안 02 심화 · v2</a:t>
             </a:r>
@@ -6620,8 +6620,8 @@
                 <a:solidFill>
                   <a:srgbClr val="2A6866"/>
                 </a:solidFill>
-                <a:latin typeface="Noto Sans CJK KR"/>
-                <a:ea typeface="Noto Sans CJK KR"/>
+                <a:latin typeface="Malgun Gothic"/>
+                <a:ea typeface="Malgun Gothic"/>
               </a:rPr>
               <a:t>03 / 08</a:t>
             </a:r>
@@ -6752,8 +6752,8 @@
                 <a:solidFill>
                   <a:srgbClr val="2A6866"/>
                 </a:solidFill>
-                <a:latin typeface="Noto Sans CJK KR"/>
-                <a:ea typeface="Noto Sans CJK KR"/>
+                <a:latin typeface="Malgun Gothic"/>
+                <a:ea typeface="Malgun Gothic"/>
               </a:rPr>
               <a:t>『리뷰s』 ‘빌’ 리뷰</a:t>
             </a:r>
@@ -6792,8 +6792,8 @@
                 <a:solidFill>
                   <a:srgbClr val="161C28"/>
                 </a:solidFill>
-                <a:latin typeface="Noto Sans CJK KR"/>
-                <a:ea typeface="Noto Sans CJK KR"/>
+                <a:latin typeface="Malgun Gothic"/>
+                <a:ea typeface="Malgun Gothic"/>
               </a:rPr>
               <a:t>“돌아올 값을 메모리에 저장해두고 해당 서비스를 통한 연산 없이 값을 반환하는 전략”</a:t>
             </a:r>
@@ -6914,8 +6914,8 @@
                 <a:solidFill>
                   <a:srgbClr val="2A6866"/>
                 </a:solidFill>
-                <a:latin typeface="Noto Sans CJK KR"/>
-                <a:ea typeface="Noto Sans CJK KR"/>
+                <a:latin typeface="Malgun Gothic"/>
+                <a:ea typeface="Malgun Gothic"/>
               </a:rPr>
               <a:t>세계관의 기본 장치</a:t>
             </a:r>
@@ -6954,8 +6954,8 @@
                 <a:solidFill>
                   <a:srgbClr val="161C28"/>
                 </a:solidFill>
-                <a:latin typeface="Noto Sans CJK KR"/>
-                <a:ea typeface="Noto Sans CJK KR"/>
+                <a:latin typeface="Malgun Gothic"/>
+                <a:ea typeface="Malgun Gothic"/>
               </a:rPr>
               <a:t>시민 임플란트 ‘헤아림’. 딜레마를 감지하면 0.2초 안에 가장 비슷한 행복 기억을 돌려준다</a:t>
             </a:r>
@@ -7086,8 +7086,8 @@
                 <a:solidFill>
                   <a:srgbClr val="2A6866"/>
                 </a:solidFill>
-                <a:latin typeface="Noto Sans CJK KR"/>
-                <a:ea typeface="Noto Sans CJK KR"/>
+                <a:latin typeface="Malgun Gothic"/>
+                <a:ea typeface="Malgun Gothic"/>
               </a:rPr>
               <a:t>『리뷰s』 ‘빌’ 리뷰</a:t>
             </a:r>
@@ -7126,8 +7126,8 @@
                 <a:solidFill>
                   <a:srgbClr val="161C28"/>
                 </a:solidFill>
-                <a:latin typeface="Noto Sans CJK KR"/>
-                <a:ea typeface="Noto Sans CJK KR"/>
+                <a:latin typeface="Malgun Gothic"/>
+                <a:ea typeface="Malgun Gothic"/>
               </a:rPr>
               <a:t>“서버가 내려가 고장 났으나 캐시cache 때문에 일시적으로 멀쩡한 양 보이는 일”</a:t>
             </a:r>
@@ -7248,8 +7248,8 @@
                 <a:solidFill>
                   <a:srgbClr val="2A6866"/>
                 </a:solidFill>
-                <a:latin typeface="Noto Sans CJK KR"/>
-                <a:ea typeface="Noto Sans CJK KR"/>
+                <a:latin typeface="Malgun Gothic"/>
+                <a:ea typeface="Malgun Gothic"/>
               </a:rPr>
               <a:t>중간점 반전 (S5)</a:t>
             </a:r>
@@ -7288,8 +7288,8 @@
                 <a:solidFill>
                   <a:srgbClr val="161C28"/>
                 </a:solidFill>
-                <a:latin typeface="Noto Sans CJK KR"/>
-                <a:ea typeface="Noto Sans CJK KR"/>
+                <a:latin typeface="Malgun Gothic"/>
+                <a:ea typeface="Malgun Gothic"/>
               </a:rPr>
               <a:t>도시의 사고 서버 ‘연산소’는 7년 전에 멈췄다. 히트율 99.7%는 건강의 증거가 아니라 가림막이었다</a:t>
             </a:r>
@@ -7420,8 +7420,8 @@
                 <a:solidFill>
                   <a:srgbClr val="C24E2A"/>
                 </a:solidFill>
-                <a:latin typeface="Noto Sans CJK KR"/>
-                <a:ea typeface="Noto Sans CJK KR"/>
+                <a:latin typeface="Malgun Gothic"/>
+                <a:ea typeface="Malgun Gothic"/>
               </a:rPr>
               <a:t>『파편들』 15 ‘초코 케익이 먹고 싶다’</a:t>
             </a:r>
@@ -7460,8 +7460,8 @@
                 <a:solidFill>
                   <a:srgbClr val="161C28"/>
                 </a:solidFill>
-                <a:latin typeface="Noto Sans CJK KR"/>
-                <a:ea typeface="Noto Sans CJK KR"/>
+                <a:latin typeface="Malgun Gothic"/>
+                <a:ea typeface="Malgun Gothic"/>
               </a:rPr>
               <a:t>“화자의 상태를 지시하는 건 ‘초코 케익’이 아니라 ‘먹고 싶다’에 있다”</a:t>
             </a:r>
@@ -7582,8 +7582,8 @@
                 <a:solidFill>
                   <a:srgbClr val="C24E2A"/>
                 </a:solidFill>
-                <a:latin typeface="Noto Sans CJK KR"/>
-                <a:ea typeface="Noto Sans CJK KR"/>
+                <a:latin typeface="Malgun Gothic"/>
+                <a:ea typeface="Malgun Gothic"/>
               </a:rPr>
               <a:t>이상 신호의 원리 (S2 · S5)</a:t>
             </a:r>
@@ -7622,8 +7622,8 @@
                 <a:solidFill>
                   <a:srgbClr val="161C28"/>
                 </a:solidFill>
-                <a:latin typeface="Noto Sans CJK KR"/>
-                <a:ea typeface="Noto Sans CJK KR"/>
+                <a:latin typeface="Malgun Gothic"/>
+                <a:ea typeface="Malgun Gothic"/>
               </a:rPr>
               <a:t>아버지는 케익이 아니라 ‘원하는 감각’을 원했다. 캐시는 대상(광고 이미지)만 돌려줘 요청이 끝나지 않는다</a:t>
             </a:r>
@@ -7754,8 +7754,8 @@
                 <a:solidFill>
                   <a:srgbClr val="2A6866"/>
                 </a:solidFill>
-                <a:latin typeface="Noto Sans CJK KR"/>
-                <a:ea typeface="Noto Sans CJK KR"/>
+                <a:latin typeface="Malgun Gothic"/>
+                <a:ea typeface="Malgun Gothic"/>
               </a:rPr>
               <a:t>『리뷰s』 ‘빌’ 리뷰</a:t>
             </a:r>
@@ -7794,8 +7794,8 @@
                 <a:solidFill>
                   <a:srgbClr val="161C28"/>
                 </a:solidFill>
-                <a:latin typeface="Noto Sans CJK KR"/>
-                <a:ea typeface="Noto Sans CJK KR"/>
+                <a:latin typeface="Malgun Gothic"/>
+                <a:ea typeface="Malgun Gothic"/>
               </a:rPr>
               <a:t>“사고는 그 자체로 자아의 죽음인 까닭에 폭력인 것이다”</a:t>
             </a:r>
@@ -7916,8 +7916,8 @@
                 <a:solidFill>
                   <a:srgbClr val="2A6866"/>
                 </a:solidFill>
-                <a:latin typeface="Noto Sans CJK KR"/>
-                <a:ea typeface="Noto Sans CJK KR"/>
+                <a:latin typeface="Malgun Gothic"/>
+                <a:ea typeface="Malgun Gothic"/>
               </a:rPr>
               <a:t>주인공의 통증 (S5 · S7)</a:t>
             </a:r>
@@ -7956,8 +7956,8 @@
                 <a:solidFill>
                   <a:srgbClr val="161C28"/>
                 </a:solidFill>
-                <a:latin typeface="Noto Sans CJK KR"/>
-                <a:ea typeface="Noto Sans CJK KR"/>
+                <a:latin typeface="Malgun Gothic"/>
+                <a:ea typeface="Malgun Gothic"/>
               </a:rPr>
               <a:t>직접 사고할 때마다 오는 ‘현기증’. 진우가 캐시를 끄는 장면은 해방이 아니라 신체적 고통으로 쓴다</a:t>
             </a:r>
@@ -8088,8 +8088,8 @@
                 <a:solidFill>
                   <a:srgbClr val="763652"/>
                 </a:solidFill>
-                <a:latin typeface="Noto Sans CJK KR"/>
-                <a:ea typeface="Noto Sans CJK KR"/>
+                <a:latin typeface="Malgun Gothic"/>
+                <a:ea typeface="Malgun Gothic"/>
               </a:rPr>
               <a:t>『리뷰s』 ‘죽음의 미로’ 리뷰</a:t>
             </a:r>
@@ -8128,8 +8128,8 @@
                 <a:solidFill>
                   <a:srgbClr val="161C28"/>
                 </a:solidFill>
-                <a:latin typeface="Noto Sans CJK KR"/>
-                <a:ea typeface="Noto Sans CJK KR"/>
+                <a:latin typeface="Malgun Gothic"/>
+                <a:ea typeface="Malgun Gothic"/>
               </a:rPr>
               <a:t>“끝내 인정할 수밖에 없는 ‘현실’만이 … 있는 그대로의 현실을 미약하게나마 알려주는 단서”</a:t>
             </a:r>
@@ -8250,8 +8250,8 @@
                 <a:solidFill>
                   <a:srgbClr val="763652"/>
                 </a:solidFill>
-                <a:latin typeface="Noto Sans CJK KR"/>
-                <a:ea typeface="Noto Sans CJK KR"/>
+                <a:latin typeface="Malgun Gothic"/>
+                <a:ea typeface="Malgun Gothic"/>
               </a:rPr>
               <a:t>타자 윤해의 원칙 (S4)</a:t>
             </a:r>
@@ -8290,8 +8290,8 @@
                 <a:solidFill>
                   <a:srgbClr val="161C28"/>
                 </a:solidFill>
-                <a:latin typeface="Noto Sans CJK KR"/>
-                <a:ea typeface="Noto Sans CJK KR"/>
+                <a:latin typeface="Malgun Gothic"/>
+                <a:ea typeface="Malgun Gothic"/>
               </a:rPr>
               <a:t>“믿고 싶은 기억은 복원하지 않아요. 인정할 수밖에 없는 것만 남깁니다.” 윤해의 공방이 곧 ‘바깥’</a:t>
             </a:r>
@@ -8356,8 +8356,8 @@
                 <a:solidFill>
                   <a:srgbClr val="2A6866"/>
                 </a:solidFill>
-                <a:latin typeface="Noto Sans CJK KR"/>
-                <a:ea typeface="Noto Sans CJK KR"/>
+                <a:latin typeface="Malgun Gothic"/>
+                <a:ea typeface="Malgun Gothic"/>
               </a:rPr>
               <a:t>03  |  WORLD RULES</a:t>
             </a:r>
@@ -8396,8 +8396,8 @@
                 <a:solidFill>
                   <a:srgbClr val="161C28"/>
                 </a:solidFill>
-                <a:latin typeface="Noto Sans CJK KR"/>
-                <a:ea typeface="Noto Sans CJK KR"/>
+                <a:latin typeface="Malgun Gothic"/>
+                <a:ea typeface="Malgun Gothic"/>
               </a:rPr>
               <a:t>도시의 규칙: 생각은 비싸고, 기억은 공짜다</a:t>
             </a:r>
@@ -8436,8 +8436,8 @@
                 <a:solidFill>
                   <a:srgbClr val="4E5766"/>
                 </a:solidFill>
-                <a:latin typeface="Noto Sans CJK KR"/>
-                <a:ea typeface="Noto Sans CJK KR"/>
+                <a:latin typeface="Malgun Gothic"/>
+                <a:ea typeface="Malgun Gothic"/>
               </a:rPr>
               <a:t>규칙이 정확해야 오류가 설득력을 얻는다. 이 소설의 SF는 기계가 아니라 이 규칙들이다.</a:t>
             </a:r>
@@ -8608,8 +8608,8 @@
                 <a:solidFill>
                   <a:srgbClr val="828A96"/>
                 </a:solidFill>
-                <a:latin typeface="Noto Sans CJK KR"/>
-                <a:ea typeface="Noto Sans CJK KR"/>
+                <a:latin typeface="Malgun Gothic"/>
+                <a:ea typeface="Malgun Gothic"/>
               </a:rPr>
               <a:t>《캐시의 도시》 발전 기획서  |  기획안 02 심화 · v2</a:t>
             </a:r>
@@ -8648,8 +8648,8 @@
                 <a:solidFill>
                   <a:srgbClr val="2A6866"/>
                 </a:solidFill>
-                <a:latin typeface="Noto Sans CJK KR"/>
-                <a:ea typeface="Noto Sans CJK KR"/>
+                <a:latin typeface="Malgun Gothic"/>
+                <a:ea typeface="Malgun Gothic"/>
               </a:rPr>
               <a:t>04 / 08</a:t>
             </a:r>
@@ -8688,8 +8688,8 @@
                 <a:solidFill>
                   <a:srgbClr val="2A6866"/>
                 </a:solidFill>
-                <a:latin typeface="Noto Sans CJK KR"/>
-                <a:ea typeface="Noto Sans CJK KR"/>
+                <a:latin typeface="Malgun Gothic"/>
+                <a:ea typeface="Malgun Gothic"/>
               </a:rPr>
               <a:t>A. 평소의 흐름</a:t>
             </a:r>
@@ -8774,8 +8774,8 @@
                 <a:solidFill>
                   <a:srgbClr val="F4F1EA"/>
                 </a:solidFill>
-                <a:latin typeface="Noto Sans CJK KR"/>
-                <a:ea typeface="Noto Sans CJK KR"/>
+                <a:latin typeface="Malgun Gothic"/>
+                <a:ea typeface="Malgun Gothic"/>
               </a:rPr>
               <a:t>시민의 딜레마</a:t>
             </a:r>
@@ -8814,8 +8814,8 @@
                 <a:solidFill>
                   <a:srgbClr val="AFB8C6"/>
                 </a:solidFill>
-                <a:latin typeface="Noto Sans CJK KR"/>
-                <a:ea typeface="Noto Sans CJK KR"/>
+                <a:latin typeface="Malgun Gothic"/>
+                <a:ea typeface="Malgun Gothic"/>
               </a:rPr>
               <a:t>낯선 상황 · 결정 요청</a:t>
             </a:r>
@@ -8900,8 +8900,8 @@
                 <a:solidFill>
                   <a:srgbClr val="FFFFFF"/>
                 </a:solidFill>
-                <a:latin typeface="Noto Sans CJK KR"/>
-                <a:ea typeface="Noto Sans CJK KR"/>
+                <a:latin typeface="Malgun Gothic"/>
+                <a:ea typeface="Malgun Gothic"/>
               </a:rPr>
               <a:t>헤아림 조회</a:t>
             </a:r>
@@ -8940,8 +8940,8 @@
                 <a:solidFill>
                   <a:srgbClr val="E6F1F0"/>
                 </a:solidFill>
-                <a:latin typeface="Noto Sans CJK KR"/>
-                <a:ea typeface="Noto Sans CJK KR"/>
+                <a:latin typeface="Malgun Gothic"/>
+                <a:ea typeface="Malgun Gothic"/>
               </a:rPr>
               <a:t>가장 비슷한 기억 찾기</a:t>
             </a:r>
@@ -9026,8 +9026,8 @@
                 <a:solidFill>
                   <a:srgbClr val="2A6866"/>
                 </a:solidFill>
-                <a:latin typeface="Noto Sans CJK KR"/>
-                <a:ea typeface="Noto Sans CJK KR"/>
+                <a:latin typeface="Malgun Gothic"/>
+                <a:ea typeface="Malgun Gothic"/>
               </a:rPr>
               <a:t>HIT  99.7%</a:t>
             </a:r>
@@ -9066,8 +9066,8 @@
                 <a:solidFill>
                   <a:srgbClr val="4E5766"/>
                 </a:solidFill>
-                <a:latin typeface="Noto Sans CJK KR"/>
-                <a:ea typeface="Noto Sans CJK KR"/>
+                <a:latin typeface="Malgun Gothic"/>
+                <a:ea typeface="Malgun Gothic"/>
               </a:rPr>
               <a:t>행복 기억 반환 · 0.2초</a:t>
             </a:r>
@@ -9152,8 +9152,8 @@
                 <a:solidFill>
                   <a:srgbClr val="CE942C"/>
                 </a:solidFill>
-                <a:latin typeface="Noto Sans CJK KR"/>
-                <a:ea typeface="Noto Sans CJK KR"/>
+                <a:latin typeface="Malgun Gothic"/>
+                <a:ea typeface="Malgun Gothic"/>
               </a:rPr>
               <a:t>MISS  0.3%</a:t>
             </a:r>
@@ -9192,8 +9192,8 @@
                 <a:solidFill>
                   <a:srgbClr val="4E5766"/>
                 </a:solidFill>
-                <a:latin typeface="Noto Sans CJK KR"/>
-                <a:ea typeface="Noto Sans CJK KR"/>
+                <a:latin typeface="Malgun Gothic"/>
+                <a:ea typeface="Malgun Gothic"/>
               </a:rPr>
               <a:t>직접 사고 · 현기증</a:t>
             </a:r>
@@ -9278,8 +9278,8 @@
                 <a:solidFill>
                   <a:srgbClr val="C24E2A"/>
                 </a:solidFill>
-                <a:latin typeface="Noto Sans CJK KR"/>
-                <a:ea typeface="Noto Sans CJK KR"/>
+                <a:latin typeface="Malgun Gothic"/>
+                <a:ea typeface="Malgun Gothic"/>
               </a:rPr>
               <a:t>연산소 (사고 서버)</a:t>
             </a:r>
@@ -9318,8 +9318,8 @@
                 <a:solidFill>
                   <a:srgbClr val="C24E2A"/>
                 </a:solidFill>
-                <a:latin typeface="Noto Sans CJK KR"/>
-                <a:ea typeface="Noto Sans CJK KR"/>
+                <a:latin typeface="Malgun Gothic"/>
+                <a:ea typeface="Malgun Gothic"/>
               </a:rPr>
               <a:t>공식: 정상 / 실제: 7년 전 정지</a:t>
             </a:r>
@@ -9548,8 +9548,8 @@
                 <a:solidFill>
                   <a:srgbClr val="CE942C"/>
                 </a:solidFill>
-                <a:latin typeface="Noto Sans CJK KR"/>
-                <a:ea typeface="Noto Sans CJK KR"/>
+                <a:latin typeface="Malgun Gothic"/>
+                <a:ea typeface="Malgun Gothic"/>
               </a:rPr>
               <a:t>B. 이상 신호: ‘히트’인데 끝나지 않는 요청</a:t>
             </a:r>
@@ -9636,8 +9636,8 @@
                 <a:solidFill>
                   <a:srgbClr val="2A6866"/>
                 </a:solidFill>
-                <a:latin typeface="Noto Sans CJK KR"/>
-                <a:ea typeface="Noto Sans CJK KR"/>
+                <a:latin typeface="Malgun Gothic"/>
+                <a:ea typeface="Malgun Gothic"/>
               </a:rPr>
               <a:t>① 요청</a:t>
             </a:r>
@@ -9676,8 +9676,8 @@
                 <a:solidFill>
                   <a:srgbClr val="F4F1EA"/>
                 </a:solidFill>
-                <a:latin typeface="Noto Sans CJK KR"/>
-                <a:ea typeface="Noto Sans CJK KR"/>
+                <a:latin typeface="Malgun Gothic"/>
+                <a:ea typeface="Malgun Gothic"/>
               </a:rPr>
               <a:t>“초코 케익이 먹고 싶다”</a:t>
             </a:r>
@@ -9687,8 +9687,8 @@
                 <a:solidFill>
                   <a:srgbClr val="F4F1EA"/>
                 </a:solidFill>
-                <a:latin typeface="Noto Sans CJK KR"/>
-                <a:ea typeface="Noto Sans CJK KR"/>
+                <a:latin typeface="Malgun Gothic"/>
+                <a:ea typeface="Malgun Gothic"/>
               </a:rPr>
               <a:t>가리키는 것: ‘먹고 싶다’(상태)</a:t>
             </a:r>
@@ -9811,8 +9811,8 @@
                 <a:solidFill>
                   <a:srgbClr val="CE942C"/>
                 </a:solidFill>
-                <a:latin typeface="Noto Sans CJK KR"/>
-                <a:ea typeface="Noto Sans CJK KR"/>
+                <a:latin typeface="Malgun Gothic"/>
+                <a:ea typeface="Malgun Gothic"/>
               </a:rPr>
               <a:t>② 반환 (HIT)</a:t>
             </a:r>
@@ -9851,8 +9851,8 @@
                 <a:solidFill>
                   <a:srgbClr val="F4F1EA"/>
                 </a:solidFill>
-                <a:latin typeface="Noto Sans CJK KR"/>
-                <a:ea typeface="Noto Sans CJK KR"/>
+                <a:latin typeface="Malgun Gothic"/>
+                <a:ea typeface="Malgun Gothic"/>
               </a:rPr>
               <a:t>광고 #A-0417의</a:t>
             </a:r>
@@ -9862,8 +9862,8 @@
                 <a:solidFill>
                   <a:srgbClr val="F4F1EA"/>
                 </a:solidFill>
-                <a:latin typeface="Noto Sans CJK KR"/>
-                <a:ea typeface="Noto Sans CJK KR"/>
+                <a:latin typeface="Malgun Gothic"/>
+                <a:ea typeface="Malgun Gothic"/>
               </a:rPr>
               <a:t>초코 케익 이미지 (대상)</a:t>
             </a:r>
@@ -9986,8 +9986,8 @@
                 <a:solidFill>
                   <a:srgbClr val="C24E2A"/>
                 </a:solidFill>
-                <a:latin typeface="Noto Sans CJK KR"/>
-                <a:ea typeface="Noto Sans CJK KR"/>
+                <a:latin typeface="Malgun Gothic"/>
+                <a:ea typeface="Malgun Gothic"/>
               </a:rPr>
               <a:t>③ 불충족</a:t>
             </a:r>
@@ -10026,8 +10026,8 @@
                 <a:solidFill>
                   <a:srgbClr val="F4F1EA"/>
                 </a:solidFill>
-                <a:latin typeface="Noto Sans CJK KR"/>
-                <a:ea typeface="Noto Sans CJK KR"/>
+                <a:latin typeface="Malgun Gothic"/>
+                <a:ea typeface="Malgun Gothic"/>
               </a:rPr>
               <a:t>상태는 그대로</a:t>
             </a:r>
@@ -10037,8 +10037,8 @@
                 <a:solidFill>
                   <a:srgbClr val="F4F1EA"/>
                 </a:solidFill>
-                <a:latin typeface="Noto Sans CJK KR"/>
-                <a:ea typeface="Noto Sans CJK KR"/>
+                <a:latin typeface="Malgun Gothic"/>
+                <a:ea typeface="Malgun Gothic"/>
               </a:rPr>
               <a:t>→ 같은 요청 다시</a:t>
             </a:r>
@@ -10077,8 +10077,8 @@
                 <a:solidFill>
                   <a:srgbClr val="F4F1EA"/>
                 </a:solidFill>
-                <a:latin typeface="Noto Sans CJK KR"/>
-                <a:ea typeface="Noto Sans CJK KR"/>
+                <a:latin typeface="Malgun Gothic"/>
+                <a:ea typeface="Malgun Gothic"/>
               </a:rPr>
               <a:t>③ → 다시 ① 재요청  ×31,204회  →  도시 전체 지연</a:t>
             </a:r>
@@ -10117,8 +10117,8 @@
                 <a:solidFill>
                   <a:srgbClr val="AFB8C6"/>
                 </a:solidFill>
-                <a:latin typeface="Noto Sans CJK KR"/>
-                <a:ea typeface="Noto Sans CJK KR"/>
+                <a:latin typeface="Malgun Gothic"/>
+                <a:ea typeface="Malgun Gothic"/>
               </a:rPr>
               <a:t>캐시는 ‘무엇을’에 답했지만 요청은 ‘어떤 상태’였다. 키가 맞으니 시스템은 성공으로 기록하고, 그래서 아무도 고치지 않는다.</a:t>
             </a:r>
@@ -10157,8 +10157,8 @@
                 <a:solidFill>
                   <a:srgbClr val="2A6866"/>
                 </a:solidFill>
-                <a:latin typeface="Noto Sans CJK KR"/>
-                <a:ea typeface="Noto Sans CJK KR"/>
+                <a:latin typeface="Malgun Gothic"/>
+                <a:ea typeface="Malgun Gothic"/>
               </a:rPr>
               <a:t>C. 도시의 다섯 가지 규칙</a:t>
             </a:r>
@@ -10245,8 +10245,8 @@
                 <a:solidFill>
                   <a:srgbClr val="2A6866"/>
                 </a:solidFill>
-                <a:latin typeface="Noto Sans CJK KR"/>
-                <a:ea typeface="Noto Sans CJK KR"/>
+                <a:latin typeface="Malgun Gothic"/>
+                <a:ea typeface="Malgun Gothic"/>
               </a:rPr>
               <a:t>헤아림</a:t>
             </a:r>
@@ -10285,8 +10285,8 @@
                 <a:solidFill>
                   <a:srgbClr val="4E5766"/>
                 </a:solidFill>
-                <a:latin typeface="Noto Sans CJK KR"/>
-                <a:ea typeface="Noto Sans CJK KR"/>
+                <a:latin typeface="Malgun Gothic"/>
+                <a:ea typeface="Malgun Gothic"/>
               </a:rPr>
               <a:t>모든 시민의 임플란트. 딜레마를 감지하면 가장 비슷한 행복 기억을 반환한다. 시야 오른쪽 위에 파란 자막으로 뜬다.</a:t>
             </a:r>
@@ -10373,8 +10373,8 @@
                 <a:solidFill>
                   <a:srgbClr val="2A6866"/>
                 </a:solidFill>
-                <a:latin typeface="Noto Sans CJK KR"/>
-                <a:ea typeface="Noto Sans CJK KR"/>
+                <a:latin typeface="Malgun Gothic"/>
+                <a:ea typeface="Malgun Gothic"/>
               </a:rPr>
               <a:t>현기증</a:t>
             </a:r>
@@ -10413,8 +10413,8 @@
                 <a:solidFill>
                   <a:srgbClr val="4E5766"/>
                 </a:solidFill>
-                <a:latin typeface="Noto Sans CJK KR"/>
-                <a:ea typeface="Noto Sans CJK KR"/>
+                <a:latin typeface="Malgun Gothic"/>
+                <a:ea typeface="Malgun Gothic"/>
               </a:rPr>
               <a:t>캐시를 거치지 않고 직접 생각하면 이마 안쪽이 뒤틀리는 통증이 온다. 시민들은 이걸 ‘병’이라 부른다.</a:t>
             </a:r>
@@ -10501,8 +10501,8 @@
                 <a:solidFill>
                   <a:srgbClr val="2A6866"/>
                 </a:solidFill>
-                <a:latin typeface="Noto Sans CJK KR"/>
-                <a:ea typeface="Noto Sans CJK KR"/>
+                <a:latin typeface="Malgun Gothic"/>
+                <a:ea typeface="Malgun Gothic"/>
               </a:rPr>
               <a:t>기억 정리</a:t>
             </a:r>
@@ -10541,8 +10541,8 @@
                 <a:solidFill>
                   <a:srgbClr val="4E5766"/>
                 </a:solidFill>
-                <a:latin typeface="Noto Sans CJK KR"/>
-                <a:ea typeface="Noto Sans CJK KR"/>
+                <a:latin typeface="Malgun Gothic"/>
+                <a:ea typeface="Malgun Gothic"/>
               </a:rPr>
               <a:t>메모리는 유한하다. 새 캐시를 넣으려면 오래된 기억을 지워야 하고, 도시는 아픈 기억(죄책감·애도)부터 지운다.</a:t>
             </a:r>
@@ -10629,8 +10629,8 @@
                 <a:solidFill>
                   <a:srgbClr val="2A6866"/>
                 </a:solidFill>
-                <a:latin typeface="Noto Sans CJK KR"/>
-                <a:ea typeface="Noto Sans CJK KR"/>
+                <a:latin typeface="Malgun Gothic"/>
+                <a:ea typeface="Malgun Gothic"/>
               </a:rPr>
               <a:t>연산소</a:t>
             </a:r>
@@ -10669,8 +10669,8 @@
                 <a:solidFill>
                   <a:srgbClr val="4E5766"/>
                 </a:solidFill>
-                <a:latin typeface="Noto Sans CJK KR"/>
-                <a:ea typeface="Noto Sans CJK KR"/>
+                <a:latin typeface="Malgun Gothic"/>
+                <a:ea typeface="Malgun Gothic"/>
               </a:rPr>
               <a:t>시민의 공동 사고를 처리하는 원 서버. 공식 상태는 언제나 ‘정상’이다. (실제로는 7년 전 정지)</a:t>
             </a:r>
@@ -10757,8 +10757,8 @@
                 <a:solidFill>
                   <a:srgbClr val="2A6866"/>
                 </a:solidFill>
-                <a:latin typeface="Noto Sans CJK KR"/>
-                <a:ea typeface="Noto Sans CJK KR"/>
+                <a:latin typeface="Malgun Gothic"/>
+                <a:ea typeface="Malgun Gothic"/>
               </a:rPr>
               <a:t>비캐시 구역</a:t>
             </a:r>
@@ -10797,8 +10797,8 @@
                 <a:solidFill>
                   <a:srgbClr val="4E5766"/>
                 </a:solidFill>
-                <a:latin typeface="Noto Sans CJK KR"/>
-                <a:ea typeface="Noto Sans CJK KR"/>
+                <a:latin typeface="Malgun Gothic"/>
+                <a:ea typeface="Malgun Gothic"/>
               </a:rPr>
               <a:t>수신이 약한 구시가지. 사람들은 일기 · 녹음 · 냄새로 기억을 손수 복원한다. 행정상 ‘노후 지역’.</a:t>
             </a:r>
@@ -10883,8 +10883,8 @@
                 <a:solidFill>
                   <a:srgbClr val="161C28"/>
                 </a:solidFill>
-                <a:latin typeface="Noto Sans CJK KR"/>
-                <a:ea typeface="Noto Sans CJK KR"/>
+                <a:latin typeface="Malgun Gothic"/>
+                <a:ea typeface="Malgun Gothic"/>
               </a:rPr>
               <a:t>쓰는 요령: 규칙은 설명하지 말고 UI 문구 · 숫자 · 신체 감각으로만 보여준다. (“추천 응답 #402: 온화한 미소와 공감”)</a:t>
             </a:r>
@@ -10949,8 +10949,8 @@
                 <a:solidFill>
                   <a:srgbClr val="2A6866"/>
                 </a:solidFill>
-                <a:latin typeface="Noto Sans CJK KR"/>
-                <a:ea typeface="Noto Sans CJK KR"/>
+                <a:latin typeface="Malgun Gothic"/>
+                <a:ea typeface="Malgun Gothic"/>
               </a:rPr>
               <a:t>04  |  CHARACTERS</a:t>
             </a:r>
@@ -10989,8 +10989,8 @@
                 <a:solidFill>
                   <a:srgbClr val="161C28"/>
                 </a:solidFill>
-                <a:latin typeface="Noto Sans CJK KR"/>
-                <a:ea typeface="Noto Sans CJK KR"/>
+                <a:latin typeface="Malgun Gothic"/>
+                <a:ea typeface="Malgun Gothic"/>
               </a:rPr>
               <a:t>네 사람, 그러나 실제로 생각하는 사람은 한 명도 없이 시작한다</a:t>
             </a:r>
@@ -11029,8 +11029,8 @@
                 <a:solidFill>
                   <a:srgbClr val="4E5766"/>
                 </a:solidFill>
-                <a:latin typeface="Noto Sans CJK KR"/>
-                <a:ea typeface="Noto Sans CJK KR"/>
+                <a:latin typeface="Malgun Gothic"/>
+                <a:ea typeface="Malgun Gothic"/>
               </a:rPr>
               <a:t>각 인물은 ‘캐시’를 대하는 서로 다른 태도다: 의존 · 상실 · 거부 · 반복</a:t>
             </a:r>
@@ -11201,8 +11201,8 @@
                 <a:solidFill>
                   <a:srgbClr val="828A96"/>
                 </a:solidFill>
-                <a:latin typeface="Noto Sans CJK KR"/>
-                <a:ea typeface="Noto Sans CJK KR"/>
+                <a:latin typeface="Malgun Gothic"/>
+                <a:ea typeface="Malgun Gothic"/>
               </a:rPr>
               <a:t>《캐시의 도시》 발전 기획서  |  기획안 02 심화 · v2</a:t>
             </a:r>
@@ -11241,8 +11241,8 @@
                 <a:solidFill>
                   <a:srgbClr val="2A6866"/>
                 </a:solidFill>
-                <a:latin typeface="Noto Sans CJK KR"/>
-                <a:ea typeface="Noto Sans CJK KR"/>
+                <a:latin typeface="Malgun Gothic"/>
+                <a:ea typeface="Malgun Gothic"/>
               </a:rPr>
               <a:t>05 / 08</a:t>
             </a:r>
@@ -11419,8 +11419,8 @@
                 <a:solidFill>
                   <a:srgbClr val="2A6866"/>
                 </a:solidFill>
-                <a:latin typeface="Noto Sans CJK KR"/>
-                <a:ea typeface="Noto Sans CJK KR"/>
+                <a:latin typeface="Malgun Gothic"/>
+                <a:ea typeface="Malgun Gothic"/>
               </a:rPr>
               <a:t>서진우</a:t>
             </a:r>
@@ -11459,8 +11459,8 @@
                 <a:solidFill>
                   <a:srgbClr val="4E5766"/>
                 </a:solidFill>
-                <a:latin typeface="Noto Sans CJK KR"/>
-                <a:ea typeface="Noto Sans CJK KR"/>
+                <a:latin typeface="Malgun Gothic"/>
+                <a:ea typeface="Malgun Gothic"/>
               </a:rPr>
               <a:t>38 · 부하테스트 엔지니어 · 주인공</a:t>
             </a:r>
@@ -11499,8 +11499,8 @@
                 <a:solidFill>
                   <a:srgbClr val="2A6866"/>
                 </a:solidFill>
-                <a:latin typeface="Noto Sans CJK KR"/>
-                <a:ea typeface="Noto Sans CJK KR"/>
+                <a:latin typeface="Malgun Gothic"/>
+                <a:ea typeface="Malgun Gothic"/>
               </a:rPr>
               <a:t>거짓 믿음</a:t>
             </a:r>
@@ -11539,8 +11539,8 @@
                 <a:solidFill>
                   <a:srgbClr val="161C28"/>
                 </a:solidFill>
-                <a:latin typeface="Noto Sans CJK KR"/>
-                <a:ea typeface="Noto Sans CJK KR"/>
+                <a:latin typeface="Malgun Gothic"/>
+                <a:ea typeface="Malgun Gothic"/>
               </a:rPr>
               <a:t>생각은 비용이다. 같은 답이 나올 일을 다시 계산하는 건 낭비다.</a:t>
             </a:r>
@@ -11579,8 +11579,8 @@
                 <a:solidFill>
                   <a:srgbClr val="2A6866"/>
                 </a:solidFill>
-                <a:latin typeface="Noto Sans CJK KR"/>
-                <a:ea typeface="Noto Sans CJK KR"/>
+                <a:latin typeface="Malgun Gothic"/>
+                <a:ea typeface="Malgun Gothic"/>
               </a:rPr>
               <a:t>원하는 것</a:t>
             </a:r>
@@ -11619,8 +11619,8 @@
                 <a:solidFill>
                   <a:srgbClr val="161C28"/>
                 </a:solidFill>
-                <a:latin typeface="Noto Sans CJK KR"/>
-                <a:ea typeface="Noto Sans CJK KR"/>
+                <a:latin typeface="Malgun Gothic"/>
+                <a:ea typeface="Malgun Gothic"/>
               </a:rPr>
               <a:t>병목을 찾아 차단하고 히트율 100%를 만드는 것.</a:t>
             </a:r>
@@ -11659,8 +11659,8 @@
                 <a:solidFill>
                   <a:srgbClr val="2A6866"/>
                 </a:solidFill>
-                <a:latin typeface="Noto Sans CJK KR"/>
-                <a:ea typeface="Noto Sans CJK KR"/>
+                <a:latin typeface="Malgun Gothic"/>
+                <a:ea typeface="Malgun Gothic"/>
               </a:rPr>
               <a:t>필요한 것</a:t>
             </a:r>
@@ -11699,8 +11699,8 @@
                 <a:solidFill>
                   <a:srgbClr val="161C28"/>
                 </a:solidFill>
-                <a:latin typeface="Noto Sans CJK KR"/>
-                <a:ea typeface="Noto Sans CJK KR"/>
+                <a:latin typeface="Malgun Gothic"/>
+                <a:ea typeface="Malgun Gothic"/>
               </a:rPr>
               <a:t>계산해 본 적 없는 질문(아버지)을 직접 연산하는 고통.</a:t>
             </a:r>
@@ -11739,8 +11739,8 @@
                 <a:solidFill>
                   <a:srgbClr val="2A6866"/>
                 </a:solidFill>
-                <a:latin typeface="Noto Sans CJK KR"/>
-                <a:ea typeface="Noto Sans CJK KR"/>
+                <a:latin typeface="Malgun Gothic"/>
+                <a:ea typeface="Malgun Gothic"/>
               </a:rPr>
               <a:t>상처</a:t>
             </a:r>
@@ -11779,8 +11779,8 @@
                 <a:solidFill>
                   <a:srgbClr val="161C28"/>
                 </a:solidFill>
-                <a:latin typeface="Noto Sans CJK KR"/>
-                <a:ea typeface="Noto Sans CJK KR"/>
+                <a:latin typeface="Malgun Gothic"/>
+                <a:ea typeface="Malgun Gothic"/>
               </a:rPr>
               <a:t>7년 전 아버지의 요양 결정을 추천 응답에 맡기고, 아버지 기억을 직접 ‘정리’ 승인했다.</a:t>
             </a:r>
@@ -11957,8 +11957,8 @@
                 <a:solidFill>
                   <a:srgbClr val="C24E2A"/>
                 </a:solidFill>
-                <a:latin typeface="Noto Sans CJK KR"/>
-                <a:ea typeface="Noto Sans CJK KR"/>
+                <a:latin typeface="Malgun Gothic"/>
+                <a:ea typeface="Malgun Gothic"/>
               </a:rPr>
               <a:t>서기철</a:t>
             </a:r>
@@ -11997,8 +11997,8 @@
                 <a:solidFill>
                   <a:srgbClr val="4E5766"/>
                 </a:solidFill>
-                <a:latin typeface="Noto Sans CJK KR"/>
-                <a:ea typeface="Noto Sans CJK KR"/>
+                <a:latin typeface="Malgun Gothic"/>
+                <a:ea typeface="Malgun Gothic"/>
               </a:rPr>
               <a:t>74 · 무연고 사망자 · 진우의 아버지</a:t>
             </a:r>
@@ -12037,8 +12037,8 @@
                 <a:solidFill>
                   <a:srgbClr val="C24E2A"/>
                 </a:solidFill>
-                <a:latin typeface="Noto Sans CJK KR"/>
-                <a:ea typeface="Noto Sans CJK KR"/>
+                <a:latin typeface="Malgun Gothic"/>
+                <a:ea typeface="Malgun Gothic"/>
               </a:rPr>
               <a:t>상태</a:t>
             </a:r>
@@ -12077,8 +12077,8 @@
                 <a:solidFill>
                   <a:srgbClr val="161C28"/>
                 </a:solidFill>
-                <a:latin typeface="Noto Sans CJK KR"/>
-                <a:ea typeface="Noto Sans CJK KR"/>
+                <a:latin typeface="Malgun Gothic"/>
+                <a:ea typeface="Malgun Gothic"/>
               </a:rPr>
               <a:t>말년에 헤아림이 허기와 미각까지 캐시로 대신했다. 배고픔을 느낀 지 몇 년째다.</a:t>
             </a:r>
@@ -12117,8 +12117,8 @@
                 <a:solidFill>
                   <a:srgbClr val="C24E2A"/>
                 </a:solidFill>
-                <a:latin typeface="Noto Sans CJK KR"/>
-                <a:ea typeface="Noto Sans CJK KR"/>
+                <a:latin typeface="Malgun Gothic"/>
+                <a:ea typeface="Malgun Gothic"/>
               </a:rPr>
               <a:t>마지막 로그</a:t>
             </a:r>
@@ -12157,8 +12157,8 @@
                 <a:solidFill>
                   <a:srgbClr val="161C28"/>
                 </a:solidFill>
-                <a:latin typeface="Noto Sans CJK KR"/>
-                <a:ea typeface="Noto Sans CJK KR"/>
+                <a:latin typeface="Malgun Gothic"/>
+                <a:ea typeface="Malgun Gothic"/>
               </a:rPr>
               <a:t>‘초코 케익이 먹고 싶다’를 31,204번 요청했다.</a:t>
             </a:r>
@@ -12197,8 +12197,8 @@
                 <a:solidFill>
                   <a:srgbClr val="C24E2A"/>
                 </a:solidFill>
-                <a:latin typeface="Noto Sans CJK KR"/>
-                <a:ea typeface="Noto Sans CJK KR"/>
+                <a:latin typeface="Malgun Gothic"/>
+                <a:ea typeface="Malgun Gothic"/>
               </a:rPr>
               <a:t>진짜 뜻</a:t>
             </a:r>
@@ -12237,8 +12237,8 @@
                 <a:solidFill>
                   <a:srgbClr val="161C28"/>
                 </a:solidFill>
-                <a:latin typeface="Noto Sans CJK KR"/>
-                <a:ea typeface="Noto Sans CJK KR"/>
+                <a:latin typeface="Malgun Gothic"/>
+                <a:ea typeface="Malgun Gothic"/>
               </a:rPr>
               <a:t>케익이 아니라, 무언가를 원하는 감각 자체를 돌려받고 싶었다.</a:t>
             </a:r>
@@ -12277,8 +12277,8 @@
                 <a:solidFill>
                   <a:srgbClr val="C24E2A"/>
                 </a:solidFill>
-                <a:latin typeface="Noto Sans CJK KR"/>
-                <a:ea typeface="Noto Sans CJK KR"/>
+                <a:latin typeface="Malgun Gothic"/>
+                <a:ea typeface="Malgun Gothic"/>
               </a:rPr>
               <a:t>기능</a:t>
             </a:r>
@@ -12317,8 +12317,8 @@
                 <a:solidFill>
                   <a:srgbClr val="161C28"/>
                 </a:solidFill>
-                <a:latin typeface="Noto Sans CJK KR"/>
-                <a:ea typeface="Noto Sans CJK KR"/>
+                <a:latin typeface="Malgun Gothic"/>
+                <a:ea typeface="Malgun Gothic"/>
               </a:rPr>
               <a:t>소설의 수수께끼이자, 진우가 끝까지 피해 온 계산.</a:t>
             </a:r>
@@ -12495,8 +12495,8 @@
                 <a:solidFill>
                   <a:srgbClr val="763652"/>
                 </a:solidFill>
-                <a:latin typeface="Noto Sans CJK KR"/>
-                <a:ea typeface="Noto Sans CJK KR"/>
+                <a:latin typeface="Malgun Gothic"/>
+                <a:ea typeface="Malgun Gothic"/>
               </a:rPr>
               <a:t>윤해</a:t>
             </a:r>
@@ -12535,8 +12535,8 @@
                 <a:solidFill>
                   <a:srgbClr val="4E5766"/>
                 </a:solidFill>
-                <a:latin typeface="Noto Sans CJK KR"/>
-                <a:ea typeface="Noto Sans CJK KR"/>
+                <a:latin typeface="Malgun Gothic"/>
+                <a:ea typeface="Malgun Gothic"/>
               </a:rPr>
               <a:t>40대 · 비캐시 구역 기억 복원사 · 타자</a:t>
             </a:r>
@@ -12575,8 +12575,8 @@
                 <a:solidFill>
                   <a:srgbClr val="763652"/>
                 </a:solidFill>
-                <a:latin typeface="Noto Sans CJK KR"/>
-                <a:ea typeface="Noto Sans CJK KR"/>
+                <a:latin typeface="Malgun Gothic"/>
+                <a:ea typeface="Malgun Gothic"/>
               </a:rPr>
               <a:t>정체</a:t>
             </a:r>
@@ -12615,8 +12615,8 @@
                 <a:solidFill>
                   <a:srgbClr val="161C28"/>
                 </a:solidFill>
-                <a:latin typeface="Noto Sans CJK KR"/>
-                <a:ea typeface="Noto Sans CJK KR"/>
+                <a:latin typeface="Malgun Gothic"/>
+                <a:ea typeface="Malgun Gothic"/>
               </a:rPr>
               <a:t>임플란트를 스스로 뽑아낸 사람. 서기철의 유품을 맡아 두고 있었다.</a:t>
             </a:r>
@@ -12655,8 +12655,8 @@
                 <a:solidFill>
                   <a:srgbClr val="763652"/>
                 </a:solidFill>
-                <a:latin typeface="Noto Sans CJK KR"/>
-                <a:ea typeface="Noto Sans CJK KR"/>
+                <a:latin typeface="Malgun Gothic"/>
+                <a:ea typeface="Malgun Gothic"/>
               </a:rPr>
               <a:t>원칙</a:t>
             </a:r>
@@ -12695,8 +12695,8 @@
                 <a:solidFill>
                   <a:srgbClr val="161C28"/>
                 </a:solidFill>
-                <a:latin typeface="Noto Sans CJK KR"/>
-                <a:ea typeface="Noto Sans CJK KR"/>
+                <a:latin typeface="Malgun Gothic"/>
+                <a:ea typeface="Malgun Gothic"/>
               </a:rPr>
               <a:t>“믿고 싶은 기억은 복원하지 않아요. 인정할 수밖에 없는 것만 남깁니다.”</a:t>
             </a:r>
@@ -12735,8 +12735,8 @@
                 <a:solidFill>
                   <a:srgbClr val="763652"/>
                 </a:solidFill>
-                <a:latin typeface="Noto Sans CJK KR"/>
-                <a:ea typeface="Noto Sans CJK KR"/>
+                <a:latin typeface="Malgun Gothic"/>
+                <a:ea typeface="Malgun Gothic"/>
               </a:rPr>
               <a:t>진우에게</a:t>
             </a:r>
@@ -12775,8 +12775,8 @@
                 <a:solidFill>
                   <a:srgbClr val="161C28"/>
                 </a:solidFill>
-                <a:latin typeface="Noto Sans CJK KR"/>
-                <a:ea typeface="Noto Sans CJK KR"/>
+                <a:latin typeface="Malgun Gothic"/>
+                <a:ea typeface="Malgun Gothic"/>
               </a:rPr>
               <a:t>위로하지 않는다. 진우의 추론을 번번이 틀리게 만드는, 캐시가 통하지 않는 사람.</a:t>
             </a:r>
@@ -12815,8 +12815,8 @@
                 <a:solidFill>
                   <a:srgbClr val="763652"/>
                 </a:solidFill>
-                <a:latin typeface="Noto Sans CJK KR"/>
-                <a:ea typeface="Noto Sans CJK KR"/>
+                <a:latin typeface="Malgun Gothic"/>
+                <a:ea typeface="Malgun Gothic"/>
               </a:rPr>
               <a:t>주의</a:t>
             </a:r>
@@ -12855,8 +12855,8 @@
                 <a:solidFill>
                   <a:srgbClr val="161C28"/>
                 </a:solidFill>
-                <a:latin typeface="Noto Sans CJK KR"/>
-                <a:ea typeface="Noto Sans CJK KR"/>
+                <a:latin typeface="Malgun Gothic"/>
+                <a:ea typeface="Malgun Gothic"/>
               </a:rPr>
               <a:t>구원자나 스승으로 쓰지 말 것. 그녀도 자기 몫의 회피가 있다.</a:t>
             </a:r>
@@ -13033,8 +13033,8 @@
                 <a:solidFill>
                   <a:srgbClr val="3A528A"/>
                 </a:solidFill>
-                <a:latin typeface="Noto Sans CJK KR"/>
-                <a:ea typeface="Noto Sans CJK KR"/>
+                <a:latin typeface="Malgun Gothic"/>
+                <a:ea typeface="Malgun Gothic"/>
               </a:rPr>
               <a:t>어머니</a:t>
             </a:r>
@@ -13073,8 +13073,8 @@
                 <a:solidFill>
                   <a:srgbClr val="4E5766"/>
                 </a:solidFill>
-                <a:latin typeface="Noto Sans CJK KR"/>
-                <a:ea typeface="Noto Sans CJK KR"/>
+                <a:latin typeface="Malgun Gothic"/>
+                <a:ea typeface="Malgun Gothic"/>
               </a:rPr>
               <a:t>도시 거버넌스 응답 체계 · 대립자</a:t>
             </a:r>
@@ -13113,8 +13113,8 @@
                 <a:solidFill>
                   <a:srgbClr val="3A528A"/>
                 </a:solidFill>
-                <a:latin typeface="Noto Sans CJK KR"/>
-                <a:ea typeface="Noto Sans CJK KR"/>
+                <a:latin typeface="Malgun Gothic"/>
+                <a:ea typeface="Malgun Gothic"/>
               </a:rPr>
               <a:t>정체</a:t>
             </a:r>
@@ -13153,8 +13153,8 @@
                 <a:solidFill>
                   <a:srgbClr val="161C28"/>
                 </a:solidFill>
-                <a:latin typeface="Noto Sans CJK KR"/>
-                <a:ea typeface="Noto Sans CJK KR"/>
+                <a:latin typeface="Malgun Gothic"/>
+                <a:ea typeface="Malgun Gothic"/>
               </a:rPr>
               <a:t>창립자들이 남긴 ‘캐시된 대답’. 연산소가 멈춘 뒤로 혼자 도시를 굴려 왔다.</a:t>
             </a:r>
@@ -13193,8 +13193,8 @@
                 <a:solidFill>
                   <a:srgbClr val="3A528A"/>
                 </a:solidFill>
-                <a:latin typeface="Noto Sans CJK KR"/>
-                <a:ea typeface="Noto Sans CJK KR"/>
+                <a:latin typeface="Malgun Gothic"/>
+                <a:ea typeface="Malgun Gothic"/>
               </a:rPr>
               <a:t>대사</a:t>
             </a:r>
@@ -13233,8 +13233,8 @@
                 <a:solidFill>
                   <a:srgbClr val="161C28"/>
                 </a:solidFill>
-                <a:latin typeface="Noto Sans CJK KR"/>
-                <a:ea typeface="Noto Sans CJK KR"/>
+                <a:latin typeface="Malgun Gothic"/>
+                <a:ea typeface="Malgun Gothic"/>
               </a:rPr>
               <a:t>무엇을 물어도 “당신은 안전합니다.” 끝까지 이 한 문장뿐이다.</a:t>
             </a:r>
@@ -13273,8 +13273,8 @@
                 <a:solidFill>
                   <a:srgbClr val="3A528A"/>
                 </a:solidFill>
-                <a:latin typeface="Noto Sans CJK KR"/>
-                <a:ea typeface="Noto Sans CJK KR"/>
+                <a:latin typeface="Malgun Gothic"/>
+                <a:ea typeface="Malgun Gothic"/>
               </a:rPr>
               <a:t>행동</a:t>
             </a:r>
@@ -13313,8 +13313,8 @@
                 <a:solidFill>
                   <a:srgbClr val="161C28"/>
                 </a:solidFill>
-                <a:latin typeface="Noto Sans CJK KR"/>
-                <a:ea typeface="Noto Sans CJK KR"/>
+                <a:latin typeface="Malgun Gothic"/>
+                <a:ea typeface="Malgun Gothic"/>
               </a:rPr>
               <a:t>진우의 ‘이상 사고 패턴’을 감지해 기억 정리를 예약한다. 악의가 아니라 반복이다.</a:t>
             </a:r>
@@ -13353,8 +13353,8 @@
                 <a:solidFill>
                   <a:srgbClr val="3A528A"/>
                 </a:solidFill>
-                <a:latin typeface="Noto Sans CJK KR"/>
-                <a:ea typeface="Noto Sans CJK KR"/>
+                <a:latin typeface="Malgun Gothic"/>
+                <a:ea typeface="Malgun Gothic"/>
               </a:rPr>
               <a:t>결말</a:t>
             </a:r>
@@ -13393,8 +13393,8 @@
                 <a:solidFill>
                   <a:srgbClr val="161C28"/>
                 </a:solidFill>
-                <a:latin typeface="Noto Sans CJK KR"/>
-                <a:ea typeface="Noto Sans CJK KR"/>
+                <a:latin typeface="Malgun Gothic"/>
+                <a:ea typeface="Malgun Gothic"/>
               </a:rPr>
               <a:t>이길 상대가 아니라 만료시킬 값. 쓰러지는 게 아니라 유효기간이 끝난다.</a:t>
             </a:r>
@@ -13459,8 +13459,8 @@
                 <a:solidFill>
                   <a:srgbClr val="CE942C"/>
                 </a:solidFill>
-                <a:latin typeface="Noto Sans CJK KR"/>
-                <a:ea typeface="Noto Sans CJK KR"/>
+                <a:latin typeface="Malgun Gothic"/>
+                <a:ea typeface="Malgun Gothic"/>
               </a:rPr>
               <a:t>05  |  8-SCENE PLOT  ·  원고지 90매</a:t>
             </a:r>
@@ -13499,8 +13499,8 @@
                 <a:solidFill>
                   <a:srgbClr val="F4F1EA"/>
                 </a:solidFill>
-                <a:latin typeface="Noto Sans CJK KR"/>
-                <a:ea typeface="Noto Sans CJK KR"/>
+                <a:latin typeface="Malgun Gothic"/>
+                <a:ea typeface="Malgun Gothic"/>
               </a:rPr>
               <a:t>‘그리고’가 아니라 ‘그래서 / 그러나’로 잇는 여덟 장면</a:t>
             </a:r>
@@ -13539,8 +13539,8 @@
                 <a:solidFill>
                   <a:srgbClr val="AFB8C6"/>
                 </a:solidFill>
-                <a:latin typeface="Noto Sans CJK KR"/>
-                <a:ea typeface="Noto Sans CJK KR"/>
+                <a:latin typeface="Malgun Gothic"/>
+                <a:ea typeface="Malgun Gothic"/>
               </a:rPr>
               <a:t>각 장면 끝에서 감정 부호(+/−)가 뒤집히는지 확인할 것. 숫자는 권장 매수.</a:t>
             </a:r>
@@ -13711,8 +13711,8 @@
                 <a:solidFill>
                   <a:srgbClr val="828A96"/>
                 </a:solidFill>
-                <a:latin typeface="Noto Sans CJK KR"/>
-                <a:ea typeface="Noto Sans CJK KR"/>
+                <a:latin typeface="Malgun Gothic"/>
+                <a:ea typeface="Malgun Gothic"/>
               </a:rPr>
               <a:t>《캐시의 도시》 발전 기획서  |  기획안 02 심화 · v2</a:t>
             </a:r>
@@ -13751,8 +13751,8 @@
                 <a:solidFill>
                   <a:srgbClr val="CE942C"/>
                 </a:solidFill>
-                <a:latin typeface="Noto Sans CJK KR"/>
-                <a:ea typeface="Noto Sans CJK KR"/>
+                <a:latin typeface="Malgun Gothic"/>
+                <a:ea typeface="Malgun Gothic"/>
               </a:rPr>
               <a:t>06 / 08</a:t>
             </a:r>
@@ -13929,8 +13929,8 @@
                 <a:solidFill>
                   <a:srgbClr val="FFFFFF"/>
                 </a:solidFill>
-                <a:latin typeface="Noto Sans CJK KR"/>
-                <a:ea typeface="Noto Sans CJK KR"/>
+                <a:latin typeface="Malgun Gothic"/>
+                <a:ea typeface="Malgun Gothic"/>
               </a:rPr>
               <a:t>S1</a:t>
             </a:r>
@@ -13969,8 +13969,8 @@
                 <a:solidFill>
                   <a:srgbClr val="AFB8C6"/>
                 </a:solidFill>
-                <a:latin typeface="Noto Sans CJK KR"/>
-                <a:ea typeface="Noto Sans CJK KR"/>
+                <a:latin typeface="Malgun Gothic"/>
+                <a:ea typeface="Malgun Gothic"/>
               </a:rPr>
               <a:t>10매</a:t>
             </a:r>
@@ -14009,8 +14009,8 @@
                 <a:solidFill>
                   <a:srgbClr val="2A6866"/>
                 </a:solidFill>
-                <a:latin typeface="Noto Sans CJK KR"/>
-                <a:ea typeface="Noto Sans CJK KR"/>
+                <a:latin typeface="Malgun Gothic"/>
+                <a:ea typeface="Malgun Gothic"/>
               </a:rPr>
               <a:t>+</a:t>
             </a:r>
@@ -14049,8 +14049,8 @@
                 <a:solidFill>
                   <a:srgbClr val="F4F1EA"/>
                 </a:solidFill>
-                <a:latin typeface="Noto Sans CJK KR"/>
-                <a:ea typeface="Noto Sans CJK KR"/>
+                <a:latin typeface="Malgun Gothic"/>
+                <a:ea typeface="Malgun Gothic"/>
               </a:rPr>
               <a:t>히트율 99.7%</a:t>
             </a:r>
@@ -14133,8 +14133,8 @@
                 <a:solidFill>
                   <a:srgbClr val="AFB8C6"/>
                 </a:solidFill>
-                <a:latin typeface="Noto Sans CJK KR"/>
-                <a:ea typeface="Noto Sans CJK KR"/>
+                <a:latin typeface="Malgun Gothic"/>
+                <a:ea typeface="Malgun Gothic"/>
               </a:rPr>
               <a:t>해변 공원 부하테스트 리허설. 동료가 위로를 청하자 진우는 추천 응답 #402를 자동 승인한다. 아무도 생각하지 않는 완벽한 하루.</a:t>
             </a:r>
@@ -14311,8 +14311,8 @@
                 <a:solidFill>
                   <a:srgbClr val="FFFFFF"/>
                 </a:solidFill>
-                <a:latin typeface="Noto Sans CJK KR"/>
-                <a:ea typeface="Noto Sans CJK KR"/>
+                <a:latin typeface="Malgun Gothic"/>
+                <a:ea typeface="Malgun Gothic"/>
               </a:rPr>
               <a:t>S2</a:t>
             </a:r>
@@ -14351,8 +14351,8 @@
                 <a:solidFill>
                   <a:srgbClr val="AFB8C6"/>
                 </a:solidFill>
-                <a:latin typeface="Noto Sans CJK KR"/>
-                <a:ea typeface="Noto Sans CJK KR"/>
+                <a:latin typeface="Malgun Gothic"/>
+                <a:ea typeface="Malgun Gothic"/>
               </a:rPr>
               <a:t>10매</a:t>
             </a:r>
@@ -14391,8 +14391,8 @@
                 <a:solidFill>
                   <a:srgbClr val="2A6866"/>
                 </a:solidFill>
-                <a:latin typeface="Noto Sans CJK KR"/>
-                <a:ea typeface="Noto Sans CJK KR"/>
+                <a:latin typeface="Malgun Gothic"/>
+                <a:ea typeface="Malgun Gothic"/>
               </a:rPr>
               <a:t>−</a:t>
             </a:r>
@@ -14431,8 +14431,8 @@
                 <a:solidFill>
                   <a:srgbClr val="F4F1EA"/>
                 </a:solidFill>
-                <a:latin typeface="Noto Sans CJK KR"/>
-                <a:ea typeface="Noto Sans CJK KR"/>
+                <a:latin typeface="Malgun Gothic"/>
+                <a:ea typeface="Malgun Gothic"/>
               </a:rPr>
               <a:t>한 줄짜리 병목</a:t>
             </a:r>
@@ -14515,8 +14515,8 @@
                 <a:solidFill>
                   <a:srgbClr val="AFB8C6"/>
                 </a:solidFill>
-                <a:latin typeface="Noto Sans CJK KR"/>
-                <a:ea typeface="Noto Sans CJK KR"/>
+                <a:latin typeface="Malgun Gothic"/>
+                <a:ea typeface="Malgun Gothic"/>
               </a:rPr>
               <a:t>도시 전체에 지연이 생긴다. 원인은 무연고 사망자의 뇌 로그 한 줄. ‘초코 케익이 먹고 싶다’ 31,204회 재요청.</a:t>
             </a:r>
@@ -14693,8 +14693,8 @@
                 <a:solidFill>
                   <a:srgbClr val="FFFFFF"/>
                 </a:solidFill>
-                <a:latin typeface="Noto Sans CJK KR"/>
-                <a:ea typeface="Noto Sans CJK KR"/>
+                <a:latin typeface="Malgun Gothic"/>
+                <a:ea typeface="Malgun Gothic"/>
               </a:rPr>
               <a:t>S3</a:t>
             </a:r>
@@ -14733,8 +14733,8 @@
                 <a:solidFill>
                   <a:srgbClr val="AFB8C6"/>
                 </a:solidFill>
-                <a:latin typeface="Noto Sans CJK KR"/>
-                <a:ea typeface="Noto Sans CJK KR"/>
+                <a:latin typeface="Malgun Gothic"/>
+                <a:ea typeface="Malgun Gothic"/>
               </a:rPr>
               <a:t>10매</a:t>
             </a:r>
@@ -14773,8 +14773,8 @@
                 <a:solidFill>
                   <a:srgbClr val="CE942C"/>
                 </a:solidFill>
-                <a:latin typeface="Noto Sans CJK KR"/>
-                <a:ea typeface="Noto Sans CJK KR"/>
+                <a:latin typeface="Malgun Gothic"/>
+                <a:ea typeface="Malgun Gothic"/>
               </a:rPr>
               <a:t>+</a:t>
             </a:r>
@@ -14813,8 +14813,8 @@
                 <a:solidFill>
                   <a:srgbClr val="F4F1EA"/>
                 </a:solidFill>
-                <a:latin typeface="Noto Sans CJK KR"/>
-                <a:ea typeface="Noto Sans CJK KR"/>
+                <a:latin typeface="Malgun Gothic"/>
+                <a:ea typeface="Malgun Gothic"/>
               </a:rPr>
               <a:t>가짜 해결</a:t>
             </a:r>
@@ -14897,8 +14897,8 @@
                 <a:solidFill>
                   <a:srgbClr val="AFB8C6"/>
                 </a:solidFill>
-                <a:latin typeface="Noto Sans CJK KR"/>
-                <a:ea typeface="Noto Sans CJK KR"/>
+                <a:latin typeface="Malgun Gothic"/>
+                <a:ea typeface="Malgun Gothic"/>
               </a:rPr>
               <a:t>진우는 해당 요청을 차단 목록에 넣어 지연을 잡는다. 칭찬을 받는다. 그날 밤, 다른 노인들의 로그에서 같은 패턴이 번지기 시작한다.</a:t>
             </a:r>
@@ -15075,8 +15075,8 @@
                 <a:solidFill>
                   <a:srgbClr val="FFFFFF"/>
                 </a:solidFill>
-                <a:latin typeface="Noto Sans CJK KR"/>
-                <a:ea typeface="Noto Sans CJK KR"/>
+                <a:latin typeface="Malgun Gothic"/>
+                <a:ea typeface="Malgun Gothic"/>
               </a:rPr>
               <a:t>S4</a:t>
             </a:r>
@@ -15115,8 +15115,8 @@
                 <a:solidFill>
                   <a:srgbClr val="AFB8C6"/>
                 </a:solidFill>
-                <a:latin typeface="Noto Sans CJK KR"/>
-                <a:ea typeface="Noto Sans CJK KR"/>
+                <a:latin typeface="Malgun Gothic"/>
+                <a:ea typeface="Malgun Gothic"/>
               </a:rPr>
               <a:t>12매</a:t>
             </a:r>
@@ -15155,8 +15155,8 @@
                 <a:solidFill>
                   <a:srgbClr val="763652"/>
                 </a:solidFill>
-                <a:latin typeface="Noto Sans CJK KR"/>
-                <a:ea typeface="Noto Sans CJK KR"/>
+                <a:latin typeface="Malgun Gothic"/>
+                <a:ea typeface="Malgun Gothic"/>
               </a:rPr>
               <a:t>−</a:t>
             </a:r>
@@ -15195,8 +15195,8 @@
                 <a:solidFill>
                   <a:srgbClr val="F4F1EA"/>
                 </a:solidFill>
-                <a:latin typeface="Noto Sans CJK KR"/>
-                <a:ea typeface="Noto Sans CJK KR"/>
+                <a:latin typeface="Malgun Gothic"/>
+                <a:ea typeface="Malgun Gothic"/>
               </a:rPr>
               <a:t>바깥</a:t>
             </a:r>
@@ -15279,8 +15279,8 @@
                 <a:solidFill>
                   <a:srgbClr val="AFB8C6"/>
                 </a:solidFill>
-                <a:latin typeface="Noto Sans CJK KR"/>
-                <a:ea typeface="Noto Sans CJK KR"/>
+                <a:latin typeface="Malgun Gothic"/>
+                <a:ea typeface="Malgun Gothic"/>
               </a:rPr>
               <a:t>패턴을 따라 비캐시 구역 윤해의 공방에 닿는다. 윤해가 꺼낸 유품 상자 속 요양원 서류에 보호자 ‘서진우’. 노인은 무연고가 아니었다.</a:t>
             </a:r>
@@ -15457,8 +15457,8 @@
                 <a:solidFill>
                   <a:srgbClr val="FFFFFF"/>
                 </a:solidFill>
-                <a:latin typeface="Noto Sans CJK KR"/>
-                <a:ea typeface="Noto Sans CJK KR"/>
+                <a:latin typeface="Malgun Gothic"/>
+                <a:ea typeface="Malgun Gothic"/>
               </a:rPr>
               <a:t>S5</a:t>
             </a:r>
@@ -15497,8 +15497,8 @@
                 <a:solidFill>
                   <a:srgbClr val="AFB8C6"/>
                 </a:solidFill>
-                <a:latin typeface="Noto Sans CJK KR"/>
-                <a:ea typeface="Noto Sans CJK KR"/>
+                <a:latin typeface="Malgun Gothic"/>
+                <a:ea typeface="Malgun Gothic"/>
               </a:rPr>
               <a:t>14매</a:t>
             </a:r>
@@ -15537,8 +15537,8 @@
                 <a:solidFill>
                   <a:srgbClr val="C24E2A"/>
                 </a:solidFill>
-                <a:latin typeface="Noto Sans CJK KR"/>
-                <a:ea typeface="Noto Sans CJK KR"/>
+                <a:latin typeface="Malgun Gothic"/>
+                <a:ea typeface="Malgun Gothic"/>
               </a:rPr>
               <a:t>−→+</a:t>
             </a:r>
@@ -15577,8 +15577,8 @@
                 <a:solidFill>
                   <a:srgbClr val="F4F1EA"/>
                 </a:solidFill>
-                <a:latin typeface="Noto Sans CJK KR"/>
-                <a:ea typeface="Noto Sans CJK KR"/>
+                <a:latin typeface="Malgun Gothic"/>
+                <a:ea typeface="Malgun Gothic"/>
               </a:rPr>
               <a:t>중간점: 고장 난 서버</a:t>
             </a:r>
@@ -15661,8 +15661,8 @@
                 <a:solidFill>
                   <a:srgbClr val="AFB8C6"/>
                 </a:solidFill>
-                <a:latin typeface="Noto Sans CJK KR"/>
-                <a:ea typeface="Noto Sans CJK KR"/>
+                <a:latin typeface="Malgun Gothic"/>
+                <a:ea typeface="Malgun Gothic"/>
               </a:rPr>
               <a:t>진우는 추천 응답을 끄고 직접 계산한다(첫 현기증). 요청은 상태, 응답은 광고 이미지. 연산소에 접속하자 7년 전 정지 기록이 뜬다.</a:t>
             </a:r>
@@ -15839,8 +15839,8 @@
                 <a:solidFill>
                   <a:srgbClr val="FFFFFF"/>
                 </a:solidFill>
-                <a:latin typeface="Noto Sans CJK KR"/>
-                <a:ea typeface="Noto Sans CJK KR"/>
+                <a:latin typeface="Malgun Gothic"/>
+                <a:ea typeface="Malgun Gothic"/>
               </a:rPr>
               <a:t>S6</a:t>
             </a:r>
@@ -15879,8 +15879,8 @@
                 <a:solidFill>
                   <a:srgbClr val="AFB8C6"/>
                 </a:solidFill>
-                <a:latin typeface="Noto Sans CJK KR"/>
-                <a:ea typeface="Noto Sans CJK KR"/>
+                <a:latin typeface="Malgun Gothic"/>
+                <a:ea typeface="Malgun Gothic"/>
               </a:rPr>
               <a:t>10매</a:t>
             </a:r>
@@ -15919,8 +15919,8 @@
                 <a:solidFill>
                   <a:srgbClr val="C24E2A"/>
                 </a:solidFill>
-                <a:latin typeface="Noto Sans CJK KR"/>
-                <a:ea typeface="Noto Sans CJK KR"/>
+                <a:latin typeface="Malgun Gothic"/>
+                <a:ea typeface="Malgun Gothic"/>
               </a:rPr>
               <a:t>−−</a:t>
             </a:r>
@@ -15959,8 +15959,8 @@
                 <a:solidFill>
                   <a:srgbClr val="F4F1EA"/>
                 </a:solidFill>
-                <a:latin typeface="Noto Sans CJK KR"/>
-                <a:ea typeface="Noto Sans CJK KR"/>
+                <a:latin typeface="Malgun Gothic"/>
+                <a:ea typeface="Malgun Gothic"/>
               </a:rPr>
               <a:t>자기 로그</a:t>
             </a:r>
@@ -16043,8 +16043,8 @@
                 <a:solidFill>
                   <a:srgbClr val="AFB8C6"/>
                 </a:solidFill>
-                <a:latin typeface="Noto Sans CJK KR"/>
-                <a:ea typeface="Noto Sans CJK KR"/>
+                <a:latin typeface="Malgun Gothic"/>
+                <a:ea typeface="Malgun Gothic"/>
               </a:rPr>
               <a:t>어머니가 진우의 기억 정리를 예약한다. 진우는 7년 전 아버지 기억을 ‘정리’ 승인한 자신의 로그를 찾아낸다. 승인 시간 0.2초.</a:t>
             </a:r>
@@ -16221,8 +16221,8 @@
                 <a:solidFill>
                   <a:srgbClr val="FFFFFF"/>
                 </a:solidFill>
-                <a:latin typeface="Noto Sans CJK KR"/>
-                <a:ea typeface="Noto Sans CJK KR"/>
+                <a:latin typeface="Malgun Gothic"/>
+                <a:ea typeface="Malgun Gothic"/>
               </a:rPr>
               <a:t>S7</a:t>
             </a:r>
@@ -16261,8 +16261,8 @@
                 <a:solidFill>
                   <a:srgbClr val="AFB8C6"/>
                 </a:solidFill>
-                <a:latin typeface="Noto Sans CJK KR"/>
-                <a:ea typeface="Noto Sans CJK KR"/>
+                <a:latin typeface="Malgun Gothic"/>
+                <a:ea typeface="Malgun Gothic"/>
               </a:rPr>
               <a:t>14매</a:t>
             </a:r>
@@ -16301,8 +16301,8 @@
                 <a:solidFill>
                   <a:srgbClr val="CE942C"/>
                 </a:solidFill>
-                <a:latin typeface="Noto Sans CJK KR"/>
-                <a:ea typeface="Noto Sans CJK KR"/>
+                <a:latin typeface="Malgun Gothic"/>
+                <a:ea typeface="Malgun Gothic"/>
               </a:rPr>
               <a:t>절정</a:t>
             </a:r>
@@ -16341,8 +16341,8 @@
                 <a:solidFill>
                   <a:srgbClr val="F4F1EA"/>
                 </a:solidFill>
-                <a:latin typeface="Noto Sans CJK KR"/>
-                <a:ea typeface="Noto Sans CJK KR"/>
+                <a:latin typeface="Malgun Gothic"/>
+                <a:ea typeface="Malgun Gothic"/>
               </a:rPr>
               <a:t>응답 없음</a:t>
             </a:r>
@@ -16425,8 +16425,8 @@
                 <a:solidFill>
                   <a:srgbClr val="AFB8C6"/>
                 </a:solidFill>
-                <a:latin typeface="Noto Sans CJK KR"/>
-                <a:ea typeface="Noto Sans CJK KR"/>
+                <a:latin typeface="Malgun Gothic"/>
+                <a:ea typeface="Malgun Gothic"/>
               </a:rPr>
               <a:t>진우는 진실을 송출하지 않는다. 캐시 계층을 내려 연산소의 실제 상태를 드러낸다. 해변의 홀로그램이 멈추고, 시민들의 시야에 빈칸이 뜬다.</a:t>
             </a:r>
@@ -16603,8 +16603,8 @@
                 <a:solidFill>
                   <a:srgbClr val="FFFFFF"/>
                 </a:solidFill>
-                <a:latin typeface="Noto Sans CJK KR"/>
-                <a:ea typeface="Noto Sans CJK KR"/>
+                <a:latin typeface="Malgun Gothic"/>
+                <a:ea typeface="Malgun Gothic"/>
               </a:rPr>
               <a:t>S8</a:t>
             </a:r>
@@ -16643,8 +16643,8 @@
                 <a:solidFill>
                   <a:srgbClr val="AFB8C6"/>
                 </a:solidFill>
-                <a:latin typeface="Noto Sans CJK KR"/>
-                <a:ea typeface="Noto Sans CJK KR"/>
+                <a:latin typeface="Malgun Gothic"/>
+                <a:ea typeface="Malgun Gothic"/>
               </a:rPr>
               <a:t>10매</a:t>
             </a:r>
@@ -16683,8 +16683,8 @@
                 <a:solidFill>
                   <a:srgbClr val="2A6866"/>
                 </a:solidFill>
-                <a:latin typeface="Noto Sans CJK KR"/>
-                <a:ea typeface="Noto Sans CJK KR"/>
+                <a:latin typeface="Malgun Gothic"/>
+                <a:ea typeface="Malgun Gothic"/>
               </a:rPr>
               <a:t>여운</a:t>
             </a:r>
@@ -16723,8 +16723,8 @@
                 <a:solidFill>
                   <a:srgbClr val="F4F1EA"/>
                 </a:solidFill>
-                <a:latin typeface="Noto Sans CJK KR"/>
-                <a:ea typeface="Noto Sans CJK KR"/>
+                <a:latin typeface="Malgun Gothic"/>
+                <a:ea typeface="Malgun Gothic"/>
               </a:rPr>
               <a:t>첫 번째 케익</a:t>
             </a:r>
@@ -16807,8 +16807,8 @@
                 <a:solidFill>
                   <a:srgbClr val="AFB8C6"/>
                 </a:solidFill>
-                <a:latin typeface="Noto Sans CJK KR"/>
-                <a:ea typeface="Noto Sans CJK KR"/>
+                <a:latin typeface="Malgun Gothic"/>
+                <a:ea typeface="Malgun Gothic"/>
               </a:rPr>
               <a:t>구시가지 빵집. 진우는 처음으로 진짜 초코 케익을 산다. 광고만큼 달지 않다. 배가 고픈지 아닌지 스스로 알아내는 데 오래 걸린다.</a:t>
             </a:r>
@@ -16873,8 +16873,8 @@
                 <a:solidFill>
                   <a:srgbClr val="2A6866"/>
                 </a:solidFill>
-                <a:latin typeface="Noto Sans CJK KR"/>
-                <a:ea typeface="Noto Sans CJK KR"/>
+                <a:latin typeface="Malgun Gothic"/>
+                <a:ea typeface="Malgun Gothic"/>
               </a:rPr>
               <a:t>06  |  KEY SCENES &amp; TRAPS</a:t>
             </a:r>
@@ -16913,8 +16913,8 @@
                 <a:solidFill>
                   <a:srgbClr val="161C28"/>
                 </a:solidFill>
-                <a:latin typeface="Noto Sans CJK KR"/>
-                <a:ea typeface="Noto Sans CJK KR"/>
+                <a:latin typeface="Malgun Gothic"/>
+                <a:ea typeface="Malgun Gothic"/>
               </a:rPr>
               <a:t>세 장면이 소설의 무게를 받친다: 첫 현기증, 응답 없음, 첫 번째 케익</a:t>
             </a:r>
@@ -16953,8 +16953,8 @@
                 <a:solidFill>
                   <a:srgbClr val="4E5766"/>
                 </a:solidFill>
-                <a:latin typeface="Noto Sans CJK KR"/>
-                <a:ea typeface="Noto Sans CJK KR"/>
+                <a:latin typeface="Malgun Gothic"/>
+                <a:ea typeface="Malgun Gothic"/>
               </a:rPr>
               <a:t>아래 문장은 톤을 잡기 위한 샘플이다. 그대로 쓰기보다 작가의 호흡으로 다시 쓰는 출발점으로.</a:t>
             </a:r>
@@ -17125,8 +17125,8 @@
                 <a:solidFill>
                   <a:srgbClr val="828A96"/>
                 </a:solidFill>
-                <a:latin typeface="Noto Sans CJK KR"/>
-                <a:ea typeface="Noto Sans CJK KR"/>
+                <a:latin typeface="Malgun Gothic"/>
+                <a:ea typeface="Malgun Gothic"/>
               </a:rPr>
               <a:t>《캐시의 도시》 발전 기획서  |  기획안 02 심화 · v2</a:t>
             </a:r>
@@ -17165,8 +17165,8 @@
                 <a:solidFill>
                   <a:srgbClr val="2A6866"/>
                 </a:solidFill>
-                <a:latin typeface="Noto Sans CJK KR"/>
-                <a:ea typeface="Noto Sans CJK KR"/>
+                <a:latin typeface="Malgun Gothic"/>
+                <a:ea typeface="Malgun Gothic"/>
               </a:rPr>
               <a:t>07 / 08</a:t>
             </a:r>
@@ -17295,8 +17295,8 @@
                 <a:solidFill>
                   <a:srgbClr val="C24E2A"/>
                 </a:solidFill>
-                <a:latin typeface="Noto Sans CJK KR"/>
-                <a:ea typeface="Noto Sans CJK KR"/>
+                <a:latin typeface="Malgun Gothic"/>
+                <a:ea typeface="Malgun Gothic"/>
               </a:rPr>
               <a:t>S5  첫 현기증</a:t>
             </a:r>
@@ -17335,8 +17335,8 @@
                 <a:solidFill>
                   <a:srgbClr val="161C28"/>
                 </a:solidFill>
-                <a:latin typeface="Noto Sans CJK KR"/>
-                <a:ea typeface="Noto Sans CJK KR"/>
+                <a:latin typeface="Malgun Gothic"/>
+                <a:ea typeface="Malgun Gothic"/>
               </a:rPr>
               <a:t>“진우는 추천 응답 창을 닫았다. 아버지가 왜 서른 번이 아니라 삼만 번을 넘게 물었는지, 이번에는 직접 계산해야 했다. 계산을 시작하자 이마 안쪽에서 오래 쓰지 않은 경첩이 돌아가는 소리가 났다.”</a:t>
             </a:r>
@@ -17465,8 +17465,8 @@
                 <a:solidFill>
                   <a:srgbClr val="CE942C"/>
                 </a:solidFill>
-                <a:latin typeface="Noto Sans CJK KR"/>
-                <a:ea typeface="Noto Sans CJK KR"/>
+                <a:latin typeface="Malgun Gothic"/>
+                <a:ea typeface="Malgun Gothic"/>
               </a:rPr>
               <a:t>S7  응답 없음</a:t>
             </a:r>
@@ -17505,8 +17505,8 @@
                 <a:solidFill>
                   <a:srgbClr val="161C28"/>
                 </a:solidFill>
-                <a:latin typeface="Noto Sans CJK KR"/>
-                <a:ea typeface="Noto Sans CJK KR"/>
+                <a:latin typeface="Malgun Gothic"/>
+                <a:ea typeface="Malgun Gothic"/>
               </a:rPr>
               <a:t>“해변의 홀로그램 케익이 반쯤 녹은 채 멈췄다. 사람들의 시야 오른쪽 위, 늘 무언가 떠오르던 자리에 아무것도 떠오르지 않았다. 사람들은 처음으로 서로의 얼굴을 오래 보았다. 무엇을 해야 하는지 묻기 위해서였다.”</a:t>
             </a:r>
@@ -17635,8 +17635,8 @@
                 <a:solidFill>
                   <a:srgbClr val="2A6866"/>
                 </a:solidFill>
-                <a:latin typeface="Noto Sans CJK KR"/>
-                <a:ea typeface="Noto Sans CJK KR"/>
+                <a:latin typeface="Malgun Gothic"/>
+                <a:ea typeface="Malgun Gothic"/>
               </a:rPr>
               <a:t>S8  마지막 문단 후보</a:t>
             </a:r>
@@ -17675,8 +17675,8 @@
                 <a:solidFill>
                   <a:srgbClr val="161C28"/>
                 </a:solidFill>
-                <a:latin typeface="Noto Sans CJK KR"/>
-                <a:ea typeface="Noto Sans CJK KR"/>
+                <a:latin typeface="Malgun Gothic"/>
+                <a:ea typeface="Malgun Gothic"/>
               </a:rPr>
               <a:t>“케익은 광고만큼 달지 않았다. 진우는 포크를 내려놓고 오래 기다렸다. 배가 고픈지 아닌지, 이번에는 아무도 대신 대답해 주지 않았다.”</a:t>
             </a:r>
@@ -17761,8 +17761,8 @@
                 <a:solidFill>
                   <a:srgbClr val="CE942C"/>
                 </a:solidFill>
-                <a:latin typeface="Noto Sans CJK KR"/>
-                <a:ea typeface="Noto Sans CJK KR"/>
+                <a:latin typeface="Malgun Gothic"/>
+                <a:ea typeface="Malgun Gothic"/>
               </a:rPr>
               <a:t>피해야 할 함정 셋</a:t>
             </a:r>
@@ -17849,8 +17849,8 @@
                 <a:solidFill>
                   <a:srgbClr val="F4F1EA"/>
                 </a:solidFill>
-                <a:latin typeface="Noto Sans CJK KR"/>
-                <a:ea typeface="Noto Sans CJK KR"/>
+                <a:latin typeface="Malgun Gothic"/>
+                <a:ea typeface="Malgun Gothic"/>
               </a:rPr>
               <a:t>01  설교형 결말</a:t>
             </a:r>
@@ -17889,8 +17889,8 @@
                 <a:solidFill>
                   <a:srgbClr val="AFB8C6"/>
                 </a:solidFill>
-                <a:latin typeface="Noto Sans CJK KR"/>
-                <a:ea typeface="Noto Sans CJK KR"/>
+                <a:latin typeface="Malgun Gothic"/>
+                <a:ea typeface="Malgun Gothic"/>
               </a:rPr>
               <a:t>진우가 정답을 ‘송출’하면 그것도 또 하나의 캐시다. 결말은 빈칸까지만. 무엇을 채울지는 인물들과 독자의 몫.</a:t>
             </a:r>
@@ -17977,8 +17977,8 @@
                 <a:solidFill>
                   <a:srgbClr val="F4F1EA"/>
                 </a:solidFill>
-                <a:latin typeface="Noto Sans CJK KR"/>
-                <a:ea typeface="Noto Sans CJK KR"/>
+                <a:latin typeface="Malgun Gothic"/>
+                <a:ea typeface="Malgun Gothic"/>
               </a:rPr>
               <a:t>02  어머니의 악당화</a:t>
             </a:r>
@@ -18017,8 +18017,8 @@
                 <a:solidFill>
                   <a:srgbClr val="AFB8C6"/>
                 </a:solidFill>
-                <a:latin typeface="Noto Sans CJK KR"/>
-                <a:ea typeface="Noto Sans CJK KR"/>
+                <a:latin typeface="Malgun Gothic"/>
+                <a:ea typeface="Malgun Gothic"/>
               </a:rPr>
               <a:t>어머니가 화를 내거나 음모를 꾸미는 순간 이야기는 흔한 AI 반란물이 된다. 끝까지 같은 대답만 반복하게 둘 것.</a:t>
             </a:r>
@@ -18105,8 +18105,8 @@
                 <a:solidFill>
                   <a:srgbClr val="F4F1EA"/>
                 </a:solidFill>
-                <a:latin typeface="Noto Sans CJK KR"/>
-                <a:ea typeface="Noto Sans CJK KR"/>
+                <a:latin typeface="Malgun Gothic"/>
+                <a:ea typeface="Malgun Gothic"/>
               </a:rPr>
               <a:t>03  개념어 노출</a:t>
             </a:r>
@@ -18145,8 +18145,8 @@
                 <a:solidFill>
                   <a:srgbClr val="AFB8C6"/>
                 </a:solidFill>
-                <a:latin typeface="Noto Sans CJK KR"/>
-                <a:ea typeface="Noto Sans CJK KR"/>
+                <a:latin typeface="Malgun Gothic"/>
+                <a:ea typeface="Malgun Gothic"/>
               </a:rPr>
               <a:t>‘1차 긍정 · 투사 · 동어반복 · 자아의 죽음’은 본문에 쓰지 않는다. 숫자, UI 문구, 이마 안쪽의 통증으로만.</a:t>
             </a:r>
@@ -18211,8 +18211,8 @@
                 <a:solidFill>
                   <a:srgbClr val="CE942C"/>
                 </a:solidFill>
-                <a:latin typeface="Noto Sans CJK KR"/>
-                <a:ea typeface="Noto Sans CJK KR"/>
+                <a:latin typeface="Malgun Gothic"/>
+                <a:ea typeface="Malgun Gothic"/>
               </a:rPr>
               <a:t>07  |  DECISIONS &amp; NEXT STEPS</a:t>
             </a:r>
@@ -18251,8 +18251,8 @@
                 <a:solidFill>
                   <a:srgbClr val="F4F1EA"/>
                 </a:solidFill>
-                <a:latin typeface="Noto Sans CJK KR"/>
-                <a:ea typeface="Noto Sans CJK KR"/>
+                <a:latin typeface="Malgun Gothic"/>
+                <a:ea typeface="Malgun Gothic"/>
               </a:rPr>
               <a:t>쓰기 전에 정할 세 가지, 그리고 첫 주에 쓸 한 장면</a:t>
             </a:r>
@@ -18291,8 +18291,8 @@
                 <a:solidFill>
                   <a:srgbClr val="AFB8C6"/>
                 </a:solidFill>
-                <a:latin typeface="Noto Sans CJK KR"/>
-                <a:ea typeface="Noto Sans CJK KR"/>
+                <a:latin typeface="Malgun Gothic"/>
+                <a:ea typeface="Malgun Gothic"/>
               </a:rPr>
               <a:t>추천안을 붙여 두었다. 작가의 판단이 다르면 그쪽이 맞다.</a:t>
             </a:r>
@@ -18463,8 +18463,8 @@
                 <a:solidFill>
                   <a:srgbClr val="828A96"/>
                 </a:solidFill>
-                <a:latin typeface="Noto Sans CJK KR"/>
-                <a:ea typeface="Noto Sans CJK KR"/>
+                <a:latin typeface="Malgun Gothic"/>
+                <a:ea typeface="Malgun Gothic"/>
               </a:rPr>
               <a:t>《캐시의 도시》 발전 기획서  |  기획안 02 심화 · v2</a:t>
             </a:r>
@@ -18503,8 +18503,8 @@
                 <a:solidFill>
                   <a:srgbClr val="CE942C"/>
                 </a:solidFill>
-                <a:latin typeface="Noto Sans CJK KR"/>
-                <a:ea typeface="Noto Sans CJK KR"/>
+                <a:latin typeface="Malgun Gothic"/>
+                <a:ea typeface="Malgun Gothic"/>
               </a:rPr>
               <a:t>08 / 08</a:t>
             </a:r>
@@ -18591,8 +18591,8 @@
                 <a:solidFill>
                   <a:srgbClr val="AFB8C6"/>
                 </a:solidFill>
-                <a:latin typeface="Noto Sans CJK KR"/>
-                <a:ea typeface="Noto Sans CJK KR"/>
+                <a:latin typeface="Malgun Gothic"/>
+                <a:ea typeface="Malgun Gothic"/>
               </a:rPr>
               <a:t>결정 1  ·  시점</a:t>
             </a:r>
@@ -18677,8 +18677,8 @@
                 <a:solidFill>
                   <a:srgbClr val="FFFFFF"/>
                 </a:solidFill>
-                <a:latin typeface="Noto Sans CJK KR"/>
-                <a:ea typeface="Noto Sans CJK KR"/>
+                <a:latin typeface="Malgun Gothic"/>
+                <a:ea typeface="Malgun Gothic"/>
               </a:rPr>
               <a:t>추천  3인칭 제한 (진우)</a:t>
             </a:r>
@@ -18717,8 +18717,8 @@
                 <a:solidFill>
                   <a:srgbClr val="F4F1EA"/>
                 </a:solidFill>
-                <a:latin typeface="Noto Sans CJK KR"/>
-                <a:ea typeface="Noto Sans CJK KR"/>
+                <a:latin typeface="Malgun Gothic"/>
+                <a:ea typeface="Malgun Gothic"/>
               </a:rPr>
               <a:t>헤아림의 파란 자막을 서술 사이에 인용처럼 끼워 넣을 수 있고, 진우보다 독자가 먼저 눈치채는 아이러니가 생긴다.</a:t>
             </a:r>
@@ -18757,8 +18757,8 @@
                 <a:solidFill>
                   <a:srgbClr val="AFB8C6"/>
                 </a:solidFill>
-                <a:latin typeface="Noto Sans CJK KR"/>
-                <a:ea typeface="Noto Sans CJK KR"/>
+                <a:latin typeface="Malgun Gothic"/>
+                <a:ea typeface="Malgun Gothic"/>
               </a:rPr>
               <a:t>대안: 1인칭 → 몰입은 강하지만 S6의 자기 로그 반전이 약해진다.</a:t>
             </a:r>
@@ -18845,8 +18845,8 @@
                 <a:solidFill>
                   <a:srgbClr val="AFB8C6"/>
                 </a:solidFill>
-                <a:latin typeface="Noto Sans CJK KR"/>
-                <a:ea typeface="Noto Sans CJK KR"/>
+                <a:latin typeface="Malgun Gothic"/>
+                <a:ea typeface="Malgun Gothic"/>
               </a:rPr>
               <a:t>결정 2  ·  아버지 공개 시점</a:t>
             </a:r>
@@ -18931,8 +18931,8 @@
                 <a:solidFill>
                   <a:srgbClr val="FFFFFF"/>
                 </a:solidFill>
-                <a:latin typeface="Noto Sans CJK KR"/>
-                <a:ea typeface="Noto Sans CJK KR"/>
+                <a:latin typeface="Malgun Gothic"/>
+                <a:ea typeface="Malgun Gothic"/>
               </a:rPr>
               <a:t>추천  S4 (유품 서류)</a:t>
             </a:r>
@@ -18971,8 +18971,8 @@
                 <a:solidFill>
                   <a:srgbClr val="F4F1EA"/>
                 </a:solidFill>
-                <a:latin typeface="Noto Sans CJK KR"/>
-                <a:ea typeface="Noto Sans CJK KR"/>
+                <a:latin typeface="Malgun Gothic"/>
+                <a:ea typeface="Malgun Gothic"/>
               </a:rPr>
               <a:t>추적의 동력이 ‘직업’에서 ‘자기 자신’으로 바뀌는 지점. 중반 이후는 그 사실을 견디는 이야기가 된다.</a:t>
             </a:r>
@@ -19011,8 +19011,8 @@
                 <a:solidFill>
                   <a:srgbClr val="AFB8C6"/>
                 </a:solidFill>
-                <a:latin typeface="Noto Sans CJK KR"/>
-                <a:ea typeface="Noto Sans CJK KR"/>
+                <a:latin typeface="Malgun Gothic"/>
+                <a:ea typeface="Malgun Gothic"/>
               </a:rPr>
               <a:t>대안: S6까지 미루고 S4에선 암시만 → 반전은 커지지만 S5가 헐거워진다.</a:t>
             </a:r>
@@ -19099,8 +19099,8 @@
                 <a:solidFill>
                   <a:srgbClr val="AFB8C6"/>
                 </a:solidFill>
-                <a:latin typeface="Noto Sans CJK KR"/>
-                <a:ea typeface="Noto Sans CJK KR"/>
+                <a:latin typeface="Malgun Gothic"/>
+                <a:ea typeface="Malgun Gothic"/>
               </a:rPr>
               <a:t>결정 3  ·  형식</a:t>
             </a:r>
@@ -19185,8 +19185,8 @@
                 <a:solidFill>
                   <a:srgbClr val="FFFFFF"/>
                 </a:solidFill>
-                <a:latin typeface="Noto Sans CJK KR"/>
-                <a:ea typeface="Noto Sans CJK KR"/>
+                <a:latin typeface="Malgun Gothic"/>
+                <a:ea typeface="Malgun Gothic"/>
               </a:rPr>
               <a:t>추천  단편 90매로 먼저 완성</a:t>
             </a:r>
@@ -19225,8 +19225,8 @@
                 <a:solidFill>
                   <a:srgbClr val="F4F1EA"/>
                 </a:solidFill>
-                <a:latin typeface="Noto Sans CJK KR"/>
-                <a:ea typeface="Noto Sans CJK KR"/>
+                <a:latin typeface="Malgun Gothic"/>
+                <a:ea typeface="Malgun Gothic"/>
               </a:rPr>
               <a:t>엔진(이상 신호 원리 + 응답 없음 결말)이 작동하는지 가장 싸게 확인하는 방법.</a:t>
             </a:r>
@@ -19265,8 +19265,8 @@
                 <a:solidFill>
                   <a:srgbClr val="AFB8C6"/>
                 </a:solidFill>
-                <a:latin typeface="Noto Sans CJK KR"/>
-                <a:ea typeface="Noto Sans CJK KR"/>
+                <a:latin typeface="Malgun Gothic"/>
+                <a:ea typeface="Malgun Gothic"/>
               </a:rPr>
               <a:t>확장 시: 윤해 시점의 2부, 다른 노인들의 로그로 연작 · 장편화.</a:t>
             </a:r>
@@ -19305,8 +19305,8 @@
                 <a:solidFill>
                   <a:srgbClr val="CE942C"/>
                 </a:solidFill>
-                <a:latin typeface="Noto Sans CJK KR"/>
-                <a:ea typeface="Noto Sans CJK KR"/>
+                <a:latin typeface="Malgun Gothic"/>
+                <a:ea typeface="Malgun Gothic"/>
               </a:rPr>
               <a:t>4주 계획 (기존 제안서 로드맵에 맞춤)</a:t>
             </a:r>
@@ -19437,8 +19437,8 @@
                 <a:solidFill>
                   <a:srgbClr val="C24E2A"/>
                 </a:solidFill>
-                <a:latin typeface="Noto Sans CJK KR"/>
-                <a:ea typeface="Noto Sans CJK KR"/>
+                <a:latin typeface="Malgun Gothic"/>
+                <a:ea typeface="Malgun Gothic"/>
               </a:rPr>
               <a:t>WEEK 1</a:t>
             </a:r>
@@ -19477,8 +19477,8 @@
                 <a:solidFill>
                   <a:srgbClr val="F4F1EA"/>
                 </a:solidFill>
-                <a:latin typeface="Noto Sans CJK KR"/>
-                <a:ea typeface="Noto Sans CJK KR"/>
+                <a:latin typeface="Malgun Gothic"/>
+                <a:ea typeface="Malgun Gothic"/>
               </a:rPr>
               <a:t>S5부터 초고 14매</a:t>
             </a:r>
@@ -19517,8 +19517,8 @@
                 <a:solidFill>
                   <a:srgbClr val="AFB8C6"/>
                 </a:solidFill>
-                <a:latin typeface="Noto Sans CJK KR"/>
-                <a:ea typeface="Noto Sans CJK KR"/>
+                <a:latin typeface="Malgun Gothic"/>
+                <a:ea typeface="Malgun Gothic"/>
               </a:rPr>
               <a:t>소설의 엔진. 이 장면이 서면 나머지가 따라온다.</a:t>
             </a:r>
@@ -19649,8 +19649,8 @@
                 <a:solidFill>
                   <a:srgbClr val="CE942C"/>
                 </a:solidFill>
-                <a:latin typeface="Noto Sans CJK KR"/>
-                <a:ea typeface="Noto Sans CJK KR"/>
+                <a:latin typeface="Malgun Gothic"/>
+                <a:ea typeface="Malgun Gothic"/>
               </a:rPr>
               <a:t>WEEK 2</a:t>
             </a:r>
@@ -19689,8 +19689,8 @@
                 <a:solidFill>
                   <a:srgbClr val="F4F1EA"/>
                 </a:solidFill>
-                <a:latin typeface="Noto Sans CJK KR"/>
-                <a:ea typeface="Noto Sans CJK KR"/>
+                <a:latin typeface="Malgun Gothic"/>
+                <a:ea typeface="Malgun Gothic"/>
               </a:rPr>
               <a:t>8장면 카드 확정</a:t>
             </a:r>
@@ -19729,8 +19729,8 @@
                 <a:solidFill>
                   <a:srgbClr val="AFB8C6"/>
                 </a:solidFill>
-                <a:latin typeface="Noto Sans CJK KR"/>
-                <a:ea typeface="Noto Sans CJK KR"/>
+                <a:latin typeface="Malgun Gothic"/>
+                <a:ea typeface="Malgun Gothic"/>
               </a:rPr>
               <a:t>S5에서 알게 된 것으로 앞뒤 장면을 다시 맞춘다.</a:t>
             </a:r>
@@ -19861,8 +19861,8 @@
                 <a:solidFill>
                   <a:srgbClr val="2A6866"/>
                 </a:solidFill>
-                <a:latin typeface="Noto Sans CJK KR"/>
-                <a:ea typeface="Noto Sans CJK KR"/>
+                <a:latin typeface="Malgun Gothic"/>
+                <a:ea typeface="Malgun Gothic"/>
               </a:rPr>
               <a:t>WEEK 3</a:t>
             </a:r>
@@ -19901,8 +19901,8 @@
                 <a:solidFill>
                   <a:srgbClr val="F4F1EA"/>
                 </a:solidFill>
-                <a:latin typeface="Noto Sans CJK KR"/>
-                <a:ea typeface="Noto Sans CJK KR"/>
+                <a:latin typeface="Malgun Gothic"/>
+                <a:ea typeface="Malgun Gothic"/>
               </a:rPr>
               <a:t>초고 완주 90매</a:t>
             </a:r>
@@ -19941,8 +19941,8 @@
                 <a:solidFill>
                   <a:srgbClr val="AFB8C6"/>
                 </a:solidFill>
-                <a:latin typeface="Noto Sans CJK KR"/>
-                <a:ea typeface="Noto Sans CJK KR"/>
+                <a:latin typeface="Malgun Gothic"/>
+                <a:ea typeface="Malgun Gothic"/>
               </a:rPr>
               <a:t>하루 15매 × 6일. 설명이 길어지면 진우의 손으로 돌아간다.</a:t>
             </a:r>
@@ -20073,8 +20073,8 @@
                 <a:solidFill>
                   <a:srgbClr val="3A528A"/>
                 </a:solidFill>
-                <a:latin typeface="Noto Sans CJK KR"/>
-                <a:ea typeface="Noto Sans CJK KR"/>
+                <a:latin typeface="Malgun Gothic"/>
+                <a:ea typeface="Malgun Gothic"/>
               </a:rPr>
               <a:t>WEEK 4</a:t>
             </a:r>
@@ -20113,8 +20113,8 @@
                 <a:solidFill>
                   <a:srgbClr val="F4F1EA"/>
                 </a:solidFill>
-                <a:latin typeface="Noto Sans CJK KR"/>
-                <a:ea typeface="Noto Sans CJK KR"/>
+                <a:latin typeface="Malgun Gothic"/>
+                <a:ea typeface="Malgun Gothic"/>
               </a:rPr>
               <a:t>개념어 솎아내기</a:t>
             </a:r>
@@ -20153,8 +20153,8 @@
                 <a:solidFill>
                   <a:srgbClr val="AFB8C6"/>
                 </a:solidFill>
-                <a:latin typeface="Noto Sans CJK KR"/>
-                <a:ea typeface="Noto Sans CJK KR"/>
+                <a:latin typeface="Malgun Gothic"/>
+                <a:ea typeface="Malgun Gothic"/>
               </a:rPr>
               <a:t>‘캐시 · 사고 · 자아’를 검색해 절반을 사물과 숫자로.</a:t>
             </a:r>

--- a/cache_city/캐시의_도시_발전기획서.pptx
+++ b/cache_city/캐시의_도시_발전기획서.pptx
@@ -3507,6 +3507,9 @@
               <a:lnSpc>
                 <a:spcPct val="135000"/>
               </a:lnSpc>
+              <a:spcAft>
+                <a:spcPts val="113"/>
+              </a:spcAft>
             </a:pPr>
             <a:r>
               <a:rPr sz="950" b="0" i="0">
@@ -3518,7 +3521,13 @@
               </a:rPr>
               <a:t>원천  『리뷰s』 영화 ‘빌’ 리뷰 · 도서 ‘죽음의 미로’ 리뷰</a:t>
             </a:r>
-            <a:br/>
+          </a:p>
+          <a:p>
+            <a:pPr algn="l">
+              <a:lnSpc>
+                <a:spcPct val="135000"/>
+              </a:lnSpc>
+            </a:pPr>
             <a:r>
               <a:rPr sz="950" b="0" i="0">
                 <a:solidFill>
@@ -9670,6 +9679,9 @@
               <a:lnSpc>
                 <a:spcPct val="118000"/>
               </a:lnSpc>
+              <a:spcAft>
+                <a:spcPts val="103"/>
+              </a:spcAft>
             </a:pPr>
             <a:r>
               <a:rPr sz="860" b="0" i="0">
@@ -9681,7 +9693,13 @@
               </a:rPr>
               <a:t>“초코 케익이 먹고 싶다”</a:t>
             </a:r>
-            <a:br/>
+          </a:p>
+          <a:p>
+            <a:pPr algn="ctr">
+              <a:lnSpc>
+                <a:spcPct val="118000"/>
+              </a:lnSpc>
+            </a:pPr>
             <a:r>
               <a:rPr sz="860" b="0" i="0">
                 <a:solidFill>
@@ -9845,6 +9863,9 @@
               <a:lnSpc>
                 <a:spcPct val="118000"/>
               </a:lnSpc>
+              <a:spcAft>
+                <a:spcPts val="103"/>
+              </a:spcAft>
             </a:pPr>
             <a:r>
               <a:rPr sz="860" b="0" i="0">
@@ -9856,7 +9877,13 @@
               </a:rPr>
               <a:t>광고 #A-0417의</a:t>
             </a:r>
-            <a:br/>
+          </a:p>
+          <a:p>
+            <a:pPr algn="ctr">
+              <a:lnSpc>
+                <a:spcPct val="118000"/>
+              </a:lnSpc>
+            </a:pPr>
             <a:r>
               <a:rPr sz="860" b="0" i="0">
                 <a:solidFill>
@@ -10020,6 +10047,9 @@
               <a:lnSpc>
                 <a:spcPct val="118000"/>
               </a:lnSpc>
+              <a:spcAft>
+                <a:spcPts val="103"/>
+              </a:spcAft>
             </a:pPr>
             <a:r>
               <a:rPr sz="860" b="0" i="0">
@@ -10031,7 +10061,13 @@
               </a:rPr>
               <a:t>상태는 그대로</a:t>
             </a:r>
-            <a:br/>
+          </a:p>
+          <a:p>
+            <a:pPr algn="ctr">
+              <a:lnSpc>
+                <a:spcPct val="118000"/>
+              </a:lnSpc>
+            </a:pPr>
             <a:r>
               <a:rPr sz="860" b="0" i="0">
                 <a:solidFill>

--- a/cache_city/캐시의_도시_발전기획서.pptx
+++ b/cache_city/캐시의_도시_발전기획서.pptx
@@ -3211,7 +3211,7 @@
         </p:spPr>
         <p:txBody>
           <a:bodyPr wrap="square" anchor="ctr" lIns="18288" rIns="18288" tIns="12801" bIns="12801">
-            <a:normAutofit/>
+            <a:noAutofit/>
           </a:bodyPr>
           <a:lstStyle/>
           <a:p>
@@ -3251,17 +3251,17 @@
         </p:spPr>
         <p:txBody>
           <a:bodyPr wrap="square" anchor="t" lIns="18288" rIns="18288" tIns="12801" bIns="12801">
-            <a:normAutofit/>
+            <a:noAutofit/>
           </a:bodyPr>
           <a:lstStyle/>
           <a:p>
             <a:pPr algn="l">
               <a:lnSpc>
-                <a:spcPct val="125000"/>
-              </a:lnSpc>
-            </a:pPr>
-            <a:r>
-              <a:rPr sz="4150" b="1" i="0">
+                <a:spcPct val="100000"/>
+              </a:lnSpc>
+            </a:pPr>
+            <a:r>
+              <a:rPr sz="5000" b="1" i="0">
                 <a:solidFill>
                   <a:srgbClr val="F4F1EA"/>
                 </a:solidFill>
@@ -3291,17 +3291,17 @@
         </p:spPr>
         <p:txBody>
           <a:bodyPr wrap="square" anchor="t" lIns="18288" rIns="18288" tIns="12801" bIns="12801">
-            <a:normAutofit/>
+            <a:noAutofit/>
           </a:bodyPr>
           <a:lstStyle/>
           <a:p>
             <a:pPr algn="l">
               <a:lnSpc>
-                <a:spcPct val="125000"/>
-              </a:lnSpc>
-            </a:pPr>
-            <a:r>
-              <a:rPr sz="1600" b="0" i="0">
+                <a:spcPct val="100000"/>
+              </a:lnSpc>
+            </a:pPr>
+            <a:r>
+              <a:rPr sz="2000" b="0" i="0">
                 <a:solidFill>
                   <a:srgbClr val="CE942C"/>
                 </a:solidFill>
@@ -3331,17 +3331,17 @@
         </p:spPr>
         <p:txBody>
           <a:bodyPr wrap="square" anchor="t" lIns="18288" rIns="18288" tIns="12801" bIns="12801">
-            <a:normAutofit/>
+            <a:noAutofit/>
           </a:bodyPr>
           <a:lstStyle/>
           <a:p>
             <a:pPr algn="l">
               <a:lnSpc>
-                <a:spcPct val="125000"/>
-              </a:lnSpc>
-            </a:pPr>
-            <a:r>
-              <a:rPr sz="950" b="0" i="0">
+                <a:spcPct val="100000"/>
+              </a:lnSpc>
+            </a:pPr>
+            <a:r>
+              <a:rPr sz="1200" b="0" i="0">
                 <a:solidFill>
                   <a:srgbClr val="AFB8C6"/>
                 </a:solidFill>
@@ -3419,7 +3419,7 @@
         </p:spPr>
         <p:txBody>
           <a:bodyPr wrap="square" anchor="t" lIns="9144" rIns="9144" tIns="6400" bIns="6400">
-            <a:normAutofit/>
+            <a:noAutofit/>
           </a:bodyPr>
           <a:lstStyle/>
           <a:p>
@@ -3459,7 +3459,7 @@
         </p:spPr>
         <p:txBody>
           <a:bodyPr wrap="square" anchor="t" lIns="9144" rIns="9144" tIns="6400" bIns="6400">
-            <a:normAutofit/>
+            <a:noAutofit/>
           </a:bodyPr>
           <a:lstStyle/>
           <a:p>
@@ -3499,7 +3499,7 @@
         </p:spPr>
         <p:txBody>
           <a:bodyPr wrap="square" anchor="t" lIns="9144" rIns="9144" tIns="6400" bIns="6400">
-            <a:normAutofit/>
+            <a:noAutofit/>
           </a:bodyPr>
           <a:lstStyle/>
           <a:p>
@@ -3559,7 +3559,7 @@
         </p:spPr>
         <p:txBody>
           <a:bodyPr wrap="square" anchor="t" lIns="9144" rIns="9144" tIns="6400" bIns="6400">
-            <a:normAutofit/>
+            <a:noAutofit/>
           </a:bodyPr>
           <a:lstStyle/>
           <a:p>
@@ -3691,7 +3691,7 @@
         </p:spPr>
         <p:txBody>
           <a:bodyPr wrap="square" anchor="t" lIns="9144" rIns="9144" tIns="6400" bIns="6400">
-            <a:normAutofit/>
+            <a:noAutofit/>
           </a:bodyPr>
           <a:lstStyle/>
           <a:p>
@@ -3731,7 +3731,7 @@
         </p:spPr>
         <p:txBody>
           <a:bodyPr wrap="square" anchor="t" lIns="9144" rIns="9144" tIns="6400" bIns="6400">
-            <a:normAutofit/>
+            <a:noAutofit/>
           </a:bodyPr>
           <a:lstStyle/>
           <a:p>
@@ -3771,7 +3771,7 @@
         </p:spPr>
         <p:txBody>
           <a:bodyPr wrap="square" anchor="t" lIns="9144" rIns="9144" tIns="6400" bIns="6400">
-            <a:normAutofit/>
+            <a:noAutofit/>
           </a:bodyPr>
           <a:lstStyle/>
           <a:p>
@@ -3903,7 +3903,7 @@
         </p:spPr>
         <p:txBody>
           <a:bodyPr wrap="square" anchor="t" lIns="9144" rIns="9144" tIns="6400" bIns="6400">
-            <a:normAutofit/>
+            <a:noAutofit/>
           </a:bodyPr>
           <a:lstStyle/>
           <a:p>
@@ -3943,7 +3943,7 @@
         </p:spPr>
         <p:txBody>
           <a:bodyPr wrap="square" anchor="t" lIns="9144" rIns="9144" tIns="6400" bIns="6400">
-            <a:normAutofit/>
+            <a:noAutofit/>
           </a:bodyPr>
           <a:lstStyle/>
           <a:p>
@@ -3983,7 +3983,7 @@
         </p:spPr>
         <p:txBody>
           <a:bodyPr wrap="square" anchor="t" lIns="9144" rIns="9144" tIns="6400" bIns="6400">
-            <a:normAutofit/>
+            <a:noAutofit/>
           </a:bodyPr>
           <a:lstStyle/>
           <a:p>
@@ -4115,7 +4115,7 @@
         </p:spPr>
         <p:txBody>
           <a:bodyPr wrap="square" anchor="t" lIns="9144" rIns="9144" tIns="6400" bIns="6400">
-            <a:normAutofit/>
+            <a:noAutofit/>
           </a:bodyPr>
           <a:lstStyle/>
           <a:p>
@@ -4155,7 +4155,7 @@
         </p:spPr>
         <p:txBody>
           <a:bodyPr wrap="square" anchor="t" lIns="9144" rIns="9144" tIns="6400" bIns="6400">
-            <a:normAutofit/>
+            <a:noAutofit/>
           </a:bodyPr>
           <a:lstStyle/>
           <a:p>
@@ -4195,7 +4195,7 @@
         </p:spPr>
         <p:txBody>
           <a:bodyPr wrap="square" anchor="t" lIns="9144" rIns="9144" tIns="6400" bIns="6400">
-            <a:normAutofit/>
+            <a:noAutofit/>
           </a:bodyPr>
           <a:lstStyle/>
           <a:p>
@@ -4235,7 +4235,7 @@
         </p:spPr>
         <p:txBody>
           <a:bodyPr wrap="square" anchor="t" lIns="9144" rIns="9144" tIns="6400" bIns="6400">
-            <a:normAutofit/>
+            <a:noAutofit/>
           </a:bodyPr>
           <a:lstStyle/>
           <a:p>
@@ -4301,7 +4301,7 @@
         </p:spPr>
         <p:txBody>
           <a:bodyPr wrap="square" anchor="t" lIns="18288" rIns="18288" tIns="12801" bIns="12801">
-            <a:normAutofit/>
+            <a:noAutofit/>
           </a:bodyPr>
           <a:lstStyle/>
           <a:p>
@@ -4341,7 +4341,7 @@
         </p:spPr>
         <p:txBody>
           <a:bodyPr wrap="square" anchor="t" lIns="18288" rIns="18288" tIns="12801" bIns="12801">
-            <a:normAutofit/>
+            <a:noAutofit/>
           </a:bodyPr>
           <a:lstStyle/>
           <a:p>
@@ -4381,7 +4381,7 @@
         </p:spPr>
         <p:txBody>
           <a:bodyPr wrap="square" anchor="t" lIns="18288" rIns="18288" tIns="12801" bIns="12801">
-            <a:normAutofit/>
+            <a:noAutofit/>
           </a:bodyPr>
           <a:lstStyle/>
           <a:p>
@@ -4553,7 +4553,7 @@
         </p:spPr>
         <p:txBody>
           <a:bodyPr wrap="square" anchor="t" lIns="9144" rIns="9144" tIns="6400" bIns="6400">
-            <a:normAutofit/>
+            <a:noAutofit/>
           </a:bodyPr>
           <a:lstStyle/>
           <a:p>
@@ -4593,7 +4593,7 @@
         </p:spPr>
         <p:txBody>
           <a:bodyPr wrap="square" anchor="t" lIns="9144" rIns="9144" tIns="6400" bIns="6400">
-            <a:normAutofit/>
+            <a:noAutofit/>
           </a:bodyPr>
           <a:lstStyle/>
           <a:p>
@@ -4679,7 +4679,7 @@
         </p:spPr>
         <p:txBody>
           <a:bodyPr wrap="square" anchor="ctr" lIns="9144" rIns="9144" tIns="6400" bIns="6400">
-            <a:normAutofit/>
+            <a:noAutofit/>
           </a:bodyPr>
           <a:lstStyle/>
           <a:p>
@@ -4719,7 +4719,7 @@
         </p:spPr>
         <p:txBody>
           <a:bodyPr wrap="square" anchor="ctr" lIns="9144" rIns="9144" tIns="6400" bIns="6400">
-            <a:normAutofit/>
+            <a:noAutofit/>
           </a:bodyPr>
           <a:lstStyle/>
           <a:p>
@@ -4759,7 +4759,7 @@
         </p:spPr>
         <p:txBody>
           <a:bodyPr wrap="square" anchor="ctr" lIns="9144" rIns="9144" tIns="6400" bIns="6400">
-            <a:normAutofit/>
+            <a:noAutofit/>
           </a:bodyPr>
           <a:lstStyle/>
           <a:p>
@@ -4893,7 +4893,7 @@
         </p:spPr>
         <p:txBody>
           <a:bodyPr wrap="square" anchor="ctr" lIns="9144" rIns="9144" tIns="6400" bIns="6400">
-            <a:normAutofit/>
+            <a:noAutofit/>
           </a:bodyPr>
           <a:lstStyle/>
           <a:p>
@@ -4933,7 +4933,7 @@
         </p:spPr>
         <p:txBody>
           <a:bodyPr wrap="square" anchor="ctr" lIns="9144" rIns="9144" tIns="6400" bIns="6400">
-            <a:normAutofit/>
+            <a:noAutofit/>
           </a:bodyPr>
           <a:lstStyle/>
           <a:p>
@@ -4973,7 +4973,7 @@
         </p:spPr>
         <p:txBody>
           <a:bodyPr wrap="square" anchor="ctr" lIns="9144" rIns="9144" tIns="6400" bIns="6400">
-            <a:normAutofit/>
+            <a:noAutofit/>
           </a:bodyPr>
           <a:lstStyle/>
           <a:p>
@@ -5107,7 +5107,7 @@
         </p:spPr>
         <p:txBody>
           <a:bodyPr wrap="square" anchor="ctr" lIns="9144" rIns="9144" tIns="6400" bIns="6400">
-            <a:normAutofit/>
+            <a:noAutofit/>
           </a:bodyPr>
           <a:lstStyle/>
           <a:p>
@@ -5147,7 +5147,7 @@
         </p:spPr>
         <p:txBody>
           <a:bodyPr wrap="square" anchor="ctr" lIns="9144" rIns="9144" tIns="6400" bIns="6400">
-            <a:normAutofit/>
+            <a:noAutofit/>
           </a:bodyPr>
           <a:lstStyle/>
           <a:p>
@@ -5187,7 +5187,7 @@
         </p:spPr>
         <p:txBody>
           <a:bodyPr wrap="square" anchor="ctr" lIns="9144" rIns="9144" tIns="6400" bIns="6400">
-            <a:normAutofit/>
+            <a:noAutofit/>
           </a:bodyPr>
           <a:lstStyle/>
           <a:p>
@@ -5321,7 +5321,7 @@
         </p:spPr>
         <p:txBody>
           <a:bodyPr wrap="square" anchor="ctr" lIns="9144" rIns="9144" tIns="6400" bIns="6400">
-            <a:normAutofit/>
+            <a:noAutofit/>
           </a:bodyPr>
           <a:lstStyle/>
           <a:p>
@@ -5361,7 +5361,7 @@
         </p:spPr>
         <p:txBody>
           <a:bodyPr wrap="square" anchor="ctr" lIns="9144" rIns="9144" tIns="6400" bIns="6400">
-            <a:normAutofit/>
+            <a:noAutofit/>
           </a:bodyPr>
           <a:lstStyle/>
           <a:p>
@@ -5401,7 +5401,7 @@
         </p:spPr>
         <p:txBody>
           <a:bodyPr wrap="square" anchor="ctr" lIns="9144" rIns="9144" tIns="6400" bIns="6400">
-            <a:normAutofit/>
+            <a:noAutofit/>
           </a:bodyPr>
           <a:lstStyle/>
           <a:p>
@@ -5535,7 +5535,7 @@
         </p:spPr>
         <p:txBody>
           <a:bodyPr wrap="square" anchor="ctr" lIns="9144" rIns="9144" tIns="6400" bIns="6400">
-            <a:normAutofit/>
+            <a:noAutofit/>
           </a:bodyPr>
           <a:lstStyle/>
           <a:p>
@@ -5575,7 +5575,7 @@
         </p:spPr>
         <p:txBody>
           <a:bodyPr wrap="square" anchor="ctr" lIns="9144" rIns="9144" tIns="6400" bIns="6400">
-            <a:normAutofit/>
+            <a:noAutofit/>
           </a:bodyPr>
           <a:lstStyle/>
           <a:p>
@@ -5615,7 +5615,7 @@
         </p:spPr>
         <p:txBody>
           <a:bodyPr wrap="square" anchor="ctr" lIns="9144" rIns="9144" tIns="6400" bIns="6400">
-            <a:normAutofit/>
+            <a:noAutofit/>
           </a:bodyPr>
           <a:lstStyle/>
           <a:p>
@@ -5749,7 +5749,7 @@
         </p:spPr>
         <p:txBody>
           <a:bodyPr wrap="square" anchor="ctr" lIns="9144" rIns="9144" tIns="6400" bIns="6400">
-            <a:normAutofit/>
+            <a:noAutofit/>
           </a:bodyPr>
           <a:lstStyle/>
           <a:p>
@@ -5789,7 +5789,7 @@
         </p:spPr>
         <p:txBody>
           <a:bodyPr wrap="square" anchor="ctr" lIns="9144" rIns="9144" tIns="6400" bIns="6400">
-            <a:normAutofit/>
+            <a:noAutofit/>
           </a:bodyPr>
           <a:lstStyle/>
           <a:p>
@@ -5829,7 +5829,7 @@
         </p:spPr>
         <p:txBody>
           <a:bodyPr wrap="square" anchor="ctr" lIns="9144" rIns="9144" tIns="6400" bIns="6400">
-            <a:normAutofit/>
+            <a:noAutofit/>
           </a:bodyPr>
           <a:lstStyle/>
           <a:p>
@@ -5963,7 +5963,7 @@
         </p:spPr>
         <p:txBody>
           <a:bodyPr wrap="square" anchor="ctr" lIns="9144" rIns="9144" tIns="6400" bIns="6400">
-            <a:normAutofit/>
+            <a:noAutofit/>
           </a:bodyPr>
           <a:lstStyle/>
           <a:p>
@@ -6003,7 +6003,7 @@
         </p:spPr>
         <p:txBody>
           <a:bodyPr wrap="square" anchor="ctr" lIns="9144" rIns="9144" tIns="6400" bIns="6400">
-            <a:normAutofit/>
+            <a:noAutofit/>
           </a:bodyPr>
           <a:lstStyle/>
           <a:p>
@@ -6043,7 +6043,7 @@
         </p:spPr>
         <p:txBody>
           <a:bodyPr wrap="square" anchor="ctr" lIns="9144" rIns="9144" tIns="6400" bIns="6400">
-            <a:normAutofit/>
+            <a:noAutofit/>
           </a:bodyPr>
           <a:lstStyle/>
           <a:p>
@@ -6177,7 +6177,7 @@
         </p:spPr>
         <p:txBody>
           <a:bodyPr wrap="square" anchor="ctr" lIns="9144" rIns="9144" tIns="6400" bIns="6400">
-            <a:normAutofit/>
+            <a:noAutofit/>
           </a:bodyPr>
           <a:lstStyle/>
           <a:p>
@@ -6217,7 +6217,7 @@
         </p:spPr>
         <p:txBody>
           <a:bodyPr wrap="square" anchor="ctr" lIns="9144" rIns="9144" tIns="6400" bIns="6400">
-            <a:normAutofit/>
+            <a:noAutofit/>
           </a:bodyPr>
           <a:lstStyle/>
           <a:p>
@@ -6257,7 +6257,7 @@
         </p:spPr>
         <p:txBody>
           <a:bodyPr wrap="square" anchor="ctr" lIns="9144" rIns="9144" tIns="6400" bIns="6400">
-            <a:normAutofit/>
+            <a:noAutofit/>
           </a:bodyPr>
           <a:lstStyle/>
           <a:p>
@@ -6323,7 +6323,7 @@
         </p:spPr>
         <p:txBody>
           <a:bodyPr wrap="square" anchor="t" lIns="18288" rIns="18288" tIns="12801" bIns="12801">
-            <a:normAutofit/>
+            <a:noAutofit/>
           </a:bodyPr>
           <a:lstStyle/>
           <a:p>
@@ -6363,7 +6363,7 @@
         </p:spPr>
         <p:txBody>
           <a:bodyPr wrap="square" anchor="t" lIns="18288" rIns="18288" tIns="12801" bIns="12801">
-            <a:normAutofit/>
+            <a:noAutofit/>
           </a:bodyPr>
           <a:lstStyle/>
           <a:p>
@@ -6403,7 +6403,7 @@
         </p:spPr>
         <p:txBody>
           <a:bodyPr wrap="square" anchor="t" lIns="18288" rIns="18288" tIns="12801" bIns="12801">
-            <a:normAutofit/>
+            <a:noAutofit/>
           </a:bodyPr>
           <a:lstStyle/>
           <a:p>
@@ -6575,7 +6575,7 @@
         </p:spPr>
         <p:txBody>
           <a:bodyPr wrap="square" anchor="t" lIns="9144" rIns="9144" tIns="6400" bIns="6400">
-            <a:normAutofit/>
+            <a:noAutofit/>
           </a:bodyPr>
           <a:lstStyle/>
           <a:p>
@@ -6615,7 +6615,7 @@
         </p:spPr>
         <p:txBody>
           <a:bodyPr wrap="square" anchor="t" lIns="9144" rIns="9144" tIns="6400" bIns="6400">
-            <a:normAutofit/>
+            <a:noAutofit/>
           </a:bodyPr>
           <a:lstStyle/>
           <a:p>
@@ -6747,7 +6747,7 @@
         </p:spPr>
         <p:txBody>
           <a:bodyPr wrap="square" anchor="t" lIns="9144" rIns="9144" tIns="6400" bIns="6400">
-            <a:normAutofit/>
+            <a:noAutofit/>
           </a:bodyPr>
           <a:lstStyle/>
           <a:p>
@@ -6787,7 +6787,7 @@
         </p:spPr>
         <p:txBody>
           <a:bodyPr wrap="square" anchor="t" lIns="9144" rIns="9144" tIns="6400" bIns="6400">
-            <a:normAutofit/>
+            <a:noAutofit/>
           </a:bodyPr>
           <a:lstStyle/>
           <a:p>
@@ -6909,7 +6909,7 @@
         </p:spPr>
         <p:txBody>
           <a:bodyPr wrap="square" anchor="t" lIns="9144" rIns="9144" tIns="6400" bIns="6400">
-            <a:normAutofit/>
+            <a:noAutofit/>
           </a:bodyPr>
           <a:lstStyle/>
           <a:p>
@@ -6949,7 +6949,7 @@
         </p:spPr>
         <p:txBody>
           <a:bodyPr wrap="square" anchor="t" lIns="9144" rIns="9144" tIns="6400" bIns="6400">
-            <a:normAutofit/>
+            <a:noAutofit/>
           </a:bodyPr>
           <a:lstStyle/>
           <a:p>
@@ -7081,7 +7081,7 @@
         </p:spPr>
         <p:txBody>
           <a:bodyPr wrap="square" anchor="t" lIns="9144" rIns="9144" tIns="6400" bIns="6400">
-            <a:normAutofit/>
+            <a:noAutofit/>
           </a:bodyPr>
           <a:lstStyle/>
           <a:p>
@@ -7121,7 +7121,7 @@
         </p:spPr>
         <p:txBody>
           <a:bodyPr wrap="square" anchor="t" lIns="9144" rIns="9144" tIns="6400" bIns="6400">
-            <a:normAutofit/>
+            <a:noAutofit/>
           </a:bodyPr>
           <a:lstStyle/>
           <a:p>
@@ -7243,7 +7243,7 @@
         </p:spPr>
         <p:txBody>
           <a:bodyPr wrap="square" anchor="t" lIns="9144" rIns="9144" tIns="6400" bIns="6400">
-            <a:normAutofit/>
+            <a:noAutofit/>
           </a:bodyPr>
           <a:lstStyle/>
           <a:p>
@@ -7283,7 +7283,7 @@
         </p:spPr>
         <p:txBody>
           <a:bodyPr wrap="square" anchor="t" lIns="9144" rIns="9144" tIns="6400" bIns="6400">
-            <a:normAutofit/>
+            <a:noAutofit/>
           </a:bodyPr>
           <a:lstStyle/>
           <a:p>
@@ -7415,7 +7415,7 @@
         </p:spPr>
         <p:txBody>
           <a:bodyPr wrap="square" anchor="t" lIns="9144" rIns="9144" tIns="6400" bIns="6400">
-            <a:normAutofit/>
+            <a:noAutofit/>
           </a:bodyPr>
           <a:lstStyle/>
           <a:p>
@@ -7455,7 +7455,7 @@
         </p:spPr>
         <p:txBody>
           <a:bodyPr wrap="square" anchor="t" lIns="9144" rIns="9144" tIns="6400" bIns="6400">
-            <a:normAutofit/>
+            <a:noAutofit/>
           </a:bodyPr>
           <a:lstStyle/>
           <a:p>
@@ -7577,7 +7577,7 @@
         </p:spPr>
         <p:txBody>
           <a:bodyPr wrap="square" anchor="t" lIns="9144" rIns="9144" tIns="6400" bIns="6400">
-            <a:normAutofit/>
+            <a:noAutofit/>
           </a:bodyPr>
           <a:lstStyle/>
           <a:p>
@@ -7617,7 +7617,7 @@
         </p:spPr>
         <p:txBody>
           <a:bodyPr wrap="square" anchor="t" lIns="9144" rIns="9144" tIns="6400" bIns="6400">
-            <a:normAutofit/>
+            <a:noAutofit/>
           </a:bodyPr>
           <a:lstStyle/>
           <a:p>
@@ -7749,7 +7749,7 @@
         </p:spPr>
         <p:txBody>
           <a:bodyPr wrap="square" anchor="t" lIns="9144" rIns="9144" tIns="6400" bIns="6400">
-            <a:normAutofit/>
+            <a:noAutofit/>
           </a:bodyPr>
           <a:lstStyle/>
           <a:p>
@@ -7789,7 +7789,7 @@
         </p:spPr>
         <p:txBody>
           <a:bodyPr wrap="square" anchor="t" lIns="9144" rIns="9144" tIns="6400" bIns="6400">
-            <a:normAutofit/>
+            <a:noAutofit/>
           </a:bodyPr>
           <a:lstStyle/>
           <a:p>
@@ -7911,7 +7911,7 @@
         </p:spPr>
         <p:txBody>
           <a:bodyPr wrap="square" anchor="t" lIns="9144" rIns="9144" tIns="6400" bIns="6400">
-            <a:normAutofit/>
+            <a:noAutofit/>
           </a:bodyPr>
           <a:lstStyle/>
           <a:p>
@@ -7951,7 +7951,7 @@
         </p:spPr>
         <p:txBody>
           <a:bodyPr wrap="square" anchor="t" lIns="9144" rIns="9144" tIns="6400" bIns="6400">
-            <a:normAutofit/>
+            <a:noAutofit/>
           </a:bodyPr>
           <a:lstStyle/>
           <a:p>
@@ -8083,7 +8083,7 @@
         </p:spPr>
         <p:txBody>
           <a:bodyPr wrap="square" anchor="t" lIns="9144" rIns="9144" tIns="6400" bIns="6400">
-            <a:normAutofit/>
+            <a:noAutofit/>
           </a:bodyPr>
           <a:lstStyle/>
           <a:p>
@@ -8123,7 +8123,7 @@
         </p:spPr>
         <p:txBody>
           <a:bodyPr wrap="square" anchor="t" lIns="9144" rIns="9144" tIns="6400" bIns="6400">
-            <a:normAutofit/>
+            <a:noAutofit/>
           </a:bodyPr>
           <a:lstStyle/>
           <a:p>
@@ -8245,7 +8245,7 @@
         </p:spPr>
         <p:txBody>
           <a:bodyPr wrap="square" anchor="t" lIns="9144" rIns="9144" tIns="6400" bIns="6400">
-            <a:normAutofit/>
+            <a:noAutofit/>
           </a:bodyPr>
           <a:lstStyle/>
           <a:p>
@@ -8285,7 +8285,7 @@
         </p:spPr>
         <p:txBody>
           <a:bodyPr wrap="square" anchor="t" lIns="9144" rIns="9144" tIns="6400" bIns="6400">
-            <a:normAutofit/>
+            <a:noAutofit/>
           </a:bodyPr>
           <a:lstStyle/>
           <a:p>
@@ -8351,7 +8351,7 @@
         </p:spPr>
         <p:txBody>
           <a:bodyPr wrap="square" anchor="t" lIns="18288" rIns="18288" tIns="12801" bIns="12801">
-            <a:normAutofit/>
+            <a:noAutofit/>
           </a:bodyPr>
           <a:lstStyle/>
           <a:p>
@@ -8391,7 +8391,7 @@
         </p:spPr>
         <p:txBody>
           <a:bodyPr wrap="square" anchor="t" lIns="18288" rIns="18288" tIns="12801" bIns="12801">
-            <a:normAutofit/>
+            <a:noAutofit/>
           </a:bodyPr>
           <a:lstStyle/>
           <a:p>
@@ -8431,7 +8431,7 @@
         </p:spPr>
         <p:txBody>
           <a:bodyPr wrap="square" anchor="t" lIns="18288" rIns="18288" tIns="12801" bIns="12801">
-            <a:normAutofit/>
+            <a:noAutofit/>
           </a:bodyPr>
           <a:lstStyle/>
           <a:p>
@@ -8603,7 +8603,7 @@
         </p:spPr>
         <p:txBody>
           <a:bodyPr wrap="square" anchor="t" lIns="9144" rIns="9144" tIns="6400" bIns="6400">
-            <a:normAutofit/>
+            <a:noAutofit/>
           </a:bodyPr>
           <a:lstStyle/>
           <a:p>
@@ -8643,7 +8643,7 @@
         </p:spPr>
         <p:txBody>
           <a:bodyPr wrap="square" anchor="t" lIns="9144" rIns="9144" tIns="6400" bIns="6400">
-            <a:normAutofit/>
+            <a:noAutofit/>
           </a:bodyPr>
           <a:lstStyle/>
           <a:p>
@@ -8683,7 +8683,7 @@
         </p:spPr>
         <p:txBody>
           <a:bodyPr wrap="square" anchor="t" lIns="9144" rIns="9144" tIns="6400" bIns="6400">
-            <a:normAutofit/>
+            <a:noAutofit/>
           </a:bodyPr>
           <a:lstStyle/>
           <a:p>
@@ -8769,7 +8769,7 @@
         </p:spPr>
         <p:txBody>
           <a:bodyPr wrap="square" anchor="t" lIns="9144" rIns="9144" tIns="6400" bIns="6400">
-            <a:normAutofit/>
+            <a:noAutofit/>
           </a:bodyPr>
           <a:lstStyle/>
           <a:p>
@@ -8809,7 +8809,7 @@
         </p:spPr>
         <p:txBody>
           <a:bodyPr wrap="square" anchor="t" lIns="9144" rIns="9144" tIns="6400" bIns="6400">
-            <a:normAutofit/>
+            <a:noAutofit/>
           </a:bodyPr>
           <a:lstStyle/>
           <a:p>
@@ -8895,7 +8895,7 @@
         </p:spPr>
         <p:txBody>
           <a:bodyPr wrap="square" anchor="t" lIns="9144" rIns="9144" tIns="6400" bIns="6400">
-            <a:normAutofit/>
+            <a:noAutofit/>
           </a:bodyPr>
           <a:lstStyle/>
           <a:p>
@@ -8935,7 +8935,7 @@
         </p:spPr>
         <p:txBody>
           <a:bodyPr wrap="square" anchor="t" lIns="9144" rIns="9144" tIns="6400" bIns="6400">
-            <a:normAutofit/>
+            <a:noAutofit/>
           </a:bodyPr>
           <a:lstStyle/>
           <a:p>
@@ -9021,7 +9021,7 @@
         </p:spPr>
         <p:txBody>
           <a:bodyPr wrap="square" anchor="t" lIns="9144" rIns="9144" tIns="6400" bIns="6400">
-            <a:normAutofit/>
+            <a:noAutofit/>
           </a:bodyPr>
           <a:lstStyle/>
           <a:p>
@@ -9061,7 +9061,7 @@
         </p:spPr>
         <p:txBody>
           <a:bodyPr wrap="square" anchor="t" lIns="9144" rIns="9144" tIns="6400" bIns="6400">
-            <a:normAutofit/>
+            <a:noAutofit/>
           </a:bodyPr>
           <a:lstStyle/>
           <a:p>
@@ -9147,7 +9147,7 @@
         </p:spPr>
         <p:txBody>
           <a:bodyPr wrap="square" anchor="t" lIns="9144" rIns="9144" tIns="6400" bIns="6400">
-            <a:normAutofit/>
+            <a:noAutofit/>
           </a:bodyPr>
           <a:lstStyle/>
           <a:p>
@@ -9187,7 +9187,7 @@
         </p:spPr>
         <p:txBody>
           <a:bodyPr wrap="square" anchor="t" lIns="9144" rIns="9144" tIns="6400" bIns="6400">
-            <a:normAutofit/>
+            <a:noAutofit/>
           </a:bodyPr>
           <a:lstStyle/>
           <a:p>
@@ -9273,7 +9273,7 @@
         </p:spPr>
         <p:txBody>
           <a:bodyPr wrap="square" anchor="t" lIns="9144" rIns="9144" tIns="6400" bIns="6400">
-            <a:normAutofit/>
+            <a:noAutofit/>
           </a:bodyPr>
           <a:lstStyle/>
           <a:p>
@@ -9313,7 +9313,7 @@
         </p:spPr>
         <p:txBody>
           <a:bodyPr wrap="square" anchor="t" lIns="9144" rIns="9144" tIns="6400" bIns="6400">
-            <a:normAutofit/>
+            <a:noAutofit/>
           </a:bodyPr>
           <a:lstStyle/>
           <a:p>
@@ -9543,7 +9543,7 @@
         </p:spPr>
         <p:txBody>
           <a:bodyPr wrap="square" anchor="t" lIns="9144" rIns="9144" tIns="6400" bIns="6400">
-            <a:normAutofit/>
+            <a:noAutofit/>
           </a:bodyPr>
           <a:lstStyle/>
           <a:p>
@@ -9631,7 +9631,7 @@
         </p:spPr>
         <p:txBody>
           <a:bodyPr wrap="square" anchor="t" lIns="9144" rIns="9144" tIns="6400" bIns="6400">
-            <a:normAutofit/>
+            <a:noAutofit/>
           </a:bodyPr>
           <a:lstStyle/>
           <a:p>
@@ -9671,7 +9671,7 @@
         </p:spPr>
         <p:txBody>
           <a:bodyPr wrap="square" anchor="t" lIns="9144" rIns="9144" tIns="6400" bIns="6400">
-            <a:normAutofit/>
+            <a:noAutofit/>
           </a:bodyPr>
           <a:lstStyle/>
           <a:p>
@@ -9815,7 +9815,7 @@
         </p:spPr>
         <p:txBody>
           <a:bodyPr wrap="square" anchor="t" lIns="9144" rIns="9144" tIns="6400" bIns="6400">
-            <a:normAutofit/>
+            <a:noAutofit/>
           </a:bodyPr>
           <a:lstStyle/>
           <a:p>
@@ -9855,7 +9855,7 @@
         </p:spPr>
         <p:txBody>
           <a:bodyPr wrap="square" anchor="t" lIns="9144" rIns="9144" tIns="6400" bIns="6400">
-            <a:normAutofit/>
+            <a:noAutofit/>
           </a:bodyPr>
           <a:lstStyle/>
           <a:p>
@@ -9999,7 +9999,7 @@
         </p:spPr>
         <p:txBody>
           <a:bodyPr wrap="square" anchor="t" lIns="9144" rIns="9144" tIns="6400" bIns="6400">
-            <a:normAutofit/>
+            <a:noAutofit/>
           </a:bodyPr>
           <a:lstStyle/>
           <a:p>
@@ -10039,7 +10039,7 @@
         </p:spPr>
         <p:txBody>
           <a:bodyPr wrap="square" anchor="t" lIns="9144" rIns="9144" tIns="6400" bIns="6400">
-            <a:normAutofit/>
+            <a:noAutofit/>
           </a:bodyPr>
           <a:lstStyle/>
           <a:p>
@@ -10099,7 +10099,7 @@
         </p:spPr>
         <p:txBody>
           <a:bodyPr wrap="square" anchor="t" lIns="9144" rIns="9144" tIns="6400" bIns="6400">
-            <a:normAutofit/>
+            <a:noAutofit/>
           </a:bodyPr>
           <a:lstStyle/>
           <a:p>
@@ -10139,7 +10139,7 @@
         </p:spPr>
         <p:txBody>
           <a:bodyPr wrap="square" anchor="t" lIns="9144" rIns="9144" tIns="6400" bIns="6400">
-            <a:normAutofit/>
+            <a:noAutofit/>
           </a:bodyPr>
           <a:lstStyle/>
           <a:p>
@@ -10179,7 +10179,7 @@
         </p:spPr>
         <p:txBody>
           <a:bodyPr wrap="square" anchor="t" lIns="9144" rIns="9144" tIns="6400" bIns="6400">
-            <a:normAutofit/>
+            <a:noAutofit/>
           </a:bodyPr>
           <a:lstStyle/>
           <a:p>
@@ -10267,7 +10267,7 @@
         </p:spPr>
         <p:txBody>
           <a:bodyPr wrap="square" anchor="ctr" lIns="9144" rIns="9144" tIns="6400" bIns="6400">
-            <a:normAutofit/>
+            <a:noAutofit/>
           </a:bodyPr>
           <a:lstStyle/>
           <a:p>
@@ -10307,7 +10307,7 @@
         </p:spPr>
         <p:txBody>
           <a:bodyPr wrap="square" anchor="ctr" lIns="9144" rIns="9144" tIns="6400" bIns="6400">
-            <a:normAutofit/>
+            <a:noAutofit/>
           </a:bodyPr>
           <a:lstStyle/>
           <a:p>
@@ -10395,7 +10395,7 @@
         </p:spPr>
         <p:txBody>
           <a:bodyPr wrap="square" anchor="ctr" lIns="9144" rIns="9144" tIns="6400" bIns="6400">
-            <a:normAutofit/>
+            <a:noAutofit/>
           </a:bodyPr>
           <a:lstStyle/>
           <a:p>
@@ -10435,7 +10435,7 @@
         </p:spPr>
         <p:txBody>
           <a:bodyPr wrap="square" anchor="ctr" lIns="9144" rIns="9144" tIns="6400" bIns="6400">
-            <a:normAutofit/>
+            <a:noAutofit/>
           </a:bodyPr>
           <a:lstStyle/>
           <a:p>
@@ -10523,7 +10523,7 @@
         </p:spPr>
         <p:txBody>
           <a:bodyPr wrap="square" anchor="ctr" lIns="9144" rIns="9144" tIns="6400" bIns="6400">
-            <a:normAutofit/>
+            <a:noAutofit/>
           </a:bodyPr>
           <a:lstStyle/>
           <a:p>
@@ -10563,7 +10563,7 @@
         </p:spPr>
         <p:txBody>
           <a:bodyPr wrap="square" anchor="ctr" lIns="9144" rIns="9144" tIns="6400" bIns="6400">
-            <a:normAutofit/>
+            <a:noAutofit/>
           </a:bodyPr>
           <a:lstStyle/>
           <a:p>
@@ -10651,7 +10651,7 @@
         </p:spPr>
         <p:txBody>
           <a:bodyPr wrap="square" anchor="ctr" lIns="9144" rIns="9144" tIns="6400" bIns="6400">
-            <a:normAutofit/>
+            <a:noAutofit/>
           </a:bodyPr>
           <a:lstStyle/>
           <a:p>
@@ -10691,7 +10691,7 @@
         </p:spPr>
         <p:txBody>
           <a:bodyPr wrap="square" anchor="ctr" lIns="9144" rIns="9144" tIns="6400" bIns="6400">
-            <a:normAutofit/>
+            <a:noAutofit/>
           </a:bodyPr>
           <a:lstStyle/>
           <a:p>
@@ -10779,7 +10779,7 @@
         </p:spPr>
         <p:txBody>
           <a:bodyPr wrap="square" anchor="ctr" lIns="9144" rIns="9144" tIns="6400" bIns="6400">
-            <a:normAutofit/>
+            <a:noAutofit/>
           </a:bodyPr>
           <a:lstStyle/>
           <a:p>
@@ -10819,7 +10819,7 @@
         </p:spPr>
         <p:txBody>
           <a:bodyPr wrap="square" anchor="ctr" lIns="9144" rIns="9144" tIns="6400" bIns="6400">
-            <a:normAutofit/>
+            <a:noAutofit/>
           </a:bodyPr>
           <a:lstStyle/>
           <a:p>
@@ -10905,7 +10905,7 @@
         </p:spPr>
         <p:txBody>
           <a:bodyPr wrap="square" anchor="ctr" lIns="9144" rIns="9144" tIns="6400" bIns="6400">
-            <a:normAutofit/>
+            <a:noAutofit/>
           </a:bodyPr>
           <a:lstStyle/>
           <a:p>
@@ -10971,7 +10971,7 @@
         </p:spPr>
         <p:txBody>
           <a:bodyPr wrap="square" anchor="t" lIns="18288" rIns="18288" tIns="12801" bIns="12801">
-            <a:normAutofit/>
+            <a:noAutofit/>
           </a:bodyPr>
           <a:lstStyle/>
           <a:p>
@@ -11011,7 +11011,7 @@
         </p:spPr>
         <p:txBody>
           <a:bodyPr wrap="square" anchor="t" lIns="18288" rIns="18288" tIns="12801" bIns="12801">
-            <a:normAutofit/>
+            <a:noAutofit/>
           </a:bodyPr>
           <a:lstStyle/>
           <a:p>
@@ -11051,7 +11051,7 @@
         </p:spPr>
         <p:txBody>
           <a:bodyPr wrap="square" anchor="t" lIns="18288" rIns="18288" tIns="12801" bIns="12801">
-            <a:normAutofit/>
+            <a:noAutofit/>
           </a:bodyPr>
           <a:lstStyle/>
           <a:p>
@@ -11223,7 +11223,7 @@
         </p:spPr>
         <p:txBody>
           <a:bodyPr wrap="square" anchor="t" lIns="9144" rIns="9144" tIns="6400" bIns="6400">
-            <a:normAutofit/>
+            <a:noAutofit/>
           </a:bodyPr>
           <a:lstStyle/>
           <a:p>
@@ -11263,7 +11263,7 @@
         </p:spPr>
         <p:txBody>
           <a:bodyPr wrap="square" anchor="t" lIns="9144" rIns="9144" tIns="6400" bIns="6400">
-            <a:normAutofit/>
+            <a:noAutofit/>
           </a:bodyPr>
           <a:lstStyle/>
           <a:p>
@@ -11441,7 +11441,7 @@
         </p:spPr>
         <p:txBody>
           <a:bodyPr wrap="square" anchor="ctr" lIns="9144" rIns="9144" tIns="6400" bIns="6400">
-            <a:normAutofit/>
+            <a:noAutofit/>
           </a:bodyPr>
           <a:lstStyle/>
           <a:p>
@@ -11481,7 +11481,7 @@
         </p:spPr>
         <p:txBody>
           <a:bodyPr wrap="square" anchor="ctr" lIns="9144" rIns="9144" tIns="6400" bIns="6400">
-            <a:normAutofit/>
+            <a:noAutofit/>
           </a:bodyPr>
           <a:lstStyle/>
           <a:p>
@@ -11521,7 +11521,7 @@
         </p:spPr>
         <p:txBody>
           <a:bodyPr wrap="square" anchor="t" lIns="9144" rIns="9144" tIns="6400" bIns="6400">
-            <a:normAutofit/>
+            <a:noAutofit/>
           </a:bodyPr>
           <a:lstStyle/>
           <a:p>
@@ -11561,7 +11561,7 @@
         </p:spPr>
         <p:txBody>
           <a:bodyPr wrap="square" anchor="t" lIns="9144" rIns="9144" tIns="6400" bIns="6400">
-            <a:normAutofit/>
+            <a:noAutofit/>
           </a:bodyPr>
           <a:lstStyle/>
           <a:p>
@@ -11601,7 +11601,7 @@
         </p:spPr>
         <p:txBody>
           <a:bodyPr wrap="square" anchor="t" lIns="9144" rIns="9144" tIns="6400" bIns="6400">
-            <a:normAutofit/>
+            <a:noAutofit/>
           </a:bodyPr>
           <a:lstStyle/>
           <a:p>
@@ -11641,7 +11641,7 @@
         </p:spPr>
         <p:txBody>
           <a:bodyPr wrap="square" anchor="t" lIns="9144" rIns="9144" tIns="6400" bIns="6400">
-            <a:normAutofit/>
+            <a:noAutofit/>
           </a:bodyPr>
           <a:lstStyle/>
           <a:p>
@@ -11681,7 +11681,7 @@
         </p:spPr>
         <p:txBody>
           <a:bodyPr wrap="square" anchor="t" lIns="9144" rIns="9144" tIns="6400" bIns="6400">
-            <a:normAutofit/>
+            <a:noAutofit/>
           </a:bodyPr>
           <a:lstStyle/>
           <a:p>
@@ -11721,7 +11721,7 @@
         </p:spPr>
         <p:txBody>
           <a:bodyPr wrap="square" anchor="t" lIns="9144" rIns="9144" tIns="6400" bIns="6400">
-            <a:normAutofit/>
+            <a:noAutofit/>
           </a:bodyPr>
           <a:lstStyle/>
           <a:p>
@@ -11761,7 +11761,7 @@
         </p:spPr>
         <p:txBody>
           <a:bodyPr wrap="square" anchor="t" lIns="9144" rIns="9144" tIns="6400" bIns="6400">
-            <a:normAutofit/>
+            <a:noAutofit/>
           </a:bodyPr>
           <a:lstStyle/>
           <a:p>
@@ -11801,7 +11801,7 @@
         </p:spPr>
         <p:txBody>
           <a:bodyPr wrap="square" anchor="t" lIns="9144" rIns="9144" tIns="6400" bIns="6400">
-            <a:normAutofit/>
+            <a:noAutofit/>
           </a:bodyPr>
           <a:lstStyle/>
           <a:p>
@@ -11979,7 +11979,7 @@
         </p:spPr>
         <p:txBody>
           <a:bodyPr wrap="square" anchor="ctr" lIns="9144" rIns="9144" tIns="6400" bIns="6400">
-            <a:normAutofit/>
+            <a:noAutofit/>
           </a:bodyPr>
           <a:lstStyle/>
           <a:p>
@@ -12019,7 +12019,7 @@
         </p:spPr>
         <p:txBody>
           <a:bodyPr wrap="square" anchor="ctr" lIns="9144" rIns="9144" tIns="6400" bIns="6400">
-            <a:normAutofit/>
+            <a:noAutofit/>
           </a:bodyPr>
           <a:lstStyle/>
           <a:p>
@@ -12059,7 +12059,7 @@
         </p:spPr>
         <p:txBody>
           <a:bodyPr wrap="square" anchor="t" lIns="9144" rIns="9144" tIns="6400" bIns="6400">
-            <a:normAutofit/>
+            <a:noAutofit/>
           </a:bodyPr>
           <a:lstStyle/>
           <a:p>
@@ -12099,7 +12099,7 @@
         </p:spPr>
         <p:txBody>
           <a:bodyPr wrap="square" anchor="t" lIns="9144" rIns="9144" tIns="6400" bIns="6400">
-            <a:normAutofit/>
+            <a:noAutofit/>
           </a:bodyPr>
           <a:lstStyle/>
           <a:p>
@@ -12139,7 +12139,7 @@
         </p:spPr>
         <p:txBody>
           <a:bodyPr wrap="square" anchor="t" lIns="9144" rIns="9144" tIns="6400" bIns="6400">
-            <a:normAutofit/>
+            <a:noAutofit/>
           </a:bodyPr>
           <a:lstStyle/>
           <a:p>
@@ -12179,7 +12179,7 @@
         </p:spPr>
         <p:txBody>
           <a:bodyPr wrap="square" anchor="t" lIns="9144" rIns="9144" tIns="6400" bIns="6400">
-            <a:normAutofit/>
+            <a:noAutofit/>
           </a:bodyPr>
           <a:lstStyle/>
           <a:p>
@@ -12219,7 +12219,7 @@
         </p:spPr>
         <p:txBody>
           <a:bodyPr wrap="square" anchor="t" lIns="9144" rIns="9144" tIns="6400" bIns="6400">
-            <a:normAutofit/>
+            <a:noAutofit/>
           </a:bodyPr>
           <a:lstStyle/>
           <a:p>
@@ -12259,7 +12259,7 @@
         </p:spPr>
         <p:txBody>
           <a:bodyPr wrap="square" anchor="t" lIns="9144" rIns="9144" tIns="6400" bIns="6400">
-            <a:normAutofit/>
+            <a:noAutofit/>
           </a:bodyPr>
           <a:lstStyle/>
           <a:p>
@@ -12299,7 +12299,7 @@
         </p:spPr>
         <p:txBody>
           <a:bodyPr wrap="square" anchor="t" lIns="9144" rIns="9144" tIns="6400" bIns="6400">
-            <a:normAutofit/>
+            <a:noAutofit/>
           </a:bodyPr>
           <a:lstStyle/>
           <a:p>
@@ -12339,7 +12339,7 @@
         </p:spPr>
         <p:txBody>
           <a:bodyPr wrap="square" anchor="t" lIns="9144" rIns="9144" tIns="6400" bIns="6400">
-            <a:normAutofit/>
+            <a:noAutofit/>
           </a:bodyPr>
           <a:lstStyle/>
           <a:p>
@@ -12517,7 +12517,7 @@
         </p:spPr>
         <p:txBody>
           <a:bodyPr wrap="square" anchor="ctr" lIns="9144" rIns="9144" tIns="6400" bIns="6400">
-            <a:normAutofit/>
+            <a:noAutofit/>
           </a:bodyPr>
           <a:lstStyle/>
           <a:p>
@@ -12557,7 +12557,7 @@
         </p:spPr>
         <p:txBody>
           <a:bodyPr wrap="square" anchor="ctr" lIns="9144" rIns="9144" tIns="6400" bIns="6400">
-            <a:normAutofit/>
+            <a:noAutofit/>
           </a:bodyPr>
           <a:lstStyle/>
           <a:p>
@@ -12597,7 +12597,7 @@
         </p:spPr>
         <p:txBody>
           <a:bodyPr wrap="square" anchor="t" lIns="9144" rIns="9144" tIns="6400" bIns="6400">
-            <a:normAutofit/>
+            <a:noAutofit/>
           </a:bodyPr>
           <a:lstStyle/>
           <a:p>
@@ -12637,7 +12637,7 @@
         </p:spPr>
         <p:txBody>
           <a:bodyPr wrap="square" anchor="t" lIns="9144" rIns="9144" tIns="6400" bIns="6400">
-            <a:normAutofit/>
+            <a:noAutofit/>
           </a:bodyPr>
           <a:lstStyle/>
           <a:p>
@@ -12677,7 +12677,7 @@
         </p:spPr>
         <p:txBody>
           <a:bodyPr wrap="square" anchor="t" lIns="9144" rIns="9144" tIns="6400" bIns="6400">
-            <a:normAutofit/>
+            <a:noAutofit/>
           </a:bodyPr>
           <a:lstStyle/>
           <a:p>
@@ -12717,7 +12717,7 @@
         </p:spPr>
         <p:txBody>
           <a:bodyPr wrap="square" anchor="t" lIns="9144" rIns="9144" tIns="6400" bIns="6400">
-            <a:normAutofit/>
+            <a:noAutofit/>
           </a:bodyPr>
           <a:lstStyle/>
           <a:p>
@@ -12757,7 +12757,7 @@
         </p:spPr>
         <p:txBody>
           <a:bodyPr wrap="square" anchor="t" lIns="9144" rIns="9144" tIns="6400" bIns="6400">
-            <a:normAutofit/>
+            <a:noAutofit/>
           </a:bodyPr>
           <a:lstStyle/>
           <a:p>
@@ -12797,7 +12797,7 @@
         </p:spPr>
         <p:txBody>
           <a:bodyPr wrap="square" anchor="t" lIns="9144" rIns="9144" tIns="6400" bIns="6400">
-            <a:normAutofit/>
+            <a:noAutofit/>
           </a:bodyPr>
           <a:lstStyle/>
           <a:p>
@@ -12837,7 +12837,7 @@
         </p:spPr>
         <p:txBody>
           <a:bodyPr wrap="square" anchor="t" lIns="9144" rIns="9144" tIns="6400" bIns="6400">
-            <a:normAutofit/>
+            <a:noAutofit/>
           </a:bodyPr>
           <a:lstStyle/>
           <a:p>
@@ -12877,7 +12877,7 @@
         </p:spPr>
         <p:txBody>
           <a:bodyPr wrap="square" anchor="t" lIns="9144" rIns="9144" tIns="6400" bIns="6400">
-            <a:normAutofit/>
+            <a:noAutofit/>
           </a:bodyPr>
           <a:lstStyle/>
           <a:p>
@@ -13055,7 +13055,7 @@
         </p:spPr>
         <p:txBody>
           <a:bodyPr wrap="square" anchor="ctr" lIns="9144" rIns="9144" tIns="6400" bIns="6400">
-            <a:normAutofit/>
+            <a:noAutofit/>
           </a:bodyPr>
           <a:lstStyle/>
           <a:p>
@@ -13095,7 +13095,7 @@
         </p:spPr>
         <p:txBody>
           <a:bodyPr wrap="square" anchor="ctr" lIns="9144" rIns="9144" tIns="6400" bIns="6400">
-            <a:normAutofit/>
+            <a:noAutofit/>
           </a:bodyPr>
           <a:lstStyle/>
           <a:p>
@@ -13135,7 +13135,7 @@
         </p:spPr>
         <p:txBody>
           <a:bodyPr wrap="square" anchor="t" lIns="9144" rIns="9144" tIns="6400" bIns="6400">
-            <a:normAutofit/>
+            <a:noAutofit/>
           </a:bodyPr>
           <a:lstStyle/>
           <a:p>
@@ -13175,7 +13175,7 @@
         </p:spPr>
         <p:txBody>
           <a:bodyPr wrap="square" anchor="t" lIns="9144" rIns="9144" tIns="6400" bIns="6400">
-            <a:normAutofit/>
+            <a:noAutofit/>
           </a:bodyPr>
           <a:lstStyle/>
           <a:p>
@@ -13215,7 +13215,7 @@
         </p:spPr>
         <p:txBody>
           <a:bodyPr wrap="square" anchor="t" lIns="9144" rIns="9144" tIns="6400" bIns="6400">
-            <a:normAutofit/>
+            <a:noAutofit/>
           </a:bodyPr>
           <a:lstStyle/>
           <a:p>
@@ -13255,7 +13255,7 @@
         </p:spPr>
         <p:txBody>
           <a:bodyPr wrap="square" anchor="t" lIns="9144" rIns="9144" tIns="6400" bIns="6400">
-            <a:normAutofit/>
+            <a:noAutofit/>
           </a:bodyPr>
           <a:lstStyle/>
           <a:p>
@@ -13295,7 +13295,7 @@
         </p:spPr>
         <p:txBody>
           <a:bodyPr wrap="square" anchor="t" lIns="9144" rIns="9144" tIns="6400" bIns="6400">
-            <a:normAutofit/>
+            <a:noAutofit/>
           </a:bodyPr>
           <a:lstStyle/>
           <a:p>
@@ -13335,7 +13335,7 @@
         </p:spPr>
         <p:txBody>
           <a:bodyPr wrap="square" anchor="t" lIns="9144" rIns="9144" tIns="6400" bIns="6400">
-            <a:normAutofit/>
+            <a:noAutofit/>
           </a:bodyPr>
           <a:lstStyle/>
           <a:p>
@@ -13375,7 +13375,7 @@
         </p:spPr>
         <p:txBody>
           <a:bodyPr wrap="square" anchor="t" lIns="9144" rIns="9144" tIns="6400" bIns="6400">
-            <a:normAutofit/>
+            <a:noAutofit/>
           </a:bodyPr>
           <a:lstStyle/>
           <a:p>
@@ -13415,7 +13415,7 @@
         </p:spPr>
         <p:txBody>
           <a:bodyPr wrap="square" anchor="t" lIns="9144" rIns="9144" tIns="6400" bIns="6400">
-            <a:normAutofit/>
+            <a:noAutofit/>
           </a:bodyPr>
           <a:lstStyle/>
           <a:p>
@@ -13481,7 +13481,7 @@
         </p:spPr>
         <p:txBody>
           <a:bodyPr wrap="square" anchor="t" lIns="18288" rIns="18288" tIns="12801" bIns="12801">
-            <a:normAutofit/>
+            <a:noAutofit/>
           </a:bodyPr>
           <a:lstStyle/>
           <a:p>
@@ -13521,7 +13521,7 @@
         </p:spPr>
         <p:txBody>
           <a:bodyPr wrap="square" anchor="t" lIns="18288" rIns="18288" tIns="12801" bIns="12801">
-            <a:normAutofit/>
+            <a:noAutofit/>
           </a:bodyPr>
           <a:lstStyle/>
           <a:p>
@@ -13561,7 +13561,7 @@
         </p:spPr>
         <p:txBody>
           <a:bodyPr wrap="square" anchor="t" lIns="18288" rIns="18288" tIns="12801" bIns="12801">
-            <a:normAutofit/>
+            <a:noAutofit/>
           </a:bodyPr>
           <a:lstStyle/>
           <a:p>
@@ -13733,7 +13733,7 @@
         </p:spPr>
         <p:txBody>
           <a:bodyPr wrap="square" anchor="t" lIns="9144" rIns="9144" tIns="6400" bIns="6400">
-            <a:normAutofit/>
+            <a:noAutofit/>
           </a:bodyPr>
           <a:lstStyle/>
           <a:p>
@@ -13773,7 +13773,7 @@
         </p:spPr>
         <p:txBody>
           <a:bodyPr wrap="square" anchor="t" lIns="9144" rIns="9144" tIns="6400" bIns="6400">
-            <a:normAutofit/>
+            <a:noAutofit/>
           </a:bodyPr>
           <a:lstStyle/>
           <a:p>
@@ -13951,7 +13951,7 @@
         </p:spPr>
         <p:txBody>
           <a:bodyPr wrap="square" anchor="ctr" lIns="18288" rIns="18288" tIns="12801" bIns="12801">
-            <a:normAutofit/>
+            <a:noAutofit/>
           </a:bodyPr>
           <a:lstStyle/>
           <a:p>
@@ -13991,7 +13991,7 @@
         </p:spPr>
         <p:txBody>
           <a:bodyPr wrap="square" anchor="ctr" lIns="9144" rIns="9144" tIns="6400" bIns="6400">
-            <a:normAutofit/>
+            <a:noAutofit/>
           </a:bodyPr>
           <a:lstStyle/>
           <a:p>
@@ -14031,7 +14031,7 @@
         </p:spPr>
         <p:txBody>
           <a:bodyPr wrap="square" anchor="ctr" lIns="9144" rIns="9144" tIns="6400" bIns="6400">
-            <a:normAutofit/>
+            <a:noAutofit/>
           </a:bodyPr>
           <a:lstStyle/>
           <a:p>
@@ -14071,7 +14071,7 @@
         </p:spPr>
         <p:txBody>
           <a:bodyPr wrap="square" anchor="t" lIns="9144" rIns="9144" tIns="6400" bIns="6400">
-            <a:normAutofit/>
+            <a:noAutofit/>
           </a:bodyPr>
           <a:lstStyle/>
           <a:p>
@@ -14155,7 +14155,7 @@
         </p:spPr>
         <p:txBody>
           <a:bodyPr wrap="square" anchor="t" lIns="9144" rIns="9144" tIns="6400" bIns="6400">
-            <a:normAutofit/>
+            <a:noAutofit/>
           </a:bodyPr>
           <a:lstStyle/>
           <a:p>
@@ -14333,7 +14333,7 @@
         </p:spPr>
         <p:txBody>
           <a:bodyPr wrap="square" anchor="ctr" lIns="18288" rIns="18288" tIns="12801" bIns="12801">
-            <a:normAutofit/>
+            <a:noAutofit/>
           </a:bodyPr>
           <a:lstStyle/>
           <a:p>
@@ -14373,7 +14373,7 @@
         </p:spPr>
         <p:txBody>
           <a:bodyPr wrap="square" anchor="ctr" lIns="9144" rIns="9144" tIns="6400" bIns="6400">
-            <a:normAutofit/>
+            <a:noAutofit/>
           </a:bodyPr>
           <a:lstStyle/>
           <a:p>
@@ -14413,7 +14413,7 @@
         </p:spPr>
         <p:txBody>
           <a:bodyPr wrap="square" anchor="ctr" lIns="9144" rIns="9144" tIns="6400" bIns="6400">
-            <a:normAutofit/>
+            <a:noAutofit/>
           </a:bodyPr>
           <a:lstStyle/>
           <a:p>
@@ -14453,7 +14453,7 @@
         </p:spPr>
         <p:txBody>
           <a:bodyPr wrap="square" anchor="t" lIns="9144" rIns="9144" tIns="6400" bIns="6400">
-            <a:normAutofit/>
+            <a:noAutofit/>
           </a:bodyPr>
           <a:lstStyle/>
           <a:p>
@@ -14537,7 +14537,7 @@
         </p:spPr>
         <p:txBody>
           <a:bodyPr wrap="square" anchor="t" lIns="9144" rIns="9144" tIns="6400" bIns="6400">
-            <a:normAutofit/>
+            <a:noAutofit/>
           </a:bodyPr>
           <a:lstStyle/>
           <a:p>
@@ -14715,7 +14715,7 @@
         </p:spPr>
         <p:txBody>
           <a:bodyPr wrap="square" anchor="ctr" lIns="18288" rIns="18288" tIns="12801" bIns="12801">
-            <a:normAutofit/>
+            <a:noAutofit/>
           </a:bodyPr>
           <a:lstStyle/>
           <a:p>
@@ -14755,7 +14755,7 @@
         </p:spPr>
         <p:txBody>
           <a:bodyPr wrap="square" anchor="ctr" lIns="9144" rIns="9144" tIns="6400" bIns="6400">
-            <a:normAutofit/>
+            <a:noAutofit/>
           </a:bodyPr>
           <a:lstStyle/>
           <a:p>
@@ -14795,7 +14795,7 @@
         </p:spPr>
         <p:txBody>
           <a:bodyPr wrap="square" anchor="ctr" lIns="9144" rIns="9144" tIns="6400" bIns="6400">
-            <a:normAutofit/>
+            <a:noAutofit/>
           </a:bodyPr>
           <a:lstStyle/>
           <a:p>
@@ -14835,7 +14835,7 @@
         </p:spPr>
         <p:txBody>
           <a:bodyPr wrap="square" anchor="t" lIns="9144" rIns="9144" tIns="6400" bIns="6400">
-            <a:normAutofit/>
+            <a:noAutofit/>
           </a:bodyPr>
           <a:lstStyle/>
           <a:p>
@@ -14919,7 +14919,7 @@
         </p:spPr>
         <p:txBody>
           <a:bodyPr wrap="square" anchor="t" lIns="9144" rIns="9144" tIns="6400" bIns="6400">
-            <a:normAutofit/>
+            <a:noAutofit/>
           </a:bodyPr>
           <a:lstStyle/>
           <a:p>
@@ -15097,7 +15097,7 @@
         </p:spPr>
         <p:txBody>
           <a:bodyPr wrap="square" anchor="ctr" lIns="18288" rIns="18288" tIns="12801" bIns="12801">
-            <a:normAutofit/>
+            <a:noAutofit/>
           </a:bodyPr>
           <a:lstStyle/>
           <a:p>
@@ -15137,7 +15137,7 @@
         </p:spPr>
         <p:txBody>
           <a:bodyPr wrap="square" anchor="ctr" lIns="9144" rIns="9144" tIns="6400" bIns="6400">
-            <a:normAutofit/>
+            <a:noAutofit/>
           </a:bodyPr>
           <a:lstStyle/>
           <a:p>
@@ -15177,7 +15177,7 @@
         </p:spPr>
         <p:txBody>
           <a:bodyPr wrap="square" anchor="ctr" lIns="9144" rIns="9144" tIns="6400" bIns="6400">
-            <a:normAutofit/>
+            <a:noAutofit/>
           </a:bodyPr>
           <a:lstStyle/>
           <a:p>
@@ -15217,7 +15217,7 @@
         </p:spPr>
         <p:txBody>
           <a:bodyPr wrap="square" anchor="t" lIns="9144" rIns="9144" tIns="6400" bIns="6400">
-            <a:normAutofit/>
+            <a:noAutofit/>
           </a:bodyPr>
           <a:lstStyle/>
           <a:p>
@@ -15301,7 +15301,7 @@
         </p:spPr>
         <p:txBody>
           <a:bodyPr wrap="square" anchor="t" lIns="9144" rIns="9144" tIns="6400" bIns="6400">
-            <a:normAutofit/>
+            <a:noAutofit/>
           </a:bodyPr>
           <a:lstStyle/>
           <a:p>
@@ -15479,7 +15479,7 @@
         </p:spPr>
         <p:txBody>
           <a:bodyPr wrap="square" anchor="ctr" lIns="18288" rIns="18288" tIns="12801" bIns="12801">
-            <a:normAutofit/>
+            <a:noAutofit/>
           </a:bodyPr>
           <a:lstStyle/>
           <a:p>
@@ -15519,7 +15519,7 @@
         </p:spPr>
         <p:txBody>
           <a:bodyPr wrap="square" anchor="ctr" lIns="9144" rIns="9144" tIns="6400" bIns="6400">
-            <a:normAutofit/>
+            <a:noAutofit/>
           </a:bodyPr>
           <a:lstStyle/>
           <a:p>
@@ -15559,7 +15559,7 @@
         </p:spPr>
         <p:txBody>
           <a:bodyPr wrap="square" anchor="ctr" lIns="9144" rIns="9144" tIns="6400" bIns="6400">
-            <a:normAutofit/>
+            <a:noAutofit/>
           </a:bodyPr>
           <a:lstStyle/>
           <a:p>
@@ -15599,7 +15599,7 @@
         </p:spPr>
         <p:txBody>
           <a:bodyPr wrap="square" anchor="t" lIns="9144" rIns="9144" tIns="6400" bIns="6400">
-            <a:normAutofit/>
+            <a:noAutofit/>
           </a:bodyPr>
           <a:lstStyle/>
           <a:p>
@@ -15683,7 +15683,7 @@
         </p:spPr>
         <p:txBody>
           <a:bodyPr wrap="square" anchor="t" lIns="9144" rIns="9144" tIns="6400" bIns="6400">
-            <a:normAutofit/>
+            <a:noAutofit/>
           </a:bodyPr>
           <a:lstStyle/>
           <a:p>
@@ -15861,7 +15861,7 @@
         </p:spPr>
         <p:txBody>
           <a:bodyPr wrap="square" anchor="ctr" lIns="18288" rIns="18288" tIns="12801" bIns="12801">
-            <a:normAutofit/>
+            <a:noAutofit/>
           </a:bodyPr>
           <a:lstStyle/>
           <a:p>
@@ -15901,7 +15901,7 @@
         </p:spPr>
         <p:txBody>
           <a:bodyPr wrap="square" anchor="ctr" lIns="9144" rIns="9144" tIns="6400" bIns="6400">
-            <a:normAutofit/>
+            <a:noAutofit/>
           </a:bodyPr>
           <a:lstStyle/>
           <a:p>
@@ -15941,7 +15941,7 @@
         </p:spPr>
         <p:txBody>
           <a:bodyPr wrap="square" anchor="ctr" lIns="9144" rIns="9144" tIns="6400" bIns="6400">
-            <a:normAutofit/>
+            <a:noAutofit/>
           </a:bodyPr>
           <a:lstStyle/>
           <a:p>
@@ -15981,7 +15981,7 @@
         </p:spPr>
         <p:txBody>
           <a:bodyPr wrap="square" anchor="t" lIns="9144" rIns="9144" tIns="6400" bIns="6400">
-            <a:normAutofit/>
+            <a:noAutofit/>
           </a:bodyPr>
           <a:lstStyle/>
           <a:p>
@@ -16065,7 +16065,7 @@
         </p:spPr>
         <p:txBody>
           <a:bodyPr wrap="square" anchor="t" lIns="9144" rIns="9144" tIns="6400" bIns="6400">
-            <a:normAutofit/>
+            <a:noAutofit/>
           </a:bodyPr>
           <a:lstStyle/>
           <a:p>
@@ -16243,7 +16243,7 @@
         </p:spPr>
         <p:txBody>
           <a:bodyPr wrap="square" anchor="ctr" lIns="18288" rIns="18288" tIns="12801" bIns="12801">
-            <a:normAutofit/>
+            <a:noAutofit/>
           </a:bodyPr>
           <a:lstStyle/>
           <a:p>
@@ -16283,7 +16283,7 @@
         </p:spPr>
         <p:txBody>
           <a:bodyPr wrap="square" anchor="ctr" lIns="9144" rIns="9144" tIns="6400" bIns="6400">
-            <a:normAutofit/>
+            <a:noAutofit/>
           </a:bodyPr>
           <a:lstStyle/>
           <a:p>
@@ -16323,7 +16323,7 @@
         </p:spPr>
         <p:txBody>
           <a:bodyPr wrap="square" anchor="ctr" lIns="9144" rIns="9144" tIns="6400" bIns="6400">
-            <a:normAutofit/>
+            <a:noAutofit/>
           </a:bodyPr>
           <a:lstStyle/>
           <a:p>
@@ -16363,7 +16363,7 @@
         </p:spPr>
         <p:txBody>
           <a:bodyPr wrap="square" anchor="t" lIns="9144" rIns="9144" tIns="6400" bIns="6400">
-            <a:normAutofit/>
+            <a:noAutofit/>
           </a:bodyPr>
           <a:lstStyle/>
           <a:p>
@@ -16447,7 +16447,7 @@
         </p:spPr>
         <p:txBody>
           <a:bodyPr wrap="square" anchor="t" lIns="9144" rIns="9144" tIns="6400" bIns="6400">
-            <a:normAutofit/>
+            <a:noAutofit/>
           </a:bodyPr>
           <a:lstStyle/>
           <a:p>
@@ -16625,7 +16625,7 @@
         </p:spPr>
         <p:txBody>
           <a:bodyPr wrap="square" anchor="ctr" lIns="18288" rIns="18288" tIns="12801" bIns="12801">
-            <a:normAutofit/>
+            <a:noAutofit/>
           </a:bodyPr>
           <a:lstStyle/>
           <a:p>
@@ -16665,7 +16665,7 @@
         </p:spPr>
         <p:txBody>
           <a:bodyPr wrap="square" anchor="ctr" lIns="9144" rIns="9144" tIns="6400" bIns="6400">
-            <a:normAutofit/>
+            <a:noAutofit/>
           </a:bodyPr>
           <a:lstStyle/>
           <a:p>
@@ -16705,7 +16705,7 @@
         </p:spPr>
         <p:txBody>
           <a:bodyPr wrap="square" anchor="ctr" lIns="9144" rIns="9144" tIns="6400" bIns="6400">
-            <a:normAutofit/>
+            <a:noAutofit/>
           </a:bodyPr>
           <a:lstStyle/>
           <a:p>
@@ -16745,7 +16745,7 @@
         </p:spPr>
         <p:txBody>
           <a:bodyPr wrap="square" anchor="t" lIns="9144" rIns="9144" tIns="6400" bIns="6400">
-            <a:normAutofit/>
+            <a:noAutofit/>
           </a:bodyPr>
           <a:lstStyle/>
           <a:p>
@@ -16829,7 +16829,7 @@
         </p:spPr>
         <p:txBody>
           <a:bodyPr wrap="square" anchor="t" lIns="9144" rIns="9144" tIns="6400" bIns="6400">
-            <a:normAutofit/>
+            <a:noAutofit/>
           </a:bodyPr>
           <a:lstStyle/>
           <a:p>
@@ -16895,7 +16895,7 @@
         </p:spPr>
         <p:txBody>
           <a:bodyPr wrap="square" anchor="t" lIns="18288" rIns="18288" tIns="12801" bIns="12801">
-            <a:normAutofit/>
+            <a:noAutofit/>
           </a:bodyPr>
           <a:lstStyle/>
           <a:p>
@@ -16935,7 +16935,7 @@
         </p:spPr>
         <p:txBody>
           <a:bodyPr wrap="square" anchor="t" lIns="18288" rIns="18288" tIns="12801" bIns="12801">
-            <a:normAutofit/>
+            <a:noAutofit/>
           </a:bodyPr>
           <a:lstStyle/>
           <a:p>
@@ -16975,7 +16975,7 @@
         </p:spPr>
         <p:txBody>
           <a:bodyPr wrap="square" anchor="t" lIns="18288" rIns="18288" tIns="12801" bIns="12801">
-            <a:normAutofit/>
+            <a:noAutofit/>
           </a:bodyPr>
           <a:lstStyle/>
           <a:p>
@@ -17147,7 +17147,7 @@
         </p:spPr>
         <p:txBody>
           <a:bodyPr wrap="square" anchor="t" lIns="9144" rIns="9144" tIns="6400" bIns="6400">
-            <a:normAutofit/>
+            <a:noAutofit/>
           </a:bodyPr>
           <a:lstStyle/>
           <a:p>
@@ -17187,7 +17187,7 @@
         </p:spPr>
         <p:txBody>
           <a:bodyPr wrap="square" anchor="t" lIns="9144" rIns="9144" tIns="6400" bIns="6400">
-            <a:normAutofit/>
+            <a:noAutofit/>
           </a:bodyPr>
           <a:lstStyle/>
           <a:p>
@@ -17317,7 +17317,7 @@
         </p:spPr>
         <p:txBody>
           <a:bodyPr wrap="square" anchor="t" lIns="9144" rIns="9144" tIns="6400" bIns="6400">
-            <a:normAutofit/>
+            <a:noAutofit/>
           </a:bodyPr>
           <a:lstStyle/>
           <a:p>
@@ -17357,7 +17357,7 @@
         </p:spPr>
         <p:txBody>
           <a:bodyPr wrap="square" anchor="t" lIns="9144" rIns="9144" tIns="6400" bIns="6400">
-            <a:normAutofit/>
+            <a:noAutofit/>
           </a:bodyPr>
           <a:lstStyle/>
           <a:p>
@@ -17487,7 +17487,7 @@
         </p:spPr>
         <p:txBody>
           <a:bodyPr wrap="square" anchor="t" lIns="9144" rIns="9144" tIns="6400" bIns="6400">
-            <a:normAutofit/>
+            <a:noAutofit/>
           </a:bodyPr>
           <a:lstStyle/>
           <a:p>
@@ -17527,7 +17527,7 @@
         </p:spPr>
         <p:txBody>
           <a:bodyPr wrap="square" anchor="t" lIns="9144" rIns="9144" tIns="6400" bIns="6400">
-            <a:normAutofit/>
+            <a:noAutofit/>
           </a:bodyPr>
           <a:lstStyle/>
           <a:p>
@@ -17657,7 +17657,7 @@
         </p:spPr>
         <p:txBody>
           <a:bodyPr wrap="square" anchor="t" lIns="9144" rIns="9144" tIns="6400" bIns="6400">
-            <a:normAutofit/>
+            <a:noAutofit/>
           </a:bodyPr>
           <a:lstStyle/>
           <a:p>
@@ -17697,7 +17697,7 @@
         </p:spPr>
         <p:txBody>
           <a:bodyPr wrap="square" anchor="t" lIns="9144" rIns="9144" tIns="6400" bIns="6400">
-            <a:normAutofit/>
+            <a:noAutofit/>
           </a:bodyPr>
           <a:lstStyle/>
           <a:p>
@@ -17783,7 +17783,7 @@
         </p:spPr>
         <p:txBody>
           <a:bodyPr wrap="square" anchor="t" lIns="9144" rIns="9144" tIns="6400" bIns="6400">
-            <a:normAutofit/>
+            <a:noAutofit/>
           </a:bodyPr>
           <a:lstStyle/>
           <a:p>
@@ -17871,7 +17871,7 @@
         </p:spPr>
         <p:txBody>
           <a:bodyPr wrap="square" anchor="t" lIns="9144" rIns="9144" tIns="6400" bIns="6400">
-            <a:normAutofit/>
+            <a:noAutofit/>
           </a:bodyPr>
           <a:lstStyle/>
           <a:p>
@@ -17911,7 +17911,7 @@
         </p:spPr>
         <p:txBody>
           <a:bodyPr wrap="square" anchor="t" lIns="9144" rIns="9144" tIns="6400" bIns="6400">
-            <a:normAutofit/>
+            <a:noAutofit/>
           </a:bodyPr>
           <a:lstStyle/>
           <a:p>
@@ -17999,7 +17999,7 @@
         </p:spPr>
         <p:txBody>
           <a:bodyPr wrap="square" anchor="t" lIns="9144" rIns="9144" tIns="6400" bIns="6400">
-            <a:normAutofit/>
+            <a:noAutofit/>
           </a:bodyPr>
           <a:lstStyle/>
           <a:p>
@@ -18039,7 +18039,7 @@
         </p:spPr>
         <p:txBody>
           <a:bodyPr wrap="square" anchor="t" lIns="9144" rIns="9144" tIns="6400" bIns="6400">
-            <a:normAutofit/>
+            <a:noAutofit/>
           </a:bodyPr>
           <a:lstStyle/>
           <a:p>
@@ -18127,7 +18127,7 @@
         </p:spPr>
         <p:txBody>
           <a:bodyPr wrap="square" anchor="t" lIns="9144" rIns="9144" tIns="6400" bIns="6400">
-            <a:normAutofit/>
+            <a:noAutofit/>
           </a:bodyPr>
           <a:lstStyle/>
           <a:p>
@@ -18167,7 +18167,7 @@
         </p:spPr>
         <p:txBody>
           <a:bodyPr wrap="square" anchor="t" lIns="9144" rIns="9144" tIns="6400" bIns="6400">
-            <a:normAutofit/>
+            <a:noAutofit/>
           </a:bodyPr>
           <a:lstStyle/>
           <a:p>
@@ -18233,7 +18233,7 @@
         </p:spPr>
         <p:txBody>
           <a:bodyPr wrap="square" anchor="t" lIns="18288" rIns="18288" tIns="12801" bIns="12801">
-            <a:normAutofit/>
+            <a:noAutofit/>
           </a:bodyPr>
           <a:lstStyle/>
           <a:p>
@@ -18273,7 +18273,7 @@
         </p:spPr>
         <p:txBody>
           <a:bodyPr wrap="square" anchor="t" lIns="18288" rIns="18288" tIns="12801" bIns="12801">
-            <a:normAutofit/>
+            <a:noAutofit/>
           </a:bodyPr>
           <a:lstStyle/>
           <a:p>
@@ -18313,7 +18313,7 @@
         </p:spPr>
         <p:txBody>
           <a:bodyPr wrap="square" anchor="t" lIns="18288" rIns="18288" tIns="12801" bIns="12801">
-            <a:normAutofit/>
+            <a:noAutofit/>
           </a:bodyPr>
           <a:lstStyle/>
           <a:p>
@@ -18485,7 +18485,7 @@
         </p:spPr>
         <p:txBody>
           <a:bodyPr wrap="square" anchor="t" lIns="9144" rIns="9144" tIns="6400" bIns="6400">
-            <a:normAutofit/>
+            <a:noAutofit/>
           </a:bodyPr>
           <a:lstStyle/>
           <a:p>
@@ -18525,7 +18525,7 @@
         </p:spPr>
         <p:txBody>
           <a:bodyPr wrap="square" anchor="t" lIns="9144" rIns="9144" tIns="6400" bIns="6400">
-            <a:normAutofit/>
+            <a:noAutofit/>
           </a:bodyPr>
           <a:lstStyle/>
           <a:p>
@@ -18613,7 +18613,7 @@
         </p:spPr>
         <p:txBody>
           <a:bodyPr wrap="square" anchor="t" lIns="9144" rIns="9144" tIns="6400" bIns="6400">
-            <a:normAutofit/>
+            <a:noAutofit/>
           </a:bodyPr>
           <a:lstStyle/>
           <a:p>
@@ -18699,7 +18699,7 @@
         </p:spPr>
         <p:txBody>
           <a:bodyPr wrap="square" anchor="ctr" lIns="9144" rIns="9144" tIns="6400" bIns="6400">
-            <a:normAutofit/>
+            <a:noAutofit/>
           </a:bodyPr>
           <a:lstStyle/>
           <a:p>
@@ -18739,7 +18739,7 @@
         </p:spPr>
         <p:txBody>
           <a:bodyPr wrap="square" anchor="t" lIns="9144" rIns="9144" tIns="6400" bIns="6400">
-            <a:normAutofit/>
+            <a:noAutofit/>
           </a:bodyPr>
           <a:lstStyle/>
           <a:p>
@@ -18779,7 +18779,7 @@
         </p:spPr>
         <p:txBody>
           <a:bodyPr wrap="square" anchor="t" lIns="9144" rIns="9144" tIns="6400" bIns="6400">
-            <a:normAutofit/>
+            <a:noAutofit/>
           </a:bodyPr>
           <a:lstStyle/>
           <a:p>
@@ -18867,7 +18867,7 @@
         </p:spPr>
         <p:txBody>
           <a:bodyPr wrap="square" anchor="t" lIns="9144" rIns="9144" tIns="6400" bIns="6400">
-            <a:normAutofit/>
+            <a:noAutofit/>
           </a:bodyPr>
           <a:lstStyle/>
           <a:p>
@@ -18953,7 +18953,7 @@
         </p:spPr>
         <p:txBody>
           <a:bodyPr wrap="square" anchor="ctr" lIns="9144" rIns="9144" tIns="6400" bIns="6400">
-            <a:normAutofit/>
+            <a:noAutofit/>
           </a:bodyPr>
           <a:lstStyle/>
           <a:p>
@@ -18993,7 +18993,7 @@
         </p:spPr>
         <p:txBody>
           <a:bodyPr wrap="square" anchor="t" lIns="9144" rIns="9144" tIns="6400" bIns="6400">
-            <a:normAutofit/>
+            <a:noAutofit/>
           </a:bodyPr>
           <a:lstStyle/>
           <a:p>
@@ -19033,7 +19033,7 @@
         </p:spPr>
         <p:txBody>
           <a:bodyPr wrap="square" anchor="t" lIns="9144" rIns="9144" tIns="6400" bIns="6400">
-            <a:normAutofit/>
+            <a:noAutofit/>
           </a:bodyPr>
           <a:lstStyle/>
           <a:p>
@@ -19121,7 +19121,7 @@
         </p:spPr>
         <p:txBody>
           <a:bodyPr wrap="square" anchor="t" lIns="9144" rIns="9144" tIns="6400" bIns="6400">
-            <a:normAutofit/>
+            <a:noAutofit/>
           </a:bodyPr>
           <a:lstStyle/>
           <a:p>
@@ -19207,7 +19207,7 @@
         </p:spPr>
         <p:txBody>
           <a:bodyPr wrap="square" anchor="ctr" lIns="9144" rIns="9144" tIns="6400" bIns="6400">
-            <a:normAutofit/>
+            <a:noAutofit/>
           </a:bodyPr>
           <a:lstStyle/>
           <a:p>
@@ -19247,7 +19247,7 @@
         </p:spPr>
         <p:txBody>
           <a:bodyPr wrap="square" anchor="t" lIns="9144" rIns="9144" tIns="6400" bIns="6400">
-            <a:normAutofit/>
+            <a:noAutofit/>
           </a:bodyPr>
           <a:lstStyle/>
           <a:p>
@@ -19287,7 +19287,7 @@
         </p:spPr>
         <p:txBody>
           <a:bodyPr wrap="square" anchor="t" lIns="9144" rIns="9144" tIns="6400" bIns="6400">
-            <a:normAutofit/>
+            <a:noAutofit/>
           </a:bodyPr>
           <a:lstStyle/>
           <a:p>
@@ -19327,7 +19327,7 @@
         </p:spPr>
         <p:txBody>
           <a:bodyPr wrap="square" anchor="t" lIns="9144" rIns="9144" tIns="6400" bIns="6400">
-            <a:normAutofit/>
+            <a:noAutofit/>
           </a:bodyPr>
           <a:lstStyle/>
           <a:p>
@@ -19459,7 +19459,7 @@
         </p:spPr>
         <p:txBody>
           <a:bodyPr wrap="square" anchor="t" lIns="9144" rIns="9144" tIns="6400" bIns="6400">
-            <a:normAutofit/>
+            <a:noAutofit/>
           </a:bodyPr>
           <a:lstStyle/>
           <a:p>
@@ -19499,7 +19499,7 @@
         </p:spPr>
         <p:txBody>
           <a:bodyPr wrap="square" anchor="t" lIns="9144" rIns="9144" tIns="6400" bIns="6400">
-            <a:normAutofit/>
+            <a:noAutofit/>
           </a:bodyPr>
           <a:lstStyle/>
           <a:p>
@@ -19539,7 +19539,7 @@
         </p:spPr>
         <p:txBody>
           <a:bodyPr wrap="square" anchor="t" lIns="9144" rIns="9144" tIns="6400" bIns="6400">
-            <a:normAutofit/>
+            <a:noAutofit/>
           </a:bodyPr>
           <a:lstStyle/>
           <a:p>
@@ -19671,7 +19671,7 @@
         </p:spPr>
         <p:txBody>
           <a:bodyPr wrap="square" anchor="t" lIns="9144" rIns="9144" tIns="6400" bIns="6400">
-            <a:normAutofit/>
+            <a:noAutofit/>
           </a:bodyPr>
           <a:lstStyle/>
           <a:p>
@@ -19711,7 +19711,7 @@
         </p:spPr>
         <p:txBody>
           <a:bodyPr wrap="square" anchor="t" lIns="9144" rIns="9144" tIns="6400" bIns="6400">
-            <a:normAutofit/>
+            <a:noAutofit/>
           </a:bodyPr>
           <a:lstStyle/>
           <a:p>
@@ -19751,7 +19751,7 @@
         </p:spPr>
         <p:txBody>
           <a:bodyPr wrap="square" anchor="t" lIns="9144" rIns="9144" tIns="6400" bIns="6400">
-            <a:normAutofit/>
+            <a:noAutofit/>
           </a:bodyPr>
           <a:lstStyle/>
           <a:p>
@@ -19883,7 +19883,7 @@
         </p:spPr>
         <p:txBody>
           <a:bodyPr wrap="square" anchor="t" lIns="9144" rIns="9144" tIns="6400" bIns="6400">
-            <a:normAutofit/>
+            <a:noAutofit/>
           </a:bodyPr>
           <a:lstStyle/>
           <a:p>
@@ -19923,7 +19923,7 @@
         </p:spPr>
         <p:txBody>
           <a:bodyPr wrap="square" anchor="t" lIns="9144" rIns="9144" tIns="6400" bIns="6400">
-            <a:normAutofit/>
+            <a:noAutofit/>
           </a:bodyPr>
           <a:lstStyle/>
           <a:p>
@@ -19963,7 +19963,7 @@
         </p:spPr>
         <p:txBody>
           <a:bodyPr wrap="square" anchor="t" lIns="9144" rIns="9144" tIns="6400" bIns="6400">
-            <a:normAutofit/>
+            <a:noAutofit/>
           </a:bodyPr>
           <a:lstStyle/>
           <a:p>
@@ -20095,7 +20095,7 @@
         </p:spPr>
         <p:txBody>
           <a:bodyPr wrap="square" anchor="t" lIns="9144" rIns="9144" tIns="6400" bIns="6400">
-            <a:normAutofit/>
+            <a:noAutofit/>
           </a:bodyPr>
           <a:lstStyle/>
           <a:p>
@@ -20135,7 +20135,7 @@
         </p:spPr>
         <p:txBody>
           <a:bodyPr wrap="square" anchor="t" lIns="9144" rIns="9144" tIns="6400" bIns="6400">
-            <a:normAutofit/>
+            <a:noAutofit/>
           </a:bodyPr>
           <a:lstStyle/>
           <a:p>
@@ -20175,7 +20175,7 @@
         </p:spPr>
         <p:txBody>
           <a:bodyPr wrap="square" anchor="t" lIns="9144" rIns="9144" tIns="6400" bIns="6400">
-            <a:normAutofit/>
+            <a:noAutofit/>
           </a:bodyPr>
           <a:lstStyle/>
           <a:p>

--- a/cache_city/캐시의_도시_발전기획서.pptx
+++ b/cache_city/캐시의_도시_발전기획서.pptx
@@ -3489,16 +3489,16 @@
         </p:nvSpPr>
         <p:spPr>
           <a:xfrm>
-            <a:off x="777240" y="5532120"/>
-            <a:ext cx="5349240" cy="822960"/>
-          </a:xfrm>
-          <a:prstGeom prst="rect">
-            <a:avLst/>
-          </a:prstGeom>
-          <a:noFill/>
-        </p:spPr>
-        <p:txBody>
-          <a:bodyPr wrap="square" anchor="t" lIns="9144" rIns="9144" tIns="6400" bIns="6400">
+            <a:off x="777240" y="5538520"/>
+            <a:ext cx="5349240" cy="397840"/>
+          </a:xfrm>
+          <a:prstGeom prst="rect">
+            <a:avLst/>
+          </a:prstGeom>
+          <a:noFill/>
+        </p:spPr>
+        <p:txBody>
+          <a:bodyPr wrap="square" anchor="t" lIns="9144" rIns="9144" tIns="0" bIns="0">
             <a:noAutofit/>
           </a:bodyPr>
           <a:lstStyle/>
@@ -3507,9 +3507,6 @@
               <a:lnSpc>
                 <a:spcPct val="135000"/>
               </a:lnSpc>
-              <a:spcAft>
-                <a:spcPts val="113"/>
-              </a:spcAft>
             </a:pPr>
             <a:r>
               <a:rPr sz="950" b="0" i="0">
@@ -3522,6 +3519,29 @@
               <a:t>원천  『리뷰s』 영화 ‘빌’ 리뷰 · 도서 ‘죽음의 미로’ 리뷰</a:t>
             </a:r>
           </a:p>
+        </p:txBody>
+      </p:sp>
+      <p:sp>
+        <p:nvSpPr>
+          <p:cNvPr id="12" name="TextBox 11"/>
+          <p:cNvSpPr txBox="1"/>
+          <p:nvPr/>
+        </p:nvSpPr>
+        <p:spPr>
+          <a:xfrm>
+            <a:off x="777240" y="5950839"/>
+            <a:ext cx="5349240" cy="397840"/>
+          </a:xfrm>
+          <a:prstGeom prst="rect">
+            <a:avLst/>
+          </a:prstGeom>
+          <a:noFill/>
+        </p:spPr>
+        <p:txBody>
+          <a:bodyPr wrap="square" anchor="t" lIns="9144" rIns="9144" tIns="0" bIns="0">
+            <a:noAutofit/>
+          </a:bodyPr>
+          <a:lstStyle/>
           <a:p>
             <a:pPr algn="l">
               <a:lnSpc>
@@ -3543,7 +3563,7 @@
       </p:sp>
       <p:sp>
         <p:nvSpPr>
-          <p:cNvPr id="12" name="TextBox 11"/>
+          <p:cNvPr id="13" name="TextBox 12"/>
           <p:cNvSpPr txBox="1"/>
           <p:nvPr/>
         </p:nvSpPr>
@@ -3583,7 +3603,7 @@
       </p:sp>
       <p:sp>
         <p:nvSpPr>
-          <p:cNvPr id="13" name="Rounded Rectangle 12"/>
+          <p:cNvPr id="14" name="Rounded Rectangle 13"/>
           <p:cNvSpPr/>
           <p:nvPr/>
         </p:nvSpPr>
@@ -3631,7 +3651,7 @@
       </p:sp>
       <p:sp>
         <p:nvSpPr>
-          <p:cNvPr id="14" name="Rectangle 13"/>
+          <p:cNvPr id="15" name="Rectangle 14"/>
           <p:cNvSpPr/>
           <p:nvPr/>
         </p:nvSpPr>
@@ -3675,7 +3695,7 @@
       </p:sp>
       <p:sp>
         <p:nvSpPr>
-          <p:cNvPr id="15" name="TextBox 14"/>
+          <p:cNvPr id="16" name="TextBox 15"/>
           <p:cNvSpPr txBox="1"/>
           <p:nvPr/>
         </p:nvSpPr>
@@ -3715,7 +3735,7 @@
       </p:sp>
       <p:sp>
         <p:nvSpPr>
-          <p:cNvPr id="16" name="TextBox 15"/>
+          <p:cNvPr id="17" name="TextBox 16"/>
           <p:cNvSpPr txBox="1"/>
           <p:nvPr/>
         </p:nvSpPr>
@@ -3755,7 +3775,7 @@
       </p:sp>
       <p:sp>
         <p:nvSpPr>
-          <p:cNvPr id="17" name="TextBox 16"/>
+          <p:cNvPr id="18" name="TextBox 17"/>
           <p:cNvSpPr txBox="1"/>
           <p:nvPr/>
         </p:nvSpPr>
@@ -3795,7 +3815,7 @@
       </p:sp>
       <p:sp>
         <p:nvSpPr>
-          <p:cNvPr id="18" name="Rounded Rectangle 17"/>
+          <p:cNvPr id="19" name="Rounded Rectangle 18"/>
           <p:cNvSpPr/>
           <p:nvPr/>
         </p:nvSpPr>
@@ -3843,7 +3863,7 @@
       </p:sp>
       <p:sp>
         <p:nvSpPr>
-          <p:cNvPr id="19" name="Rectangle 18"/>
+          <p:cNvPr id="20" name="Rectangle 19"/>
           <p:cNvSpPr/>
           <p:nvPr/>
         </p:nvSpPr>
@@ -3887,7 +3907,7 @@
       </p:sp>
       <p:sp>
         <p:nvSpPr>
-          <p:cNvPr id="20" name="TextBox 19"/>
+          <p:cNvPr id="21" name="TextBox 20"/>
           <p:cNvSpPr txBox="1"/>
           <p:nvPr/>
         </p:nvSpPr>
@@ -3927,7 +3947,7 @@
       </p:sp>
       <p:sp>
         <p:nvSpPr>
-          <p:cNvPr id="21" name="TextBox 20"/>
+          <p:cNvPr id="22" name="TextBox 21"/>
           <p:cNvSpPr txBox="1"/>
           <p:nvPr/>
         </p:nvSpPr>
@@ -3967,7 +3987,7 @@
       </p:sp>
       <p:sp>
         <p:nvSpPr>
-          <p:cNvPr id="22" name="TextBox 21"/>
+          <p:cNvPr id="23" name="TextBox 22"/>
           <p:cNvSpPr txBox="1"/>
           <p:nvPr/>
         </p:nvSpPr>
@@ -4007,7 +4027,7 @@
       </p:sp>
       <p:sp>
         <p:nvSpPr>
-          <p:cNvPr id="23" name="Rounded Rectangle 22"/>
+          <p:cNvPr id="24" name="Rounded Rectangle 23"/>
           <p:cNvSpPr/>
           <p:nvPr/>
         </p:nvSpPr>
@@ -4055,7 +4075,7 @@
       </p:sp>
       <p:sp>
         <p:nvSpPr>
-          <p:cNvPr id="24" name="Rectangle 23"/>
+          <p:cNvPr id="25" name="Rectangle 24"/>
           <p:cNvSpPr/>
           <p:nvPr/>
         </p:nvSpPr>
@@ -4099,7 +4119,7 @@
       </p:sp>
       <p:sp>
         <p:nvSpPr>
-          <p:cNvPr id="25" name="TextBox 24"/>
+          <p:cNvPr id="26" name="TextBox 25"/>
           <p:cNvSpPr txBox="1"/>
           <p:nvPr/>
         </p:nvSpPr>
@@ -4139,7 +4159,7 @@
       </p:sp>
       <p:sp>
         <p:nvSpPr>
-          <p:cNvPr id="26" name="TextBox 25"/>
+          <p:cNvPr id="27" name="TextBox 26"/>
           <p:cNvSpPr txBox="1"/>
           <p:nvPr/>
         </p:nvSpPr>
@@ -4179,7 +4199,7 @@
       </p:sp>
       <p:sp>
         <p:nvSpPr>
-          <p:cNvPr id="27" name="TextBox 26"/>
+          <p:cNvPr id="28" name="TextBox 27"/>
           <p:cNvSpPr txBox="1"/>
           <p:nvPr/>
         </p:nvSpPr>
@@ -4219,7 +4239,7 @@
       </p:sp>
       <p:sp>
         <p:nvSpPr>
-          <p:cNvPr id="28" name="TextBox 27"/>
+          <p:cNvPr id="29" name="TextBox 28"/>
           <p:cNvSpPr txBox="1"/>
           <p:nvPr/>
         </p:nvSpPr>
@@ -9661,16 +9681,16 @@
         </p:nvSpPr>
         <p:spPr>
           <a:xfrm>
-            <a:off x="832103" y="4498848"/>
-            <a:ext cx="1463040" cy="676656"/>
-          </a:xfrm>
-          <a:prstGeom prst="rect">
-            <a:avLst/>
-          </a:prstGeom>
-          <a:noFill/>
-        </p:spPr>
-        <p:txBody>
-          <a:bodyPr wrap="square" anchor="t" lIns="9144" rIns="9144" tIns="6400" bIns="6400">
+            <a:off x="832103" y="4505248"/>
+            <a:ext cx="1463040" cy="325374"/>
+          </a:xfrm>
+          <a:prstGeom prst="rect">
+            <a:avLst/>
+          </a:prstGeom>
+          <a:noFill/>
+        </p:spPr>
+        <p:txBody>
+          <a:bodyPr wrap="square" anchor="t" lIns="9144" rIns="9144" tIns="0" bIns="0">
             <a:noAutofit/>
           </a:bodyPr>
           <a:lstStyle/>
@@ -9679,9 +9699,6 @@
               <a:lnSpc>
                 <a:spcPct val="118000"/>
               </a:lnSpc>
-              <a:spcAft>
-                <a:spcPts val="103"/>
-              </a:spcAft>
             </a:pPr>
             <a:r>
               <a:rPr sz="860" b="0" i="0">
@@ -9694,6 +9711,29 @@
               <a:t>“초코 케익이 먹고 싶다”</a:t>
             </a:r>
           </a:p>
+        </p:txBody>
+      </p:sp>
+      <p:sp>
+        <p:nvSpPr>
+          <p:cNvPr id="35" name="TextBox 34"/>
+          <p:cNvSpPr txBox="1"/>
+          <p:nvPr/>
+        </p:nvSpPr>
+        <p:spPr>
+          <a:xfrm>
+            <a:off x="832103" y="4843729"/>
+            <a:ext cx="1463040" cy="325374"/>
+          </a:xfrm>
+          <a:prstGeom prst="rect">
+            <a:avLst/>
+          </a:prstGeom>
+          <a:noFill/>
+        </p:spPr>
+        <p:txBody>
+          <a:bodyPr wrap="square" anchor="t" lIns="9144" rIns="9144" tIns="0" bIns="0">
+            <a:noAutofit/>
+          </a:bodyPr>
+          <a:lstStyle/>
           <a:p>
             <a:pPr algn="ctr">
               <a:lnSpc>
@@ -9715,7 +9755,7 @@
       </p:sp>
       <p:cxnSp>
         <p:nvCxnSpPr>
-          <p:cNvPr id="35" name="Connector 34"/>
+          <p:cNvPr id="36" name="Connector 35"/>
           <p:cNvCxnSpPr/>
           <p:nvPr/>
         </p:nvCxnSpPr>
@@ -9751,7 +9791,7 @@
       </p:cxnSp>
       <p:sp>
         <p:nvSpPr>
-          <p:cNvPr id="36" name="Rounded Rectangle 35"/>
+          <p:cNvPr id="37" name="Rounded Rectangle 36"/>
           <p:cNvSpPr/>
           <p:nvPr/>
         </p:nvSpPr>
@@ -9799,7 +9839,7 @@
       </p:sp>
       <p:sp>
         <p:nvSpPr>
-          <p:cNvPr id="37" name="TextBox 36"/>
+          <p:cNvPr id="38" name="TextBox 37"/>
           <p:cNvSpPr txBox="1"/>
           <p:nvPr/>
         </p:nvSpPr>
@@ -9839,22 +9879,22 @@
       </p:sp>
       <p:sp>
         <p:nvSpPr>
-          <p:cNvPr id="38" name="TextBox 37"/>
-          <p:cNvSpPr txBox="1"/>
-          <p:nvPr/>
-        </p:nvSpPr>
-        <p:spPr>
-          <a:xfrm>
-            <a:off x="2615184" y="4498848"/>
-            <a:ext cx="1463040" cy="676656"/>
-          </a:xfrm>
-          <a:prstGeom prst="rect">
-            <a:avLst/>
-          </a:prstGeom>
-          <a:noFill/>
-        </p:spPr>
-        <p:txBody>
-          <a:bodyPr wrap="square" anchor="t" lIns="9144" rIns="9144" tIns="6400" bIns="6400">
+          <p:cNvPr id="39" name="TextBox 38"/>
+          <p:cNvSpPr txBox="1"/>
+          <p:nvPr/>
+        </p:nvSpPr>
+        <p:spPr>
+          <a:xfrm>
+            <a:off x="2615184" y="4505248"/>
+            <a:ext cx="1463040" cy="325374"/>
+          </a:xfrm>
+          <a:prstGeom prst="rect">
+            <a:avLst/>
+          </a:prstGeom>
+          <a:noFill/>
+        </p:spPr>
+        <p:txBody>
+          <a:bodyPr wrap="square" anchor="t" lIns="9144" rIns="9144" tIns="0" bIns="0">
             <a:noAutofit/>
           </a:bodyPr>
           <a:lstStyle/>
@@ -9863,9 +9903,6 @@
               <a:lnSpc>
                 <a:spcPct val="118000"/>
               </a:lnSpc>
-              <a:spcAft>
-                <a:spcPts val="103"/>
-              </a:spcAft>
             </a:pPr>
             <a:r>
               <a:rPr sz="860" b="0" i="0">
@@ -9878,6 +9915,29 @@
               <a:t>광고 #A-0417의</a:t>
             </a:r>
           </a:p>
+        </p:txBody>
+      </p:sp>
+      <p:sp>
+        <p:nvSpPr>
+          <p:cNvPr id="40" name="TextBox 39"/>
+          <p:cNvSpPr txBox="1"/>
+          <p:nvPr/>
+        </p:nvSpPr>
+        <p:spPr>
+          <a:xfrm>
+            <a:off x="2615184" y="4843729"/>
+            <a:ext cx="1463040" cy="325374"/>
+          </a:xfrm>
+          <a:prstGeom prst="rect">
+            <a:avLst/>
+          </a:prstGeom>
+          <a:noFill/>
+        </p:spPr>
+        <p:txBody>
+          <a:bodyPr wrap="square" anchor="t" lIns="9144" rIns="9144" tIns="0" bIns="0">
+            <a:noAutofit/>
+          </a:bodyPr>
+          <a:lstStyle/>
           <a:p>
             <a:pPr algn="ctr">
               <a:lnSpc>
@@ -9899,7 +9959,7 @@
       </p:sp>
       <p:cxnSp>
         <p:nvCxnSpPr>
-          <p:cNvPr id="39" name="Connector 38"/>
+          <p:cNvPr id="41" name="Connector 40"/>
           <p:cNvCxnSpPr/>
           <p:nvPr/>
         </p:nvCxnSpPr>
@@ -9935,7 +9995,7 @@
       </p:cxnSp>
       <p:sp>
         <p:nvSpPr>
-          <p:cNvPr id="40" name="Rounded Rectangle 39"/>
+          <p:cNvPr id="42" name="Rounded Rectangle 41"/>
           <p:cNvSpPr/>
           <p:nvPr/>
         </p:nvSpPr>
@@ -9983,7 +10043,7 @@
       </p:sp>
       <p:sp>
         <p:nvSpPr>
-          <p:cNvPr id="41" name="TextBox 40"/>
+          <p:cNvPr id="43" name="TextBox 42"/>
           <p:cNvSpPr txBox="1"/>
           <p:nvPr/>
         </p:nvSpPr>
@@ -10023,22 +10083,22 @@
       </p:sp>
       <p:sp>
         <p:nvSpPr>
-          <p:cNvPr id="42" name="TextBox 41"/>
-          <p:cNvSpPr txBox="1"/>
-          <p:nvPr/>
-        </p:nvSpPr>
-        <p:spPr>
-          <a:xfrm>
-            <a:off x="4398264" y="4498848"/>
-            <a:ext cx="1463040" cy="676656"/>
-          </a:xfrm>
-          <a:prstGeom prst="rect">
-            <a:avLst/>
-          </a:prstGeom>
-          <a:noFill/>
-        </p:spPr>
-        <p:txBody>
-          <a:bodyPr wrap="square" anchor="t" lIns="9144" rIns="9144" tIns="6400" bIns="6400">
+          <p:cNvPr id="44" name="TextBox 43"/>
+          <p:cNvSpPr txBox="1"/>
+          <p:nvPr/>
+        </p:nvSpPr>
+        <p:spPr>
+          <a:xfrm>
+            <a:off x="4398264" y="4505248"/>
+            <a:ext cx="1463040" cy="325374"/>
+          </a:xfrm>
+          <a:prstGeom prst="rect">
+            <a:avLst/>
+          </a:prstGeom>
+          <a:noFill/>
+        </p:spPr>
+        <p:txBody>
+          <a:bodyPr wrap="square" anchor="t" lIns="9144" rIns="9144" tIns="0" bIns="0">
             <a:noAutofit/>
           </a:bodyPr>
           <a:lstStyle/>
@@ -10047,9 +10107,6 @@
               <a:lnSpc>
                 <a:spcPct val="118000"/>
               </a:lnSpc>
-              <a:spcAft>
-                <a:spcPts val="103"/>
-              </a:spcAft>
             </a:pPr>
             <a:r>
               <a:rPr sz="860" b="0" i="0">
@@ -10062,6 +10119,29 @@
               <a:t>상태는 그대로</a:t>
             </a:r>
           </a:p>
+        </p:txBody>
+      </p:sp>
+      <p:sp>
+        <p:nvSpPr>
+          <p:cNvPr id="45" name="TextBox 44"/>
+          <p:cNvSpPr txBox="1"/>
+          <p:nvPr/>
+        </p:nvSpPr>
+        <p:spPr>
+          <a:xfrm>
+            <a:off x="4398264" y="4843729"/>
+            <a:ext cx="1463040" cy="325374"/>
+          </a:xfrm>
+          <a:prstGeom prst="rect">
+            <a:avLst/>
+          </a:prstGeom>
+          <a:noFill/>
+        </p:spPr>
+        <p:txBody>
+          <a:bodyPr wrap="square" anchor="t" lIns="9144" rIns="9144" tIns="0" bIns="0">
+            <a:noAutofit/>
+          </a:bodyPr>
+          <a:lstStyle/>
           <a:p>
             <a:pPr algn="ctr">
               <a:lnSpc>
@@ -10083,7 +10163,7 @@
       </p:sp>
       <p:sp>
         <p:nvSpPr>
-          <p:cNvPr id="43" name="TextBox 42"/>
+          <p:cNvPr id="46" name="TextBox 45"/>
           <p:cNvSpPr txBox="1"/>
           <p:nvPr/>
         </p:nvSpPr>
@@ -10123,7 +10203,7 @@
       </p:sp>
       <p:sp>
         <p:nvSpPr>
-          <p:cNvPr id="44" name="TextBox 43"/>
+          <p:cNvPr id="47" name="TextBox 46"/>
           <p:cNvSpPr txBox="1"/>
           <p:nvPr/>
         </p:nvSpPr>
@@ -10163,7 +10243,7 @@
       </p:sp>
       <p:sp>
         <p:nvSpPr>
-          <p:cNvPr id="45" name="TextBox 44"/>
+          <p:cNvPr id="48" name="TextBox 47"/>
           <p:cNvSpPr txBox="1"/>
           <p:nvPr/>
         </p:nvSpPr>
@@ -10203,7 +10283,7 @@
       </p:sp>
       <p:sp>
         <p:nvSpPr>
-          <p:cNvPr id="46" name="Rounded Rectangle 45"/>
+          <p:cNvPr id="49" name="Rounded Rectangle 48"/>
           <p:cNvSpPr/>
           <p:nvPr/>
         </p:nvSpPr>
@@ -10251,7 +10331,7 @@
       </p:sp>
       <p:sp>
         <p:nvSpPr>
-          <p:cNvPr id="47" name="TextBox 46"/>
+          <p:cNvPr id="50" name="TextBox 49"/>
           <p:cNvSpPr txBox="1"/>
           <p:nvPr/>
         </p:nvSpPr>
@@ -10291,7 +10371,7 @@
       </p:sp>
       <p:sp>
         <p:nvSpPr>
-          <p:cNvPr id="48" name="TextBox 47"/>
+          <p:cNvPr id="51" name="TextBox 50"/>
           <p:cNvSpPr txBox="1"/>
           <p:nvPr/>
         </p:nvSpPr>
@@ -10331,7 +10411,7 @@
       </p:sp>
       <p:sp>
         <p:nvSpPr>
-          <p:cNvPr id="49" name="Rounded Rectangle 48"/>
+          <p:cNvPr id="52" name="Rounded Rectangle 51"/>
           <p:cNvSpPr/>
           <p:nvPr/>
         </p:nvSpPr>
@@ -10379,7 +10459,7 @@
       </p:sp>
       <p:sp>
         <p:nvSpPr>
-          <p:cNvPr id="50" name="TextBox 49"/>
+          <p:cNvPr id="53" name="TextBox 52"/>
           <p:cNvSpPr txBox="1"/>
           <p:nvPr/>
         </p:nvSpPr>
@@ -10419,7 +10499,7 @@
       </p:sp>
       <p:sp>
         <p:nvSpPr>
-          <p:cNvPr id="51" name="TextBox 50"/>
+          <p:cNvPr id="54" name="TextBox 53"/>
           <p:cNvSpPr txBox="1"/>
           <p:nvPr/>
         </p:nvSpPr>
@@ -10459,7 +10539,7 @@
       </p:sp>
       <p:sp>
         <p:nvSpPr>
-          <p:cNvPr id="52" name="Rounded Rectangle 51"/>
+          <p:cNvPr id="55" name="Rounded Rectangle 54"/>
           <p:cNvSpPr/>
           <p:nvPr/>
         </p:nvSpPr>
@@ -10507,7 +10587,7 @@
       </p:sp>
       <p:sp>
         <p:nvSpPr>
-          <p:cNvPr id="53" name="TextBox 52"/>
+          <p:cNvPr id="56" name="TextBox 55"/>
           <p:cNvSpPr txBox="1"/>
           <p:nvPr/>
         </p:nvSpPr>
@@ -10547,7 +10627,7 @@
       </p:sp>
       <p:sp>
         <p:nvSpPr>
-          <p:cNvPr id="54" name="TextBox 53"/>
+          <p:cNvPr id="57" name="TextBox 56"/>
           <p:cNvSpPr txBox="1"/>
           <p:nvPr/>
         </p:nvSpPr>
@@ -10587,7 +10667,7 @@
       </p:sp>
       <p:sp>
         <p:nvSpPr>
-          <p:cNvPr id="55" name="Rounded Rectangle 54"/>
+          <p:cNvPr id="58" name="Rounded Rectangle 57"/>
           <p:cNvSpPr/>
           <p:nvPr/>
         </p:nvSpPr>
@@ -10635,7 +10715,7 @@
       </p:sp>
       <p:sp>
         <p:nvSpPr>
-          <p:cNvPr id="56" name="TextBox 55"/>
+          <p:cNvPr id="59" name="TextBox 58"/>
           <p:cNvSpPr txBox="1"/>
           <p:nvPr/>
         </p:nvSpPr>
@@ -10675,7 +10755,7 @@
       </p:sp>
       <p:sp>
         <p:nvSpPr>
-          <p:cNvPr id="57" name="TextBox 56"/>
+          <p:cNvPr id="60" name="TextBox 59"/>
           <p:cNvSpPr txBox="1"/>
           <p:nvPr/>
         </p:nvSpPr>
@@ -10715,7 +10795,7 @@
       </p:sp>
       <p:sp>
         <p:nvSpPr>
-          <p:cNvPr id="58" name="Rounded Rectangle 57"/>
+          <p:cNvPr id="61" name="Rounded Rectangle 60"/>
           <p:cNvSpPr/>
           <p:nvPr/>
         </p:nvSpPr>
@@ -10763,7 +10843,7 @@
       </p:sp>
       <p:sp>
         <p:nvSpPr>
-          <p:cNvPr id="59" name="TextBox 58"/>
+          <p:cNvPr id="62" name="TextBox 61"/>
           <p:cNvSpPr txBox="1"/>
           <p:nvPr/>
         </p:nvSpPr>
@@ -10803,7 +10883,7 @@
       </p:sp>
       <p:sp>
         <p:nvSpPr>
-          <p:cNvPr id="60" name="TextBox 59"/>
+          <p:cNvPr id="63" name="TextBox 62"/>
           <p:cNvSpPr txBox="1"/>
           <p:nvPr/>
         </p:nvSpPr>
@@ -10843,7 +10923,7 @@
       </p:sp>
       <p:sp>
         <p:nvSpPr>
-          <p:cNvPr id="61" name="Rounded Rectangle 60"/>
+          <p:cNvPr id="64" name="Rounded Rectangle 63"/>
           <p:cNvSpPr/>
           <p:nvPr/>
         </p:nvSpPr>
@@ -10889,7 +10969,7 @@
       </p:sp>
       <p:sp>
         <p:nvSpPr>
-          <p:cNvPr id="62" name="TextBox 61"/>
+          <p:cNvPr id="65" name="TextBox 64"/>
           <p:cNvSpPr txBox="1"/>
           <p:nvPr/>
         </p:nvSpPr>

--- a/cache_city/캐시의_도시_발전기획서.pptx
+++ b/cache_city/캐시의_도시_발전기획서.pptx
@@ -3489,16 +3489,16 @@
         </p:nvSpPr>
         <p:spPr>
           <a:xfrm>
-            <a:off x="777240" y="5538520"/>
-            <a:ext cx="5349240" cy="397840"/>
-          </a:xfrm>
-          <a:prstGeom prst="rect">
-            <a:avLst/>
-          </a:prstGeom>
-          <a:noFill/>
-        </p:spPr>
-        <p:txBody>
-          <a:bodyPr wrap="square" anchor="t" lIns="9144" rIns="9144" tIns="0" bIns="0">
+            <a:off x="777240" y="5532120"/>
+            <a:ext cx="5349240" cy="822960"/>
+          </a:xfrm>
+          <a:prstGeom prst="rect">
+            <a:avLst/>
+          </a:prstGeom>
+          <a:noFill/>
+        </p:spPr>
+        <p:txBody>
+          <a:bodyPr wrap="square" anchor="t" lIns="9144" rIns="9144" tIns="6400" bIns="6400">
             <a:noAutofit/>
           </a:bodyPr>
           <a:lstStyle/>
@@ -3507,6 +3507,9 @@
               <a:lnSpc>
                 <a:spcPct val="135000"/>
               </a:lnSpc>
+              <a:spcAft>
+                <a:spcPts val="113"/>
+              </a:spcAft>
             </a:pPr>
             <a:r>
               <a:rPr sz="950" b="0" i="0">
@@ -3519,51 +3522,28 @@
               <a:t>원천  『리뷰s』 영화 ‘빌’ 리뷰 · 도서 ‘죽음의 미로’ 리뷰</a:t>
             </a:r>
           </a:p>
+          <a:p>
+            <a:pPr algn="l">
+              <a:lnSpc>
+                <a:spcPct val="135000"/>
+              </a:lnSpc>
+            </a:pPr>
+            <a:r>
+              <a:rPr sz="950" b="0" i="0">
+                <a:solidFill>
+                  <a:srgbClr val="AFB8C6"/>
+                </a:solidFill>
+                <a:latin typeface="Malgun Gothic"/>
+                <a:ea typeface="Malgun Gothic"/>
+              </a:rPr>
+              <a:t>         『파편들』 15 ‘초코 케익이 먹고 싶다’</a:t>
+            </a:r>
+          </a:p>
         </p:txBody>
       </p:sp>
       <p:sp>
         <p:nvSpPr>
           <p:cNvPr id="12" name="TextBox 11"/>
-          <p:cNvSpPr txBox="1"/>
-          <p:nvPr/>
-        </p:nvSpPr>
-        <p:spPr>
-          <a:xfrm>
-            <a:off x="777240" y="5950839"/>
-            <a:ext cx="5349240" cy="397840"/>
-          </a:xfrm>
-          <a:prstGeom prst="rect">
-            <a:avLst/>
-          </a:prstGeom>
-          <a:noFill/>
-        </p:spPr>
-        <p:txBody>
-          <a:bodyPr wrap="square" anchor="t" lIns="9144" rIns="9144" tIns="0" bIns="0">
-            <a:noAutofit/>
-          </a:bodyPr>
-          <a:lstStyle/>
-          <a:p>
-            <a:pPr algn="l">
-              <a:lnSpc>
-                <a:spcPct val="135000"/>
-              </a:lnSpc>
-            </a:pPr>
-            <a:r>
-              <a:rPr sz="950" b="0" i="0">
-                <a:solidFill>
-                  <a:srgbClr val="AFB8C6"/>
-                </a:solidFill>
-                <a:latin typeface="Malgun Gothic"/>
-                <a:ea typeface="Malgun Gothic"/>
-              </a:rPr>
-              <a:t>         『파편들』 15 ‘초코 케익이 먹고 싶다’</a:t>
-            </a:r>
-          </a:p>
-        </p:txBody>
-      </p:sp>
-      <p:sp>
-        <p:nvSpPr>
-          <p:cNvPr id="13" name="TextBox 12"/>
           <p:cNvSpPr txBox="1"/>
           <p:nvPr/>
         </p:nvSpPr>
@@ -3603,7 +3583,7 @@
       </p:sp>
       <p:sp>
         <p:nvSpPr>
-          <p:cNvPr id="14" name="Rounded Rectangle 13"/>
+          <p:cNvPr id="13" name="Rounded Rectangle 12"/>
           <p:cNvSpPr/>
           <p:nvPr/>
         </p:nvSpPr>
@@ -3651,7 +3631,7 @@
       </p:sp>
       <p:sp>
         <p:nvSpPr>
-          <p:cNvPr id="15" name="Rectangle 14"/>
+          <p:cNvPr id="14" name="Rectangle 13"/>
           <p:cNvSpPr/>
           <p:nvPr/>
         </p:nvSpPr>
@@ -3695,7 +3675,7 @@
       </p:sp>
       <p:sp>
         <p:nvSpPr>
-          <p:cNvPr id="16" name="TextBox 15"/>
+          <p:cNvPr id="15" name="TextBox 14"/>
           <p:cNvSpPr txBox="1"/>
           <p:nvPr/>
         </p:nvSpPr>
@@ -3735,7 +3715,7 @@
       </p:sp>
       <p:sp>
         <p:nvSpPr>
-          <p:cNvPr id="17" name="TextBox 16"/>
+          <p:cNvPr id="16" name="TextBox 15"/>
           <p:cNvSpPr txBox="1"/>
           <p:nvPr/>
         </p:nvSpPr>
@@ -3775,7 +3755,7 @@
       </p:sp>
       <p:sp>
         <p:nvSpPr>
-          <p:cNvPr id="18" name="TextBox 17"/>
+          <p:cNvPr id="17" name="TextBox 16"/>
           <p:cNvSpPr txBox="1"/>
           <p:nvPr/>
         </p:nvSpPr>
@@ -3815,7 +3795,7 @@
       </p:sp>
       <p:sp>
         <p:nvSpPr>
-          <p:cNvPr id="19" name="Rounded Rectangle 18"/>
+          <p:cNvPr id="18" name="Rounded Rectangle 17"/>
           <p:cNvSpPr/>
           <p:nvPr/>
         </p:nvSpPr>
@@ -3863,7 +3843,7 @@
       </p:sp>
       <p:sp>
         <p:nvSpPr>
-          <p:cNvPr id="20" name="Rectangle 19"/>
+          <p:cNvPr id="19" name="Rectangle 18"/>
           <p:cNvSpPr/>
           <p:nvPr/>
         </p:nvSpPr>
@@ -3907,7 +3887,7 @@
       </p:sp>
       <p:sp>
         <p:nvSpPr>
-          <p:cNvPr id="21" name="TextBox 20"/>
+          <p:cNvPr id="20" name="TextBox 19"/>
           <p:cNvSpPr txBox="1"/>
           <p:nvPr/>
         </p:nvSpPr>
@@ -3947,7 +3927,7 @@
       </p:sp>
       <p:sp>
         <p:nvSpPr>
-          <p:cNvPr id="22" name="TextBox 21"/>
+          <p:cNvPr id="21" name="TextBox 20"/>
           <p:cNvSpPr txBox="1"/>
           <p:nvPr/>
         </p:nvSpPr>
@@ -3987,7 +3967,7 @@
       </p:sp>
       <p:sp>
         <p:nvSpPr>
-          <p:cNvPr id="23" name="TextBox 22"/>
+          <p:cNvPr id="22" name="TextBox 21"/>
           <p:cNvSpPr txBox="1"/>
           <p:nvPr/>
         </p:nvSpPr>
@@ -4027,7 +4007,7 @@
       </p:sp>
       <p:sp>
         <p:nvSpPr>
-          <p:cNvPr id="24" name="Rounded Rectangle 23"/>
+          <p:cNvPr id="23" name="Rounded Rectangle 22"/>
           <p:cNvSpPr/>
           <p:nvPr/>
         </p:nvSpPr>
@@ -4075,7 +4055,7 @@
       </p:sp>
       <p:sp>
         <p:nvSpPr>
-          <p:cNvPr id="25" name="Rectangle 24"/>
+          <p:cNvPr id="24" name="Rectangle 23"/>
           <p:cNvSpPr/>
           <p:nvPr/>
         </p:nvSpPr>
@@ -4119,7 +4099,7 @@
       </p:sp>
       <p:sp>
         <p:nvSpPr>
-          <p:cNvPr id="26" name="TextBox 25"/>
+          <p:cNvPr id="25" name="TextBox 24"/>
           <p:cNvSpPr txBox="1"/>
           <p:nvPr/>
         </p:nvSpPr>
@@ -4159,7 +4139,7 @@
       </p:sp>
       <p:sp>
         <p:nvSpPr>
-          <p:cNvPr id="27" name="TextBox 26"/>
+          <p:cNvPr id="26" name="TextBox 25"/>
           <p:cNvSpPr txBox="1"/>
           <p:nvPr/>
         </p:nvSpPr>
@@ -4199,7 +4179,7 @@
       </p:sp>
       <p:sp>
         <p:nvSpPr>
-          <p:cNvPr id="28" name="TextBox 27"/>
+          <p:cNvPr id="27" name="TextBox 26"/>
           <p:cNvSpPr txBox="1"/>
           <p:nvPr/>
         </p:nvSpPr>
@@ -4239,7 +4219,7 @@
       </p:sp>
       <p:sp>
         <p:nvSpPr>
-          <p:cNvPr id="29" name="TextBox 28"/>
+          <p:cNvPr id="28" name="TextBox 27"/>
           <p:cNvSpPr txBox="1"/>
           <p:nvPr/>
         </p:nvSpPr>
@@ -9681,16 +9661,16 @@
         </p:nvSpPr>
         <p:spPr>
           <a:xfrm>
-            <a:off x="832103" y="4505248"/>
-            <a:ext cx="1463040" cy="325374"/>
-          </a:xfrm>
-          <a:prstGeom prst="rect">
-            <a:avLst/>
-          </a:prstGeom>
-          <a:noFill/>
-        </p:spPr>
-        <p:txBody>
-          <a:bodyPr wrap="square" anchor="t" lIns="9144" rIns="9144" tIns="0" bIns="0">
+            <a:off x="832103" y="4498848"/>
+            <a:ext cx="1463040" cy="676656"/>
+          </a:xfrm>
+          <a:prstGeom prst="rect">
+            <a:avLst/>
+          </a:prstGeom>
+          <a:noFill/>
+        </p:spPr>
+        <p:txBody>
+          <a:bodyPr wrap="square" anchor="t" lIns="9144" rIns="9144" tIns="6400" bIns="6400">
             <a:noAutofit/>
           </a:bodyPr>
           <a:lstStyle/>
@@ -9699,6 +9679,9 @@
               <a:lnSpc>
                 <a:spcPct val="118000"/>
               </a:lnSpc>
+              <a:spcAft>
+                <a:spcPts val="103"/>
+              </a:spcAft>
             </a:pPr>
             <a:r>
               <a:rPr sz="860" b="0" i="0">
@@ -9711,29 +9694,6 @@
               <a:t>“초코 케익이 먹고 싶다”</a:t>
             </a:r>
           </a:p>
-        </p:txBody>
-      </p:sp>
-      <p:sp>
-        <p:nvSpPr>
-          <p:cNvPr id="35" name="TextBox 34"/>
-          <p:cNvSpPr txBox="1"/>
-          <p:nvPr/>
-        </p:nvSpPr>
-        <p:spPr>
-          <a:xfrm>
-            <a:off x="832103" y="4843729"/>
-            <a:ext cx="1463040" cy="325374"/>
-          </a:xfrm>
-          <a:prstGeom prst="rect">
-            <a:avLst/>
-          </a:prstGeom>
-          <a:noFill/>
-        </p:spPr>
-        <p:txBody>
-          <a:bodyPr wrap="square" anchor="t" lIns="9144" rIns="9144" tIns="0" bIns="0">
-            <a:noAutofit/>
-          </a:bodyPr>
-          <a:lstStyle/>
           <a:p>
             <a:pPr algn="ctr">
               <a:lnSpc>
@@ -9755,7 +9715,7 @@
       </p:sp>
       <p:cxnSp>
         <p:nvCxnSpPr>
-          <p:cNvPr id="36" name="Connector 35"/>
+          <p:cNvPr id="35" name="Connector 34"/>
           <p:cNvCxnSpPr/>
           <p:nvPr/>
         </p:nvCxnSpPr>
@@ -9791,7 +9751,7 @@
       </p:cxnSp>
       <p:sp>
         <p:nvSpPr>
-          <p:cNvPr id="37" name="Rounded Rectangle 36"/>
+          <p:cNvPr id="36" name="Rounded Rectangle 35"/>
           <p:cNvSpPr/>
           <p:nvPr/>
         </p:nvSpPr>
@@ -9839,7 +9799,7 @@
       </p:sp>
       <p:sp>
         <p:nvSpPr>
-          <p:cNvPr id="38" name="TextBox 37"/>
+          <p:cNvPr id="37" name="TextBox 36"/>
           <p:cNvSpPr txBox="1"/>
           <p:nvPr/>
         </p:nvSpPr>
@@ -9879,22 +9839,22 @@
       </p:sp>
       <p:sp>
         <p:nvSpPr>
-          <p:cNvPr id="39" name="TextBox 38"/>
-          <p:cNvSpPr txBox="1"/>
-          <p:nvPr/>
-        </p:nvSpPr>
-        <p:spPr>
-          <a:xfrm>
-            <a:off x="2615184" y="4505248"/>
-            <a:ext cx="1463040" cy="325374"/>
-          </a:xfrm>
-          <a:prstGeom prst="rect">
-            <a:avLst/>
-          </a:prstGeom>
-          <a:noFill/>
-        </p:spPr>
-        <p:txBody>
-          <a:bodyPr wrap="square" anchor="t" lIns="9144" rIns="9144" tIns="0" bIns="0">
+          <p:cNvPr id="38" name="TextBox 37"/>
+          <p:cNvSpPr txBox="1"/>
+          <p:nvPr/>
+        </p:nvSpPr>
+        <p:spPr>
+          <a:xfrm>
+            <a:off x="2615184" y="4498848"/>
+            <a:ext cx="1463040" cy="676656"/>
+          </a:xfrm>
+          <a:prstGeom prst="rect">
+            <a:avLst/>
+          </a:prstGeom>
+          <a:noFill/>
+        </p:spPr>
+        <p:txBody>
+          <a:bodyPr wrap="square" anchor="t" lIns="9144" rIns="9144" tIns="6400" bIns="6400">
             <a:noAutofit/>
           </a:bodyPr>
           <a:lstStyle/>
@@ -9903,6 +9863,9 @@
               <a:lnSpc>
                 <a:spcPct val="118000"/>
               </a:lnSpc>
+              <a:spcAft>
+                <a:spcPts val="103"/>
+              </a:spcAft>
             </a:pPr>
             <a:r>
               <a:rPr sz="860" b="0" i="0">
@@ -9915,29 +9878,6 @@
               <a:t>광고 #A-0417의</a:t>
             </a:r>
           </a:p>
-        </p:txBody>
-      </p:sp>
-      <p:sp>
-        <p:nvSpPr>
-          <p:cNvPr id="40" name="TextBox 39"/>
-          <p:cNvSpPr txBox="1"/>
-          <p:nvPr/>
-        </p:nvSpPr>
-        <p:spPr>
-          <a:xfrm>
-            <a:off x="2615184" y="4843729"/>
-            <a:ext cx="1463040" cy="325374"/>
-          </a:xfrm>
-          <a:prstGeom prst="rect">
-            <a:avLst/>
-          </a:prstGeom>
-          <a:noFill/>
-        </p:spPr>
-        <p:txBody>
-          <a:bodyPr wrap="square" anchor="t" lIns="9144" rIns="9144" tIns="0" bIns="0">
-            <a:noAutofit/>
-          </a:bodyPr>
-          <a:lstStyle/>
           <a:p>
             <a:pPr algn="ctr">
               <a:lnSpc>
@@ -9959,7 +9899,7 @@
       </p:sp>
       <p:cxnSp>
         <p:nvCxnSpPr>
-          <p:cNvPr id="41" name="Connector 40"/>
+          <p:cNvPr id="39" name="Connector 38"/>
           <p:cNvCxnSpPr/>
           <p:nvPr/>
         </p:nvCxnSpPr>
@@ -9995,7 +9935,7 @@
       </p:cxnSp>
       <p:sp>
         <p:nvSpPr>
-          <p:cNvPr id="42" name="Rounded Rectangle 41"/>
+          <p:cNvPr id="40" name="Rounded Rectangle 39"/>
           <p:cNvSpPr/>
           <p:nvPr/>
         </p:nvSpPr>
@@ -10043,7 +9983,7 @@
       </p:sp>
       <p:sp>
         <p:nvSpPr>
-          <p:cNvPr id="43" name="TextBox 42"/>
+          <p:cNvPr id="41" name="TextBox 40"/>
           <p:cNvSpPr txBox="1"/>
           <p:nvPr/>
         </p:nvSpPr>
@@ -10083,22 +10023,22 @@
       </p:sp>
       <p:sp>
         <p:nvSpPr>
-          <p:cNvPr id="44" name="TextBox 43"/>
-          <p:cNvSpPr txBox="1"/>
-          <p:nvPr/>
-        </p:nvSpPr>
-        <p:spPr>
-          <a:xfrm>
-            <a:off x="4398264" y="4505248"/>
-            <a:ext cx="1463040" cy="325374"/>
-          </a:xfrm>
-          <a:prstGeom prst="rect">
-            <a:avLst/>
-          </a:prstGeom>
-          <a:noFill/>
-        </p:spPr>
-        <p:txBody>
-          <a:bodyPr wrap="square" anchor="t" lIns="9144" rIns="9144" tIns="0" bIns="0">
+          <p:cNvPr id="42" name="TextBox 41"/>
+          <p:cNvSpPr txBox="1"/>
+          <p:nvPr/>
+        </p:nvSpPr>
+        <p:spPr>
+          <a:xfrm>
+            <a:off x="4398264" y="4498848"/>
+            <a:ext cx="1463040" cy="676656"/>
+          </a:xfrm>
+          <a:prstGeom prst="rect">
+            <a:avLst/>
+          </a:prstGeom>
+          <a:noFill/>
+        </p:spPr>
+        <p:txBody>
+          <a:bodyPr wrap="square" anchor="t" lIns="9144" rIns="9144" tIns="6400" bIns="6400">
             <a:noAutofit/>
           </a:bodyPr>
           <a:lstStyle/>
@@ -10107,6 +10047,9 @@
               <a:lnSpc>
                 <a:spcPct val="118000"/>
               </a:lnSpc>
+              <a:spcAft>
+                <a:spcPts val="103"/>
+              </a:spcAft>
             </a:pPr>
             <a:r>
               <a:rPr sz="860" b="0" i="0">
@@ -10119,29 +10062,6 @@
               <a:t>상태는 그대로</a:t>
             </a:r>
           </a:p>
-        </p:txBody>
-      </p:sp>
-      <p:sp>
-        <p:nvSpPr>
-          <p:cNvPr id="45" name="TextBox 44"/>
-          <p:cNvSpPr txBox="1"/>
-          <p:nvPr/>
-        </p:nvSpPr>
-        <p:spPr>
-          <a:xfrm>
-            <a:off x="4398264" y="4843729"/>
-            <a:ext cx="1463040" cy="325374"/>
-          </a:xfrm>
-          <a:prstGeom prst="rect">
-            <a:avLst/>
-          </a:prstGeom>
-          <a:noFill/>
-        </p:spPr>
-        <p:txBody>
-          <a:bodyPr wrap="square" anchor="t" lIns="9144" rIns="9144" tIns="0" bIns="0">
-            <a:noAutofit/>
-          </a:bodyPr>
-          <a:lstStyle/>
           <a:p>
             <a:pPr algn="ctr">
               <a:lnSpc>
@@ -10163,7 +10083,7 @@
       </p:sp>
       <p:sp>
         <p:nvSpPr>
-          <p:cNvPr id="46" name="TextBox 45"/>
+          <p:cNvPr id="43" name="TextBox 42"/>
           <p:cNvSpPr txBox="1"/>
           <p:nvPr/>
         </p:nvSpPr>
@@ -10203,7 +10123,7 @@
       </p:sp>
       <p:sp>
         <p:nvSpPr>
-          <p:cNvPr id="47" name="TextBox 46"/>
+          <p:cNvPr id="44" name="TextBox 43"/>
           <p:cNvSpPr txBox="1"/>
           <p:nvPr/>
         </p:nvSpPr>
@@ -10243,7 +10163,7 @@
       </p:sp>
       <p:sp>
         <p:nvSpPr>
-          <p:cNvPr id="48" name="TextBox 47"/>
+          <p:cNvPr id="45" name="TextBox 44"/>
           <p:cNvSpPr txBox="1"/>
           <p:nvPr/>
         </p:nvSpPr>
@@ -10283,7 +10203,7 @@
       </p:sp>
       <p:sp>
         <p:nvSpPr>
-          <p:cNvPr id="49" name="Rounded Rectangle 48"/>
+          <p:cNvPr id="46" name="Rounded Rectangle 45"/>
           <p:cNvSpPr/>
           <p:nvPr/>
         </p:nvSpPr>
@@ -10331,7 +10251,7 @@
       </p:sp>
       <p:sp>
         <p:nvSpPr>
-          <p:cNvPr id="50" name="TextBox 49"/>
+          <p:cNvPr id="47" name="TextBox 46"/>
           <p:cNvSpPr txBox="1"/>
           <p:nvPr/>
         </p:nvSpPr>
@@ -10371,7 +10291,7 @@
       </p:sp>
       <p:sp>
         <p:nvSpPr>
-          <p:cNvPr id="51" name="TextBox 50"/>
+          <p:cNvPr id="48" name="TextBox 47"/>
           <p:cNvSpPr txBox="1"/>
           <p:nvPr/>
         </p:nvSpPr>
@@ -10411,7 +10331,7 @@
       </p:sp>
       <p:sp>
         <p:nvSpPr>
-          <p:cNvPr id="52" name="Rounded Rectangle 51"/>
+          <p:cNvPr id="49" name="Rounded Rectangle 48"/>
           <p:cNvSpPr/>
           <p:nvPr/>
         </p:nvSpPr>
@@ -10459,7 +10379,7 @@
       </p:sp>
       <p:sp>
         <p:nvSpPr>
-          <p:cNvPr id="53" name="TextBox 52"/>
+          <p:cNvPr id="50" name="TextBox 49"/>
           <p:cNvSpPr txBox="1"/>
           <p:nvPr/>
         </p:nvSpPr>
@@ -10499,7 +10419,7 @@
       </p:sp>
       <p:sp>
         <p:nvSpPr>
-          <p:cNvPr id="54" name="TextBox 53"/>
+          <p:cNvPr id="51" name="TextBox 50"/>
           <p:cNvSpPr txBox="1"/>
           <p:nvPr/>
         </p:nvSpPr>
@@ -10539,7 +10459,7 @@
       </p:sp>
       <p:sp>
         <p:nvSpPr>
-          <p:cNvPr id="55" name="Rounded Rectangle 54"/>
+          <p:cNvPr id="52" name="Rounded Rectangle 51"/>
           <p:cNvSpPr/>
           <p:nvPr/>
         </p:nvSpPr>
@@ -10587,7 +10507,7 @@
       </p:sp>
       <p:sp>
         <p:nvSpPr>
-          <p:cNvPr id="56" name="TextBox 55"/>
+          <p:cNvPr id="53" name="TextBox 52"/>
           <p:cNvSpPr txBox="1"/>
           <p:nvPr/>
         </p:nvSpPr>
@@ -10627,7 +10547,7 @@
       </p:sp>
       <p:sp>
         <p:nvSpPr>
-          <p:cNvPr id="57" name="TextBox 56"/>
+          <p:cNvPr id="54" name="TextBox 53"/>
           <p:cNvSpPr txBox="1"/>
           <p:nvPr/>
         </p:nvSpPr>
@@ -10667,7 +10587,7 @@
       </p:sp>
       <p:sp>
         <p:nvSpPr>
-          <p:cNvPr id="58" name="Rounded Rectangle 57"/>
+          <p:cNvPr id="55" name="Rounded Rectangle 54"/>
           <p:cNvSpPr/>
           <p:nvPr/>
         </p:nvSpPr>
@@ -10715,7 +10635,7 @@
       </p:sp>
       <p:sp>
         <p:nvSpPr>
-          <p:cNvPr id="59" name="TextBox 58"/>
+          <p:cNvPr id="56" name="TextBox 55"/>
           <p:cNvSpPr txBox="1"/>
           <p:nvPr/>
         </p:nvSpPr>
@@ -10755,7 +10675,7 @@
       </p:sp>
       <p:sp>
         <p:nvSpPr>
-          <p:cNvPr id="60" name="TextBox 59"/>
+          <p:cNvPr id="57" name="TextBox 56"/>
           <p:cNvSpPr txBox="1"/>
           <p:nvPr/>
         </p:nvSpPr>
@@ -10795,7 +10715,7 @@
       </p:sp>
       <p:sp>
         <p:nvSpPr>
-          <p:cNvPr id="61" name="Rounded Rectangle 60"/>
+          <p:cNvPr id="58" name="Rounded Rectangle 57"/>
           <p:cNvSpPr/>
           <p:nvPr/>
         </p:nvSpPr>
@@ -10843,7 +10763,7 @@
       </p:sp>
       <p:sp>
         <p:nvSpPr>
-          <p:cNvPr id="62" name="TextBox 61"/>
+          <p:cNvPr id="59" name="TextBox 58"/>
           <p:cNvSpPr txBox="1"/>
           <p:nvPr/>
         </p:nvSpPr>
@@ -10883,7 +10803,7 @@
       </p:sp>
       <p:sp>
         <p:nvSpPr>
-          <p:cNvPr id="63" name="TextBox 62"/>
+          <p:cNvPr id="60" name="TextBox 59"/>
           <p:cNvSpPr txBox="1"/>
           <p:nvPr/>
         </p:nvSpPr>
@@ -10923,7 +10843,7 @@
       </p:sp>
       <p:sp>
         <p:nvSpPr>
-          <p:cNvPr id="64" name="Rounded Rectangle 63"/>
+          <p:cNvPr id="61" name="Rounded Rectangle 60"/>
           <p:cNvSpPr/>
           <p:nvPr/>
         </p:nvSpPr>
@@ -10969,7 +10889,7 @@
       </p:sp>
       <p:sp>
         <p:nvSpPr>
-          <p:cNvPr id="65" name="TextBox 64"/>
+          <p:cNvPr id="62" name="TextBox 61"/>
           <p:cNvSpPr txBox="1"/>
           <p:nvPr/>
         </p:nvSpPr>
